--- a/output/wordlabs-hold-3day.pptx
+++ b/output/wordlabs-hold-3day.pptx
@@ -4279,7 +4279,7 @@
                 <a:ea typeface="Calibri" pitchFamily="34" charset="-122"/>
                 <a:cs typeface="Calibri" pitchFamily="34" charset="-120"/>
               </a:rPr>
-              <a:t>Origin: Old English: haldan</a:t>
+              <a:t>Origin: Latin: holdaz</a:t>
             </a:r>
             <a:endParaRPr lang="en-US" sz="1300" dirty="0"/>
           </a:p>
@@ -5622,7 +5622,7 @@
                 <a:ea typeface="Trebuchet MS" pitchFamily="34" charset="-122"/>
                 <a:cs typeface="Trebuchet MS" pitchFamily="34" charset="-120"/>
               </a:rPr>
-              <a:t>1</a:t>
+              <a:t>0</a:t>
             </a:r>
             <a:pPr algn="ctr" indent="0" marL="0">
               <a:buNone/>
@@ -6040,7 +6040,7 @@
                 <a:ea typeface="Calibri" pitchFamily="34" charset="-122"/>
                 <a:cs typeface="Calibri" pitchFamily="34" charset="-120"/>
               </a:rPr>
-              <a:t>The teacher chose to </a:t>
+              <a:t>The </a:t>
             </a:r>
             <a:pPr algn="l" indent="0" marL="0">
               <a:buNone/>
@@ -6057,7 +6057,7 @@
                 <a:ea typeface="Calibri" pitchFamily="34" charset="-122"/>
                 <a:cs typeface="Calibri" pitchFamily="34" charset="-120"/>
               </a:rPr>
-              <a:t>withhold</a:t>
+              <a:t>freeholder</a:t>
             </a:r>
             <a:pPr algn="l" indent="0" marL="0">
               <a:buNone/>
@@ -6071,7 +6071,7 @@
                 <a:ea typeface="Calibri" pitchFamily="34" charset="-122"/>
                 <a:cs typeface="Calibri" pitchFamily="34" charset="-120"/>
               </a:rPr>
-              <a:t> the test results, but she reminded the class to </a:t>
+              <a:t> decided to </a:t>
             </a:r>
             <a:pPr algn="l" indent="0" marL="0">
               <a:buNone/>
@@ -6088,7 +6088,7 @@
                 <a:ea typeface="Calibri" pitchFamily="34" charset="-122"/>
                 <a:cs typeface="Calibri" pitchFamily="34" charset="-120"/>
               </a:rPr>
-              <a:t>uphold</a:t>
+              <a:t>withhold</a:t>
             </a:r>
             <a:pPr algn="l" indent="0" marL="0">
               <a:buNone/>
@@ -6102,7 +6102,7 @@
                 <a:ea typeface="Calibri" pitchFamily="34" charset="-122"/>
                 <a:cs typeface="Calibri" pitchFamily="34" charset="-120"/>
               </a:rPr>
-              <a:t> their honesty at all times.</a:t>
+              <a:t> the documents until the meeting was over.</a:t>
             </a:r>
             <a:endParaRPr lang="en-US" sz="1800" dirty="0"/>
           </a:p>
@@ -6257,7 +6257,7 @@
                 <a:ea typeface="Trebuchet MS" pitchFamily="34" charset="-122"/>
                 <a:cs typeface="Trebuchet MS" pitchFamily="34" charset="-120"/>
               </a:rPr>
-              <a:t>withhold</a:t>
+              <a:t>freeholder</a:t>
             </a:r>
             <a:endParaRPr lang="en-US" sz="1400" dirty="0"/>
           </a:p>
@@ -6385,7 +6385,7 @@
                 <a:ea typeface="Trebuchet MS" pitchFamily="34" charset="-122"/>
                 <a:cs typeface="Trebuchet MS" pitchFamily="34" charset="-120"/>
               </a:rPr>
-              <a:t>uphold</a:t>
+              <a:t>withhold</a:t>
             </a:r>
             <a:endParaRPr lang="en-US" sz="1400" dirty="0"/>
           </a:p>
@@ -6855,7 +6855,7 @@
                 <a:ea typeface="Trebuchet MS" pitchFamily="34" charset="-122"/>
                 <a:cs typeface="Trebuchet MS" pitchFamily="34" charset="-120"/>
               </a:rPr>
-              <a:t>withhold</a:t>
+              <a:t>freeholder</a:t>
             </a:r>
             <a:endParaRPr lang="en-US" sz="2800" dirty="0"/>
           </a:p>
@@ -7682,7 +7682,7 @@
                 <a:ea typeface="Trebuchet MS" pitchFamily="34" charset="-122"/>
                 <a:cs typeface="Trebuchet MS" pitchFamily="34" charset="-120"/>
               </a:rPr>
-              <a:t>withhold</a:t>
+              <a:t>freeholder</a:t>
             </a:r>
             <a:endParaRPr lang="en-US" sz="2800" dirty="0"/>
           </a:p>
@@ -7762,7 +7762,7 @@
         </p:nvSpPr>
         <p:spPr>
           <a:xfrm>
-            <a:off x="2938272" y="2258568"/>
+            <a:off x="2221992" y="2258568"/>
             <a:ext cx="1828800" cy="292608"/>
           </a:xfrm>
           <a:prstGeom prst="rect">
@@ -7796,7 +7796,7 @@
         </p:nvSpPr>
         <p:spPr>
           <a:xfrm>
-            <a:off x="2938272" y="2258568"/>
+            <a:off x="2221992" y="2258568"/>
             <a:ext cx="1828800" cy="292608"/>
           </a:xfrm>
           <a:prstGeom prst="rect">
@@ -7821,7 +7821,7 @@
                 <a:ea typeface="Trebuchet MS" pitchFamily="34" charset="-122"/>
                 <a:cs typeface="Trebuchet MS" pitchFamily="34" charset="-120"/>
               </a:rPr>
-              <a:t>with</a:t>
+              <a:t>free</a:t>
             </a:r>
             <a:endParaRPr lang="en-US" sz="1300" dirty="0"/>
           </a:p>
@@ -7835,7 +7835,7 @@
         </p:nvSpPr>
         <p:spPr>
           <a:xfrm>
-            <a:off x="2938272" y="2569464"/>
+            <a:off x="2221992" y="2569464"/>
             <a:ext cx="1828800" cy="201168"/>
           </a:xfrm>
           <a:prstGeom prst="rect">
@@ -7860,7 +7860,7 @@
                 <a:ea typeface="Calibri" pitchFamily="34" charset="-122"/>
                 <a:cs typeface="Calibri" pitchFamily="34" charset="-120"/>
               </a:rPr>
-              <a:t>against, back</a:t>
+              <a:t>not restricted or owned by another</a:t>
             </a:r>
             <a:endParaRPr lang="en-US" sz="850" dirty="0"/>
           </a:p>
@@ -7874,7 +7874,7 @@
         </p:nvSpPr>
         <p:spPr>
           <a:xfrm>
-            <a:off x="5803392" y="2258568"/>
+            <a:off x="4370832" y="2258568"/>
             <a:ext cx="1828800" cy="292608"/>
           </a:xfrm>
           <a:prstGeom prst="rect">
@@ -7908,7 +7908,7 @@
         </p:nvSpPr>
         <p:spPr>
           <a:xfrm>
-            <a:off x="5803392" y="2258568"/>
+            <a:off x="4370832" y="2258568"/>
             <a:ext cx="1828800" cy="292608"/>
           </a:xfrm>
           <a:prstGeom prst="rect">
@@ -7947,7 +7947,7 @@
         </p:nvSpPr>
         <p:spPr>
           <a:xfrm>
-            <a:off x="5803392" y="2569464"/>
+            <a:off x="4370832" y="2569464"/>
             <a:ext cx="1828800" cy="201168"/>
           </a:xfrm>
           <a:prstGeom prst="rect">
@@ -7986,6 +7986,118 @@
         </p:nvSpPr>
         <p:spPr>
           <a:xfrm>
+            <a:off x="6519672" y="2258568"/>
+            <a:ext cx="1828800" cy="292608"/>
+          </a:xfrm>
+          <a:prstGeom prst="rect">
+            <a:avLst>
+              <a:gd name="adj" fmla="val 25000"/>
+            </a:avLst>
+          </a:prstGeom>
+          <a:solidFill>
+            <a:srgbClr val="FCE7F3"/>
+          </a:solidFill>
+          <a:ln w="19050">
+            <a:solidFill>
+              <a:srgbClr val="DB2777"/>
+            </a:solidFill>
+            <a:prstDash val="solid"/>
+          </a:ln>
+          <a:effectLst>
+            <a:outerShdw sx="100000" sy="100000" kx="0" ky="0" algn="bl" rotWithShape="0" blurRad="101600" dist="38100" dir="8100000">
+              <a:srgbClr val="000000">
+                <a:alpha val="12000"/>
+              </a:srgbClr>
+            </a:outerShdw>
+          </a:effectLst>
+        </p:spPr>
+      </p:sp>
+      <p:sp>
+        <p:nvSpPr>
+          <p:cNvPr id="23" name="Text 21"/>
+          <p:cNvSpPr/>
+          <p:nvPr/>
+        </p:nvSpPr>
+        <p:spPr>
+          <a:xfrm>
+            <a:off x="6519672" y="2258568"/>
+            <a:ext cx="1828800" cy="292608"/>
+          </a:xfrm>
+          <a:prstGeom prst="rect">
+            <a:avLst/>
+          </a:prstGeom>
+          <a:noFill/>
+          <a:ln/>
+        </p:spPr>
+        <p:txBody>
+          <a:bodyPr wrap="square" lIns="0" tIns="0" rIns="0" bIns="0" rtlCol="0" anchor="ctr"/>
+          <a:lstStyle/>
+          <a:p>
+            <a:pPr algn="ctr" indent="0" marL="0">
+              <a:buNone/>
+            </a:pPr>
+            <a:r>
+              <a:rPr lang="en-US" sz="1300" b="1" dirty="0">
+                <a:solidFill>
+                  <a:srgbClr val="9D174D"/>
+                </a:solidFill>
+                <a:latin typeface="Trebuchet MS" pitchFamily="34" charset="0"/>
+                <a:ea typeface="Trebuchet MS" pitchFamily="34" charset="-122"/>
+                <a:cs typeface="Trebuchet MS" pitchFamily="34" charset="-120"/>
+              </a:rPr>
+              <a:t>er</a:t>
+            </a:r>
+            <a:endParaRPr lang="en-US" sz="1300" dirty="0"/>
+          </a:p>
+        </p:txBody>
+      </p:sp>
+      <p:sp>
+        <p:nvSpPr>
+          <p:cNvPr id="24" name="Text 22"/>
+          <p:cNvSpPr/>
+          <p:nvPr/>
+        </p:nvSpPr>
+        <p:spPr>
+          <a:xfrm>
+            <a:off x="6519672" y="2569464"/>
+            <a:ext cx="1828800" cy="201168"/>
+          </a:xfrm>
+          <a:prstGeom prst="rect">
+            <a:avLst/>
+          </a:prstGeom>
+          <a:noFill/>
+          <a:ln/>
+        </p:spPr>
+        <p:txBody>
+          <a:bodyPr wrap="square" lIns="0" tIns="0" rIns="0" bIns="0" rtlCol="0" anchor="t"/>
+          <a:lstStyle/>
+          <a:p>
+            <a:pPr algn="ctr" indent="0" marL="0">
+              <a:buNone/>
+            </a:pPr>
+            <a:r>
+              <a:rPr lang="en-US" sz="850" dirty="0">
+                <a:solidFill>
+                  <a:srgbClr val="475569"/>
+                </a:solidFill>
+                <a:latin typeface="Calibri" pitchFamily="34" charset="0"/>
+                <a:ea typeface="Calibri" pitchFamily="34" charset="-122"/>
+                <a:cs typeface="Calibri" pitchFamily="34" charset="-120"/>
+              </a:rPr>
+              <a:t>a person who does something</a:t>
+            </a:r>
+            <a:endParaRPr lang="en-US" sz="850" dirty="0"/>
+          </a:p>
+        </p:txBody>
+      </p:sp>
+      <p:sp>
+        <p:nvSpPr>
+          <p:cNvPr id="25" name="Shape 23"/>
+          <p:cNvSpPr/>
+          <p:nvPr/>
+        </p:nvSpPr>
+        <p:spPr>
+          <a:xfrm>
             <a:off x="365760" y="3273552"/>
             <a:ext cx="1371600" cy="658368"/>
           </a:xfrm>
@@ -8007,7 +8119,7 @@
       </p:sp>
       <p:sp>
         <p:nvSpPr>
-          <p:cNvPr id="23" name="Text 21"/>
+          <p:cNvPr id="26" name="Text 24"/>
           <p:cNvSpPr/>
           <p:nvPr/>
         </p:nvSpPr>
@@ -8046,7 +8158,7 @@
       </p:sp>
       <p:sp>
         <p:nvSpPr>
-          <p:cNvPr id="24" name="Shape 22"/>
+          <p:cNvPr id="27" name="Shape 25"/>
           <p:cNvSpPr/>
           <p:nvPr/>
         </p:nvSpPr>
@@ -8073,7 +8185,7 @@
       </p:sp>
       <p:sp>
         <p:nvSpPr>
-          <p:cNvPr id="25" name="Text 23"/>
+          <p:cNvPr id="28" name="Text 26"/>
           <p:cNvSpPr/>
           <p:nvPr/>
         </p:nvSpPr>
@@ -8112,7 +8224,7 @@
       </p:sp>
       <p:sp>
         <p:nvSpPr>
-          <p:cNvPr id="26" name="Shape 24"/>
+          <p:cNvPr id="29" name="Shape 27"/>
           <p:cNvSpPr/>
           <p:nvPr/>
         </p:nvSpPr>
@@ -8139,7 +8251,7 @@
       </p:sp>
       <p:sp>
         <p:nvSpPr>
-          <p:cNvPr id="27" name="Text 25"/>
+          <p:cNvPr id="30" name="Text 28"/>
           <p:cNvSpPr/>
           <p:nvPr/>
         </p:nvSpPr>
@@ -8178,7 +8290,7 @@
       </p:sp>
       <p:sp>
         <p:nvSpPr>
-          <p:cNvPr id="28" name="Shape 26"/>
+          <p:cNvPr id="31" name="Shape 29"/>
           <p:cNvSpPr/>
           <p:nvPr/>
         </p:nvSpPr>
@@ -8205,7 +8317,7 @@
       </p:sp>
       <p:sp>
         <p:nvSpPr>
-          <p:cNvPr id="29" name="Text 27"/>
+          <p:cNvPr id="32" name="Text 30"/>
           <p:cNvSpPr/>
           <p:nvPr/>
         </p:nvSpPr>
@@ -8667,7 +8779,7 @@
                 <a:ea typeface="Trebuchet MS" pitchFamily="34" charset="-122"/>
                 <a:cs typeface="Trebuchet MS" pitchFamily="34" charset="-120"/>
               </a:rPr>
-              <a:t>withhold</a:t>
+              <a:t>freeholder</a:t>
             </a:r>
             <a:endParaRPr lang="en-US" sz="2800" dirty="0"/>
           </a:p>
@@ -8747,7 +8859,7 @@
         </p:nvSpPr>
         <p:spPr>
           <a:xfrm>
-            <a:off x="2938272" y="2258568"/>
+            <a:off x="2221992" y="2258568"/>
             <a:ext cx="1828800" cy="292608"/>
           </a:xfrm>
           <a:prstGeom prst="rect">
@@ -8781,7 +8893,7 @@
         </p:nvSpPr>
         <p:spPr>
           <a:xfrm>
-            <a:off x="2938272" y="2258568"/>
+            <a:off x="2221992" y="2258568"/>
             <a:ext cx="1828800" cy="292608"/>
           </a:xfrm>
           <a:prstGeom prst="rect">
@@ -8806,7 +8918,7 @@
                 <a:ea typeface="Trebuchet MS" pitchFamily="34" charset="-122"/>
                 <a:cs typeface="Trebuchet MS" pitchFamily="34" charset="-120"/>
               </a:rPr>
-              <a:t>with</a:t>
+              <a:t>free</a:t>
             </a:r>
             <a:endParaRPr lang="en-US" sz="1300" dirty="0"/>
           </a:p>
@@ -8820,7 +8932,7 @@
         </p:nvSpPr>
         <p:spPr>
           <a:xfrm>
-            <a:off x="2938272" y="2569464"/>
+            <a:off x="2221992" y="2569464"/>
             <a:ext cx="1828800" cy="201168"/>
           </a:xfrm>
           <a:prstGeom prst="rect">
@@ -8845,7 +8957,7 @@
                 <a:ea typeface="Calibri" pitchFamily="34" charset="-122"/>
                 <a:cs typeface="Calibri" pitchFamily="34" charset="-120"/>
               </a:rPr>
-              <a:t>against, back</a:t>
+              <a:t>not restricted or owned by another</a:t>
             </a:r>
             <a:endParaRPr lang="en-US" sz="850" dirty="0"/>
           </a:p>
@@ -8859,7 +8971,7 @@
         </p:nvSpPr>
         <p:spPr>
           <a:xfrm>
-            <a:off x="5803392" y="2258568"/>
+            <a:off x="4370832" y="2258568"/>
             <a:ext cx="1828800" cy="292608"/>
           </a:xfrm>
           <a:prstGeom prst="rect">
@@ -8893,7 +9005,7 @@
         </p:nvSpPr>
         <p:spPr>
           <a:xfrm>
-            <a:off x="5803392" y="2258568"/>
+            <a:off x="4370832" y="2258568"/>
             <a:ext cx="1828800" cy="292608"/>
           </a:xfrm>
           <a:prstGeom prst="rect">
@@ -8932,7 +9044,7 @@
         </p:nvSpPr>
         <p:spPr>
           <a:xfrm>
-            <a:off x="5803392" y="2569464"/>
+            <a:off x="4370832" y="2569464"/>
             <a:ext cx="1828800" cy="201168"/>
           </a:xfrm>
           <a:prstGeom prst="rect">
@@ -8971,6 +9083,118 @@
         </p:nvSpPr>
         <p:spPr>
           <a:xfrm>
+            <a:off x="6519672" y="2258568"/>
+            <a:ext cx="1828800" cy="292608"/>
+          </a:xfrm>
+          <a:prstGeom prst="rect">
+            <a:avLst>
+              <a:gd name="adj" fmla="val 25000"/>
+            </a:avLst>
+          </a:prstGeom>
+          <a:solidFill>
+            <a:srgbClr val="FCE7F3"/>
+          </a:solidFill>
+          <a:ln w="19050">
+            <a:solidFill>
+              <a:srgbClr val="DB2777"/>
+            </a:solidFill>
+            <a:prstDash val="solid"/>
+          </a:ln>
+          <a:effectLst>
+            <a:outerShdw sx="100000" sy="100000" kx="0" ky="0" algn="bl" rotWithShape="0" blurRad="101600" dist="38100" dir="8100000">
+              <a:srgbClr val="000000">
+                <a:alpha val="12000"/>
+              </a:srgbClr>
+            </a:outerShdw>
+          </a:effectLst>
+        </p:spPr>
+      </p:sp>
+      <p:sp>
+        <p:nvSpPr>
+          <p:cNvPr id="23" name="Text 21"/>
+          <p:cNvSpPr/>
+          <p:nvPr/>
+        </p:nvSpPr>
+        <p:spPr>
+          <a:xfrm>
+            <a:off x="6519672" y="2258568"/>
+            <a:ext cx="1828800" cy="292608"/>
+          </a:xfrm>
+          <a:prstGeom prst="rect">
+            <a:avLst/>
+          </a:prstGeom>
+          <a:noFill/>
+          <a:ln/>
+        </p:spPr>
+        <p:txBody>
+          <a:bodyPr wrap="square" lIns="0" tIns="0" rIns="0" bIns="0" rtlCol="0" anchor="ctr"/>
+          <a:lstStyle/>
+          <a:p>
+            <a:pPr algn="ctr" indent="0" marL="0">
+              <a:buNone/>
+            </a:pPr>
+            <a:r>
+              <a:rPr lang="en-US" sz="1300" b="1" dirty="0">
+                <a:solidFill>
+                  <a:srgbClr val="9D174D"/>
+                </a:solidFill>
+                <a:latin typeface="Trebuchet MS" pitchFamily="34" charset="0"/>
+                <a:ea typeface="Trebuchet MS" pitchFamily="34" charset="-122"/>
+                <a:cs typeface="Trebuchet MS" pitchFamily="34" charset="-120"/>
+              </a:rPr>
+              <a:t>er</a:t>
+            </a:r>
+            <a:endParaRPr lang="en-US" sz="1300" dirty="0"/>
+          </a:p>
+        </p:txBody>
+      </p:sp>
+      <p:sp>
+        <p:nvSpPr>
+          <p:cNvPr id="24" name="Text 22"/>
+          <p:cNvSpPr/>
+          <p:nvPr/>
+        </p:nvSpPr>
+        <p:spPr>
+          <a:xfrm>
+            <a:off x="6519672" y="2569464"/>
+            <a:ext cx="1828800" cy="201168"/>
+          </a:xfrm>
+          <a:prstGeom prst="rect">
+            <a:avLst/>
+          </a:prstGeom>
+          <a:noFill/>
+          <a:ln/>
+        </p:spPr>
+        <p:txBody>
+          <a:bodyPr wrap="square" lIns="0" tIns="0" rIns="0" bIns="0" rtlCol="0" anchor="t"/>
+          <a:lstStyle/>
+          <a:p>
+            <a:pPr algn="ctr" indent="0" marL="0">
+              <a:buNone/>
+            </a:pPr>
+            <a:r>
+              <a:rPr lang="en-US" sz="850" dirty="0">
+                <a:solidFill>
+                  <a:srgbClr val="475569"/>
+                </a:solidFill>
+                <a:latin typeface="Calibri" pitchFamily="34" charset="0"/>
+                <a:ea typeface="Calibri" pitchFamily="34" charset="-122"/>
+                <a:cs typeface="Calibri" pitchFamily="34" charset="-120"/>
+              </a:rPr>
+              <a:t>a person who does something</a:t>
+            </a:r>
+            <a:endParaRPr lang="en-US" sz="850" dirty="0"/>
+          </a:p>
+        </p:txBody>
+      </p:sp>
+      <p:sp>
+        <p:nvSpPr>
+          <p:cNvPr id="25" name="Shape 23"/>
+          <p:cNvSpPr/>
+          <p:nvPr/>
+        </p:nvSpPr>
+        <p:spPr>
+          <a:xfrm>
             <a:off x="365760" y="3273552"/>
             <a:ext cx="1371600" cy="658368"/>
           </a:xfrm>
@@ -8992,7 +9216,7 @@
       </p:sp>
       <p:sp>
         <p:nvSpPr>
-          <p:cNvPr id="23" name="Text 21"/>
+          <p:cNvPr id="26" name="Text 24"/>
           <p:cNvSpPr/>
           <p:nvPr/>
         </p:nvSpPr>
@@ -9031,7 +9255,7 @@
       </p:sp>
       <p:sp>
         <p:nvSpPr>
-          <p:cNvPr id="24" name="Shape 22"/>
+          <p:cNvPr id="27" name="Shape 25"/>
           <p:cNvSpPr/>
           <p:nvPr/>
         </p:nvSpPr>
@@ -9058,13 +9282,13 @@
       </p:sp>
       <p:sp>
         <p:nvSpPr>
-          <p:cNvPr id="25" name="Shape 23"/>
-          <p:cNvSpPr/>
-          <p:nvPr/>
-        </p:nvSpPr>
-        <p:spPr>
-          <a:xfrm>
-            <a:off x="2999232" y="3364992"/>
+          <p:cNvPr id="28" name="Shape 26"/>
+          <p:cNvSpPr/>
+          <p:nvPr/>
+        </p:nvSpPr>
+        <p:spPr>
+          <a:xfrm>
+            <a:off x="2313432" y="3364992"/>
             <a:ext cx="1645920" cy="475488"/>
           </a:xfrm>
           <a:prstGeom prst="rect">
@@ -9085,13 +9309,13 @@
       </p:sp>
       <p:sp>
         <p:nvSpPr>
-          <p:cNvPr id="26" name="Text 24"/>
-          <p:cNvSpPr/>
-          <p:nvPr/>
-        </p:nvSpPr>
-        <p:spPr>
-          <a:xfrm>
-            <a:off x="2999232" y="3364992"/>
+          <p:cNvPr id="29" name="Text 27"/>
+          <p:cNvSpPr/>
+          <p:nvPr/>
+        </p:nvSpPr>
+        <p:spPr>
+          <a:xfrm>
+            <a:off x="2313432" y="3364992"/>
             <a:ext cx="1645920" cy="475488"/>
           </a:xfrm>
           <a:prstGeom prst="rect">
@@ -9116,7 +9340,7 @@
                 <a:ea typeface="Trebuchet MS" pitchFamily="34" charset="-122"/>
                 <a:cs typeface="Trebuchet MS" pitchFamily="34" charset="-120"/>
               </a:rPr>
-              <a:t>with</a:t>
+              <a:t>free</a:t>
             </a:r>
             <a:endParaRPr lang="en-US" sz="1400" dirty="0"/>
           </a:p>
@@ -9124,14 +9348,14 @@
       </p:sp>
       <p:sp>
         <p:nvSpPr>
-          <p:cNvPr id="27" name="Text 25"/>
-          <p:cNvSpPr/>
-          <p:nvPr/>
-        </p:nvSpPr>
-        <p:spPr>
-          <a:xfrm>
-            <a:off x="4645152" y="3364992"/>
-            <a:ext cx="1097280" cy="475488"/>
+          <p:cNvPr id="30" name="Text 28"/>
+          <p:cNvSpPr/>
+          <p:nvPr/>
+        </p:nvSpPr>
+        <p:spPr>
+          <a:xfrm>
+            <a:off x="3959352" y="3364992"/>
+            <a:ext cx="411480" cy="475488"/>
           </a:xfrm>
           <a:prstGeom prst="rect">
             <a:avLst/>
@@ -9163,13 +9387,13 @@
       </p:sp>
       <p:sp>
         <p:nvSpPr>
-          <p:cNvPr id="28" name="Shape 26"/>
-          <p:cNvSpPr/>
-          <p:nvPr/>
-        </p:nvSpPr>
-        <p:spPr>
-          <a:xfrm>
-            <a:off x="5742432" y="3364992"/>
+          <p:cNvPr id="31" name="Shape 29"/>
+          <p:cNvSpPr/>
+          <p:nvPr/>
+        </p:nvSpPr>
+        <p:spPr>
+          <a:xfrm>
+            <a:off x="4370832" y="3364992"/>
             <a:ext cx="1645920" cy="475488"/>
           </a:xfrm>
           <a:prstGeom prst="rect">
@@ -9190,13 +9414,13 @@
       </p:sp>
       <p:sp>
         <p:nvSpPr>
-          <p:cNvPr id="29" name="Text 27"/>
-          <p:cNvSpPr/>
-          <p:nvPr/>
-        </p:nvSpPr>
-        <p:spPr>
-          <a:xfrm>
-            <a:off x="5742432" y="3364992"/>
+          <p:cNvPr id="32" name="Text 30"/>
+          <p:cNvSpPr/>
+          <p:nvPr/>
+        </p:nvSpPr>
+        <p:spPr>
+          <a:xfrm>
+            <a:off x="4370832" y="3364992"/>
             <a:ext cx="1645920" cy="475488"/>
           </a:xfrm>
           <a:prstGeom prst="rect">
@@ -9221,7 +9445,7 @@
                 <a:ea typeface="Trebuchet MS" pitchFamily="34" charset="-122"/>
                 <a:cs typeface="Trebuchet MS" pitchFamily="34" charset="-120"/>
               </a:rPr>
-              <a:t>hold</a:t>
+              <a:t>hol</a:t>
             </a:r>
             <a:endParaRPr lang="en-US" sz="1400" dirty="0"/>
           </a:p>
@@ -9229,7 +9453,112 @@
       </p:sp>
       <p:sp>
         <p:nvSpPr>
-          <p:cNvPr id="30" name="Shape 28"/>
+          <p:cNvPr id="33" name="Text 31"/>
+          <p:cNvSpPr/>
+          <p:nvPr/>
+        </p:nvSpPr>
+        <p:spPr>
+          <a:xfrm>
+            <a:off x="6016752" y="3364992"/>
+            <a:ext cx="411480" cy="475488"/>
+          </a:xfrm>
+          <a:prstGeom prst="rect">
+            <a:avLst/>
+          </a:prstGeom>
+          <a:noFill/>
+          <a:ln/>
+        </p:spPr>
+        <p:txBody>
+          <a:bodyPr wrap="square" lIns="0" tIns="0" rIns="0" bIns="0" rtlCol="0" anchor="ctr"/>
+          <a:lstStyle/>
+          <a:p>
+            <a:pPr algn="ctr" indent="0" marL="0">
+              <a:buNone/>
+            </a:pPr>
+            <a:r>
+              <a:rPr lang="en-US" sz="1600" b="1" dirty="0">
+                <a:solidFill>
+                  <a:srgbClr val="0D9488"/>
+                </a:solidFill>
+                <a:latin typeface="Trebuchet MS" pitchFamily="34" charset="0"/>
+                <a:ea typeface="Trebuchet MS" pitchFamily="34" charset="-122"/>
+                <a:cs typeface="Trebuchet MS" pitchFamily="34" charset="-120"/>
+              </a:rPr>
+              <a:t>·</a:t>
+            </a:r>
+            <a:endParaRPr lang="en-US" sz="1600" dirty="0"/>
+          </a:p>
+        </p:txBody>
+      </p:sp>
+      <p:sp>
+        <p:nvSpPr>
+          <p:cNvPr id="34" name="Shape 32"/>
+          <p:cNvSpPr/>
+          <p:nvPr/>
+        </p:nvSpPr>
+        <p:spPr>
+          <a:xfrm>
+            <a:off x="6428232" y="3364992"/>
+            <a:ext cx="1645920" cy="475488"/>
+          </a:xfrm>
+          <a:prstGeom prst="rect">
+            <a:avLst>
+              <a:gd name="adj" fmla="val 9615"/>
+            </a:avLst>
+          </a:prstGeom>
+          <a:solidFill>
+            <a:srgbClr val="FFFFFF"/>
+          </a:solidFill>
+          <a:ln w="12700">
+            <a:solidFill>
+              <a:srgbClr val="0D9488"/>
+            </a:solidFill>
+            <a:prstDash val="solid"/>
+          </a:ln>
+        </p:spPr>
+      </p:sp>
+      <p:sp>
+        <p:nvSpPr>
+          <p:cNvPr id="35" name="Text 33"/>
+          <p:cNvSpPr/>
+          <p:nvPr/>
+        </p:nvSpPr>
+        <p:spPr>
+          <a:xfrm>
+            <a:off x="6428232" y="3364992"/>
+            <a:ext cx="1645920" cy="475488"/>
+          </a:xfrm>
+          <a:prstGeom prst="rect">
+            <a:avLst/>
+          </a:prstGeom>
+          <a:noFill/>
+          <a:ln/>
+        </p:spPr>
+        <p:txBody>
+          <a:bodyPr wrap="square" lIns="0" tIns="0" rIns="0" bIns="0" rtlCol="0" anchor="ctr"/>
+          <a:lstStyle/>
+          <a:p>
+            <a:pPr algn="ctr" indent="0" marL="0">
+              <a:buNone/>
+            </a:pPr>
+            <a:r>
+              <a:rPr lang="en-US" sz="1400" b="1" dirty="0">
+                <a:solidFill>
+                  <a:srgbClr val="0D9488"/>
+                </a:solidFill>
+                <a:latin typeface="Trebuchet MS" pitchFamily="34" charset="0"/>
+                <a:ea typeface="Trebuchet MS" pitchFamily="34" charset="-122"/>
+                <a:cs typeface="Trebuchet MS" pitchFamily="34" charset="-120"/>
+              </a:rPr>
+              <a:t>der</a:t>
+            </a:r>
+            <a:endParaRPr lang="en-US" sz="1400" dirty="0"/>
+          </a:p>
+        </p:txBody>
+      </p:sp>
+      <p:sp>
+        <p:nvSpPr>
+          <p:cNvPr id="36" name="Shape 34"/>
           <p:cNvSpPr/>
           <p:nvPr/>
         </p:nvSpPr>
@@ -9256,7 +9585,7 @@
       </p:sp>
       <p:sp>
         <p:nvSpPr>
-          <p:cNvPr id="31" name="Text 29"/>
+          <p:cNvPr id="37" name="Text 35"/>
           <p:cNvSpPr/>
           <p:nvPr/>
         </p:nvSpPr>
@@ -9295,7 +9624,7 @@
       </p:sp>
       <p:sp>
         <p:nvSpPr>
-          <p:cNvPr id="32" name="Shape 30"/>
+          <p:cNvPr id="38" name="Shape 36"/>
           <p:cNvSpPr/>
           <p:nvPr/>
         </p:nvSpPr>
@@ -9322,7 +9651,7 @@
       </p:sp>
       <p:sp>
         <p:nvSpPr>
-          <p:cNvPr id="33" name="Text 31"/>
+          <p:cNvPr id="39" name="Text 37"/>
           <p:cNvSpPr/>
           <p:nvPr/>
         </p:nvSpPr>
@@ -9784,7 +10113,7 @@
                 <a:ea typeface="Trebuchet MS" pitchFamily="34" charset="-122"/>
                 <a:cs typeface="Trebuchet MS" pitchFamily="34" charset="-120"/>
               </a:rPr>
-              <a:t>withhold</a:t>
+              <a:t>freeholder</a:t>
             </a:r>
             <a:endParaRPr lang="en-US" sz="2800" dirty="0"/>
           </a:p>
@@ -9864,7 +10193,7 @@
         </p:nvSpPr>
         <p:spPr>
           <a:xfrm>
-            <a:off x="2938272" y="2258568"/>
+            <a:off x="2221992" y="2258568"/>
             <a:ext cx="1828800" cy="292608"/>
           </a:xfrm>
           <a:prstGeom prst="rect">
@@ -9898,7 +10227,7 @@
         </p:nvSpPr>
         <p:spPr>
           <a:xfrm>
-            <a:off x="2938272" y="2258568"/>
+            <a:off x="2221992" y="2258568"/>
             <a:ext cx="1828800" cy="292608"/>
           </a:xfrm>
           <a:prstGeom prst="rect">
@@ -9923,7 +10252,7 @@
                 <a:ea typeface="Trebuchet MS" pitchFamily="34" charset="-122"/>
                 <a:cs typeface="Trebuchet MS" pitchFamily="34" charset="-120"/>
               </a:rPr>
-              <a:t>with</a:t>
+              <a:t>free</a:t>
             </a:r>
             <a:endParaRPr lang="en-US" sz="1300" dirty="0"/>
           </a:p>
@@ -9937,7 +10266,7 @@
         </p:nvSpPr>
         <p:spPr>
           <a:xfrm>
-            <a:off x="2938272" y="2569464"/>
+            <a:off x="2221992" y="2569464"/>
             <a:ext cx="1828800" cy="201168"/>
           </a:xfrm>
           <a:prstGeom prst="rect">
@@ -9962,7 +10291,7 @@
                 <a:ea typeface="Calibri" pitchFamily="34" charset="-122"/>
                 <a:cs typeface="Calibri" pitchFamily="34" charset="-120"/>
               </a:rPr>
-              <a:t>against, back</a:t>
+              <a:t>not restricted or owned by another</a:t>
             </a:r>
             <a:endParaRPr lang="en-US" sz="850" dirty="0"/>
           </a:p>
@@ -9976,7 +10305,7 @@
         </p:nvSpPr>
         <p:spPr>
           <a:xfrm>
-            <a:off x="5803392" y="2258568"/>
+            <a:off x="4370832" y="2258568"/>
             <a:ext cx="1828800" cy="292608"/>
           </a:xfrm>
           <a:prstGeom prst="rect">
@@ -10010,7 +10339,7 @@
         </p:nvSpPr>
         <p:spPr>
           <a:xfrm>
-            <a:off x="5803392" y="2258568"/>
+            <a:off x="4370832" y="2258568"/>
             <a:ext cx="1828800" cy="292608"/>
           </a:xfrm>
           <a:prstGeom prst="rect">
@@ -10049,7 +10378,7 @@
         </p:nvSpPr>
         <p:spPr>
           <a:xfrm>
-            <a:off x="5803392" y="2569464"/>
+            <a:off x="4370832" y="2569464"/>
             <a:ext cx="1828800" cy="201168"/>
           </a:xfrm>
           <a:prstGeom prst="rect">
@@ -10088,6 +10417,118 @@
         </p:nvSpPr>
         <p:spPr>
           <a:xfrm>
+            <a:off x="6519672" y="2258568"/>
+            <a:ext cx="1828800" cy="292608"/>
+          </a:xfrm>
+          <a:prstGeom prst="rect">
+            <a:avLst>
+              <a:gd name="adj" fmla="val 25000"/>
+            </a:avLst>
+          </a:prstGeom>
+          <a:solidFill>
+            <a:srgbClr val="FCE7F3"/>
+          </a:solidFill>
+          <a:ln w="19050">
+            <a:solidFill>
+              <a:srgbClr val="DB2777"/>
+            </a:solidFill>
+            <a:prstDash val="solid"/>
+          </a:ln>
+          <a:effectLst>
+            <a:outerShdw sx="100000" sy="100000" kx="0" ky="0" algn="bl" rotWithShape="0" blurRad="101600" dist="38100" dir="8100000">
+              <a:srgbClr val="000000">
+                <a:alpha val="12000"/>
+              </a:srgbClr>
+            </a:outerShdw>
+          </a:effectLst>
+        </p:spPr>
+      </p:sp>
+      <p:sp>
+        <p:nvSpPr>
+          <p:cNvPr id="23" name="Text 21"/>
+          <p:cNvSpPr/>
+          <p:nvPr/>
+        </p:nvSpPr>
+        <p:spPr>
+          <a:xfrm>
+            <a:off x="6519672" y="2258568"/>
+            <a:ext cx="1828800" cy="292608"/>
+          </a:xfrm>
+          <a:prstGeom prst="rect">
+            <a:avLst/>
+          </a:prstGeom>
+          <a:noFill/>
+          <a:ln/>
+        </p:spPr>
+        <p:txBody>
+          <a:bodyPr wrap="square" lIns="0" tIns="0" rIns="0" bIns="0" rtlCol="0" anchor="ctr"/>
+          <a:lstStyle/>
+          <a:p>
+            <a:pPr algn="ctr" indent="0" marL="0">
+              <a:buNone/>
+            </a:pPr>
+            <a:r>
+              <a:rPr lang="en-US" sz="1300" b="1" dirty="0">
+                <a:solidFill>
+                  <a:srgbClr val="9D174D"/>
+                </a:solidFill>
+                <a:latin typeface="Trebuchet MS" pitchFamily="34" charset="0"/>
+                <a:ea typeface="Trebuchet MS" pitchFamily="34" charset="-122"/>
+                <a:cs typeface="Trebuchet MS" pitchFamily="34" charset="-120"/>
+              </a:rPr>
+              <a:t>er</a:t>
+            </a:r>
+            <a:endParaRPr lang="en-US" sz="1300" dirty="0"/>
+          </a:p>
+        </p:txBody>
+      </p:sp>
+      <p:sp>
+        <p:nvSpPr>
+          <p:cNvPr id="24" name="Text 22"/>
+          <p:cNvSpPr/>
+          <p:nvPr/>
+        </p:nvSpPr>
+        <p:spPr>
+          <a:xfrm>
+            <a:off x="6519672" y="2569464"/>
+            <a:ext cx="1828800" cy="201168"/>
+          </a:xfrm>
+          <a:prstGeom prst="rect">
+            <a:avLst/>
+          </a:prstGeom>
+          <a:noFill/>
+          <a:ln/>
+        </p:spPr>
+        <p:txBody>
+          <a:bodyPr wrap="square" lIns="0" tIns="0" rIns="0" bIns="0" rtlCol="0" anchor="t"/>
+          <a:lstStyle/>
+          <a:p>
+            <a:pPr algn="ctr" indent="0" marL="0">
+              <a:buNone/>
+            </a:pPr>
+            <a:r>
+              <a:rPr lang="en-US" sz="850" dirty="0">
+                <a:solidFill>
+                  <a:srgbClr val="475569"/>
+                </a:solidFill>
+                <a:latin typeface="Calibri" pitchFamily="34" charset="0"/>
+                <a:ea typeface="Calibri" pitchFamily="34" charset="-122"/>
+                <a:cs typeface="Calibri" pitchFamily="34" charset="-120"/>
+              </a:rPr>
+              <a:t>a person who does something</a:t>
+            </a:r>
+            <a:endParaRPr lang="en-US" sz="850" dirty="0"/>
+          </a:p>
+        </p:txBody>
+      </p:sp>
+      <p:sp>
+        <p:nvSpPr>
+          <p:cNvPr id="25" name="Shape 23"/>
+          <p:cNvSpPr/>
+          <p:nvPr/>
+        </p:nvSpPr>
+        <p:spPr>
+          <a:xfrm>
             <a:off x="365760" y="3273552"/>
             <a:ext cx="1371600" cy="658368"/>
           </a:xfrm>
@@ -10109,7 +10550,7 @@
       </p:sp>
       <p:sp>
         <p:nvSpPr>
-          <p:cNvPr id="23" name="Text 21"/>
+          <p:cNvPr id="26" name="Text 24"/>
           <p:cNvSpPr/>
           <p:nvPr/>
         </p:nvSpPr>
@@ -10148,7 +10589,7 @@
       </p:sp>
       <p:sp>
         <p:nvSpPr>
-          <p:cNvPr id="24" name="Shape 22"/>
+          <p:cNvPr id="27" name="Shape 25"/>
           <p:cNvSpPr/>
           <p:nvPr/>
         </p:nvSpPr>
@@ -10175,13 +10616,13 @@
       </p:sp>
       <p:sp>
         <p:nvSpPr>
-          <p:cNvPr id="25" name="Shape 23"/>
-          <p:cNvSpPr/>
-          <p:nvPr/>
-        </p:nvSpPr>
-        <p:spPr>
-          <a:xfrm>
-            <a:off x="2999232" y="3364992"/>
+          <p:cNvPr id="28" name="Shape 26"/>
+          <p:cNvSpPr/>
+          <p:nvPr/>
+        </p:nvSpPr>
+        <p:spPr>
+          <a:xfrm>
+            <a:off x="2313432" y="3364992"/>
             <a:ext cx="1645920" cy="475488"/>
           </a:xfrm>
           <a:prstGeom prst="rect">
@@ -10202,13 +10643,13 @@
       </p:sp>
       <p:sp>
         <p:nvSpPr>
-          <p:cNvPr id="26" name="Text 24"/>
-          <p:cNvSpPr/>
-          <p:nvPr/>
-        </p:nvSpPr>
-        <p:spPr>
-          <a:xfrm>
-            <a:off x="2999232" y="3364992"/>
+          <p:cNvPr id="29" name="Text 27"/>
+          <p:cNvSpPr/>
+          <p:nvPr/>
+        </p:nvSpPr>
+        <p:spPr>
+          <a:xfrm>
+            <a:off x="2313432" y="3364992"/>
             <a:ext cx="1645920" cy="475488"/>
           </a:xfrm>
           <a:prstGeom prst="rect">
@@ -10233,7 +10674,7 @@
                 <a:ea typeface="Trebuchet MS" pitchFamily="34" charset="-122"/>
                 <a:cs typeface="Trebuchet MS" pitchFamily="34" charset="-120"/>
               </a:rPr>
-              <a:t>with</a:t>
+              <a:t>free</a:t>
             </a:r>
             <a:endParaRPr lang="en-US" sz="1400" dirty="0"/>
           </a:p>
@@ -10241,14 +10682,14 @@
       </p:sp>
       <p:sp>
         <p:nvSpPr>
-          <p:cNvPr id="27" name="Text 25"/>
-          <p:cNvSpPr/>
-          <p:nvPr/>
-        </p:nvSpPr>
-        <p:spPr>
-          <a:xfrm>
-            <a:off x="4645152" y="3364992"/>
-            <a:ext cx="1097280" cy="475488"/>
+          <p:cNvPr id="30" name="Text 28"/>
+          <p:cNvSpPr/>
+          <p:nvPr/>
+        </p:nvSpPr>
+        <p:spPr>
+          <a:xfrm>
+            <a:off x="3959352" y="3364992"/>
+            <a:ext cx="411480" cy="475488"/>
           </a:xfrm>
           <a:prstGeom prst="rect">
             <a:avLst/>
@@ -10280,13 +10721,13 @@
       </p:sp>
       <p:sp>
         <p:nvSpPr>
-          <p:cNvPr id="28" name="Shape 26"/>
-          <p:cNvSpPr/>
-          <p:nvPr/>
-        </p:nvSpPr>
-        <p:spPr>
-          <a:xfrm>
-            <a:off x="5742432" y="3364992"/>
+          <p:cNvPr id="31" name="Shape 29"/>
+          <p:cNvSpPr/>
+          <p:nvPr/>
+        </p:nvSpPr>
+        <p:spPr>
+          <a:xfrm>
+            <a:off x="4370832" y="3364992"/>
             <a:ext cx="1645920" cy="475488"/>
           </a:xfrm>
           <a:prstGeom prst="rect">
@@ -10307,13 +10748,13 @@
       </p:sp>
       <p:sp>
         <p:nvSpPr>
-          <p:cNvPr id="29" name="Text 27"/>
-          <p:cNvSpPr/>
-          <p:nvPr/>
-        </p:nvSpPr>
-        <p:spPr>
-          <a:xfrm>
-            <a:off x="5742432" y="3364992"/>
+          <p:cNvPr id="32" name="Text 30"/>
+          <p:cNvSpPr/>
+          <p:nvPr/>
+        </p:nvSpPr>
+        <p:spPr>
+          <a:xfrm>
+            <a:off x="4370832" y="3364992"/>
             <a:ext cx="1645920" cy="475488"/>
           </a:xfrm>
           <a:prstGeom prst="rect">
@@ -10338,7 +10779,7 @@
                 <a:ea typeface="Trebuchet MS" pitchFamily="34" charset="-122"/>
                 <a:cs typeface="Trebuchet MS" pitchFamily="34" charset="-120"/>
               </a:rPr>
-              <a:t>hold</a:t>
+              <a:t>hol</a:t>
             </a:r>
             <a:endParaRPr lang="en-US" sz="1400" dirty="0"/>
           </a:p>
@@ -10346,7 +10787,112 @@
       </p:sp>
       <p:sp>
         <p:nvSpPr>
-          <p:cNvPr id="30" name="Shape 28"/>
+          <p:cNvPr id="33" name="Text 31"/>
+          <p:cNvSpPr/>
+          <p:nvPr/>
+        </p:nvSpPr>
+        <p:spPr>
+          <a:xfrm>
+            <a:off x="6016752" y="3364992"/>
+            <a:ext cx="411480" cy="475488"/>
+          </a:xfrm>
+          <a:prstGeom prst="rect">
+            <a:avLst/>
+          </a:prstGeom>
+          <a:noFill/>
+          <a:ln/>
+        </p:spPr>
+        <p:txBody>
+          <a:bodyPr wrap="square" lIns="0" tIns="0" rIns="0" bIns="0" rtlCol="0" anchor="ctr"/>
+          <a:lstStyle/>
+          <a:p>
+            <a:pPr algn="ctr" indent="0" marL="0">
+              <a:buNone/>
+            </a:pPr>
+            <a:r>
+              <a:rPr lang="en-US" sz="1600" b="1" dirty="0">
+                <a:solidFill>
+                  <a:srgbClr val="0D9488"/>
+                </a:solidFill>
+                <a:latin typeface="Trebuchet MS" pitchFamily="34" charset="0"/>
+                <a:ea typeface="Trebuchet MS" pitchFamily="34" charset="-122"/>
+                <a:cs typeface="Trebuchet MS" pitchFamily="34" charset="-120"/>
+              </a:rPr>
+              <a:t>·</a:t>
+            </a:r>
+            <a:endParaRPr lang="en-US" sz="1600" dirty="0"/>
+          </a:p>
+        </p:txBody>
+      </p:sp>
+      <p:sp>
+        <p:nvSpPr>
+          <p:cNvPr id="34" name="Shape 32"/>
+          <p:cNvSpPr/>
+          <p:nvPr/>
+        </p:nvSpPr>
+        <p:spPr>
+          <a:xfrm>
+            <a:off x="6428232" y="3364992"/>
+            <a:ext cx="1645920" cy="475488"/>
+          </a:xfrm>
+          <a:prstGeom prst="rect">
+            <a:avLst>
+              <a:gd name="adj" fmla="val 9615"/>
+            </a:avLst>
+          </a:prstGeom>
+          <a:solidFill>
+            <a:srgbClr val="FFFFFF"/>
+          </a:solidFill>
+          <a:ln w="12700">
+            <a:solidFill>
+              <a:srgbClr val="0D9488"/>
+            </a:solidFill>
+            <a:prstDash val="solid"/>
+          </a:ln>
+        </p:spPr>
+      </p:sp>
+      <p:sp>
+        <p:nvSpPr>
+          <p:cNvPr id="35" name="Text 33"/>
+          <p:cNvSpPr/>
+          <p:nvPr/>
+        </p:nvSpPr>
+        <p:spPr>
+          <a:xfrm>
+            <a:off x="6428232" y="3364992"/>
+            <a:ext cx="1645920" cy="475488"/>
+          </a:xfrm>
+          <a:prstGeom prst="rect">
+            <a:avLst/>
+          </a:prstGeom>
+          <a:noFill/>
+          <a:ln/>
+        </p:spPr>
+        <p:txBody>
+          <a:bodyPr wrap="square" lIns="0" tIns="0" rIns="0" bIns="0" rtlCol="0" anchor="ctr"/>
+          <a:lstStyle/>
+          <a:p>
+            <a:pPr algn="ctr" indent="0" marL="0">
+              <a:buNone/>
+            </a:pPr>
+            <a:r>
+              <a:rPr lang="en-US" sz="1400" b="1" dirty="0">
+                <a:solidFill>
+                  <a:srgbClr val="0D9488"/>
+                </a:solidFill>
+                <a:latin typeface="Trebuchet MS" pitchFamily="34" charset="0"/>
+                <a:ea typeface="Trebuchet MS" pitchFamily="34" charset="-122"/>
+                <a:cs typeface="Trebuchet MS" pitchFamily="34" charset="-120"/>
+              </a:rPr>
+              <a:t>der</a:t>
+            </a:r>
+            <a:endParaRPr lang="en-US" sz="1400" dirty="0"/>
+          </a:p>
+        </p:txBody>
+      </p:sp>
+      <p:sp>
+        <p:nvSpPr>
+          <p:cNvPr id="36" name="Shape 34"/>
           <p:cNvSpPr/>
           <p:nvPr/>
         </p:nvSpPr>
@@ -10373,7 +10919,7 @@
       </p:sp>
       <p:sp>
         <p:nvSpPr>
-          <p:cNvPr id="31" name="Text 29"/>
+          <p:cNvPr id="37" name="Text 35"/>
           <p:cNvSpPr/>
           <p:nvPr/>
         </p:nvSpPr>
@@ -10412,7 +10958,7 @@
       </p:sp>
       <p:sp>
         <p:nvSpPr>
-          <p:cNvPr id="32" name="Shape 30"/>
+          <p:cNvPr id="38" name="Shape 36"/>
           <p:cNvSpPr/>
           <p:nvPr/>
         </p:nvSpPr>
@@ -10439,7 +10985,7 @@
       </p:sp>
       <p:sp>
         <p:nvSpPr>
-          <p:cNvPr id="33" name="Shape 31"/>
+          <p:cNvPr id="39" name="Shape 37"/>
           <p:cNvSpPr/>
           <p:nvPr/>
         </p:nvSpPr>
@@ -10466,7 +11012,7 @@
       </p:sp>
       <p:sp>
         <p:nvSpPr>
-          <p:cNvPr id="34" name="Text 32"/>
+          <p:cNvPr id="40" name="Text 38"/>
           <p:cNvSpPr/>
           <p:nvPr/>
         </p:nvSpPr>
@@ -10497,7 +11043,7 @@
                 <a:ea typeface="Trebuchet MS" pitchFamily="34" charset="-122"/>
                 <a:cs typeface="Trebuchet MS" pitchFamily="34" charset="-120"/>
               </a:rPr>
-              <a:t>w</a:t>
+              <a:t>fr</a:t>
             </a:r>
             <a:endParaRPr lang="en-US" sz="900" dirty="0"/>
           </a:p>
@@ -10505,7 +11051,7 @@
       </p:sp>
       <p:sp>
         <p:nvSpPr>
-          <p:cNvPr id="35" name="Shape 33"/>
+          <p:cNvPr id="41" name="Shape 39"/>
           <p:cNvSpPr/>
           <p:nvPr/>
         </p:nvSpPr>
@@ -10532,7 +11078,7 @@
       </p:sp>
       <p:sp>
         <p:nvSpPr>
-          <p:cNvPr id="36" name="Text 34"/>
+          <p:cNvPr id="42" name="Text 40"/>
           <p:cNvSpPr/>
           <p:nvPr/>
         </p:nvSpPr>
@@ -10563,7 +11109,7 @@
                 <a:ea typeface="Trebuchet MS" pitchFamily="34" charset="-122"/>
                 <a:cs typeface="Trebuchet MS" pitchFamily="34" charset="-120"/>
               </a:rPr>
-              <a:t>i</a:t>
+              <a:t>ee</a:t>
             </a:r>
             <a:endParaRPr lang="en-US" sz="900" dirty="0"/>
           </a:p>
@@ -10571,7 +11117,7 @@
       </p:sp>
       <p:sp>
         <p:nvSpPr>
-          <p:cNvPr id="37" name="Shape 35"/>
+          <p:cNvPr id="43" name="Shape 41"/>
           <p:cNvSpPr/>
           <p:nvPr/>
         </p:nvSpPr>
@@ -10598,7 +11144,7 @@
       </p:sp>
       <p:sp>
         <p:nvSpPr>
-          <p:cNvPr id="38" name="Text 36"/>
+          <p:cNvPr id="44" name="Text 42"/>
           <p:cNvSpPr/>
           <p:nvPr/>
         </p:nvSpPr>
@@ -10629,7 +11175,7 @@
                 <a:ea typeface="Trebuchet MS" pitchFamily="34" charset="-122"/>
                 <a:cs typeface="Trebuchet MS" pitchFamily="34" charset="-120"/>
               </a:rPr>
-              <a:t>th</a:t>
+              <a:t>h</a:t>
             </a:r>
             <a:endParaRPr lang="en-US" sz="900" dirty="0"/>
           </a:p>
@@ -10637,7 +11183,7 @@
       </p:sp>
       <p:sp>
         <p:nvSpPr>
-          <p:cNvPr id="39" name="Shape 37"/>
+          <p:cNvPr id="45" name="Shape 43"/>
           <p:cNvSpPr/>
           <p:nvPr/>
         </p:nvSpPr>
@@ -10664,7 +11210,7 @@
       </p:sp>
       <p:sp>
         <p:nvSpPr>
-          <p:cNvPr id="40" name="Text 38"/>
+          <p:cNvPr id="46" name="Text 44"/>
           <p:cNvSpPr/>
           <p:nvPr/>
         </p:nvSpPr>
@@ -10695,7 +11241,7 @@
                 <a:ea typeface="Trebuchet MS" pitchFamily="34" charset="-122"/>
                 <a:cs typeface="Trebuchet MS" pitchFamily="34" charset="-120"/>
               </a:rPr>
-              <a:t>h</a:t>
+              <a:t>o</a:t>
             </a:r>
             <a:endParaRPr lang="en-US" sz="900" dirty="0"/>
           </a:p>
@@ -10703,7 +11249,7 @@
       </p:sp>
       <p:sp>
         <p:nvSpPr>
-          <p:cNvPr id="41" name="Shape 39"/>
+          <p:cNvPr id="47" name="Shape 45"/>
           <p:cNvSpPr/>
           <p:nvPr/>
         </p:nvSpPr>
@@ -10730,7 +11276,7 @@
       </p:sp>
       <p:sp>
         <p:nvSpPr>
-          <p:cNvPr id="42" name="Text 40"/>
+          <p:cNvPr id="48" name="Text 46"/>
           <p:cNvSpPr/>
           <p:nvPr/>
         </p:nvSpPr>
@@ -10761,7 +11307,7 @@
                 <a:ea typeface="Trebuchet MS" pitchFamily="34" charset="-122"/>
                 <a:cs typeface="Trebuchet MS" pitchFamily="34" charset="-120"/>
               </a:rPr>
-              <a:t>o</a:t>
+              <a:t>l</a:t>
             </a:r>
             <a:endParaRPr lang="en-US" sz="900" dirty="0"/>
           </a:p>
@@ -10769,7 +11315,7 @@
       </p:sp>
       <p:sp>
         <p:nvSpPr>
-          <p:cNvPr id="43" name="Shape 41"/>
+          <p:cNvPr id="49" name="Shape 47"/>
           <p:cNvSpPr/>
           <p:nvPr/>
         </p:nvSpPr>
@@ -10796,7 +11342,7 @@
       </p:sp>
       <p:sp>
         <p:nvSpPr>
-          <p:cNvPr id="44" name="Text 42"/>
+          <p:cNvPr id="50" name="Text 48"/>
           <p:cNvSpPr/>
           <p:nvPr/>
         </p:nvSpPr>
@@ -10827,7 +11373,7 @@
                 <a:ea typeface="Trebuchet MS" pitchFamily="34" charset="-122"/>
                 <a:cs typeface="Trebuchet MS" pitchFamily="34" charset="-120"/>
               </a:rPr>
-              <a:t>l</a:t>
+              <a:t>d</a:t>
             </a:r>
             <a:endParaRPr lang="en-US" sz="900" dirty="0"/>
           </a:p>
@@ -10835,7 +11381,7 @@
       </p:sp>
       <p:sp>
         <p:nvSpPr>
-          <p:cNvPr id="45" name="Shape 43"/>
+          <p:cNvPr id="51" name="Shape 49"/>
           <p:cNvSpPr/>
           <p:nvPr/>
         </p:nvSpPr>
@@ -10862,7 +11408,7 @@
       </p:sp>
       <p:sp>
         <p:nvSpPr>
-          <p:cNvPr id="46" name="Text 44"/>
+          <p:cNvPr id="52" name="Text 50"/>
           <p:cNvSpPr/>
           <p:nvPr/>
         </p:nvSpPr>
@@ -10893,7 +11439,7 @@
                 <a:ea typeface="Trebuchet MS" pitchFamily="34" charset="-122"/>
                 <a:cs typeface="Trebuchet MS" pitchFamily="34" charset="-120"/>
               </a:rPr>
-              <a:t>d</a:t>
+              <a:t>er</a:t>
             </a:r>
             <a:endParaRPr lang="en-US" sz="900" dirty="0"/>
           </a:p>
@@ -11324,7 +11870,7 @@
                 <a:ea typeface="Trebuchet MS" pitchFamily="34" charset="-122"/>
                 <a:cs typeface="Trebuchet MS" pitchFamily="34" charset="-120"/>
               </a:rPr>
-              <a:t>uphold</a:t>
+              <a:t>withhold</a:t>
             </a:r>
             <a:endParaRPr lang="en-US" sz="2800" dirty="0"/>
           </a:p>
@@ -12151,7 +12697,7 @@
                 <a:ea typeface="Trebuchet MS" pitchFamily="34" charset="-122"/>
                 <a:cs typeface="Trebuchet MS" pitchFamily="34" charset="-120"/>
               </a:rPr>
-              <a:t>uphold</a:t>
+              <a:t>withhold</a:t>
             </a:r>
             <a:endParaRPr lang="en-US" sz="2800" dirty="0"/>
           </a:p>
@@ -12290,7 +12836,7 @@
                 <a:ea typeface="Trebuchet MS" pitchFamily="34" charset="-122"/>
                 <a:cs typeface="Trebuchet MS" pitchFamily="34" charset="-120"/>
               </a:rPr>
-              <a:t>up</a:t>
+              <a:t>with</a:t>
             </a:r>
             <a:endParaRPr lang="en-US" sz="1300" dirty="0"/>
           </a:p>
@@ -12329,7 +12875,7 @@
                 <a:ea typeface="Calibri" pitchFamily="34" charset="-122"/>
                 <a:cs typeface="Calibri" pitchFamily="34" charset="-120"/>
               </a:rPr>
-              <a:t>higher, above</a:t>
+              <a:t>against or away from</a:t>
             </a:r>
             <a:endParaRPr lang="en-US" sz="850" dirty="0"/>
           </a:p>
@@ -13136,7 +13682,7 @@
                 <a:ea typeface="Trebuchet MS" pitchFamily="34" charset="-122"/>
                 <a:cs typeface="Trebuchet MS" pitchFamily="34" charset="-120"/>
               </a:rPr>
-              <a:t>uphold</a:t>
+              <a:t>withhold</a:t>
             </a:r>
             <a:endParaRPr lang="en-US" sz="2800" dirty="0"/>
           </a:p>
@@ -13275,7 +13821,7 @@
                 <a:ea typeface="Trebuchet MS" pitchFamily="34" charset="-122"/>
                 <a:cs typeface="Trebuchet MS" pitchFamily="34" charset="-120"/>
               </a:rPr>
-              <a:t>up</a:t>
+              <a:t>with</a:t>
             </a:r>
             <a:endParaRPr lang="en-US" sz="1300" dirty="0"/>
           </a:p>
@@ -13314,7 +13860,7 @@
                 <a:ea typeface="Calibri" pitchFamily="34" charset="-122"/>
                 <a:cs typeface="Calibri" pitchFamily="34" charset="-120"/>
               </a:rPr>
-              <a:t>higher, above</a:t>
+              <a:t>against or away from</a:t>
             </a:r>
             <a:endParaRPr lang="en-US" sz="850" dirty="0"/>
           </a:p>
@@ -13585,7 +14131,7 @@
                 <a:ea typeface="Trebuchet MS" pitchFamily="34" charset="-122"/>
                 <a:cs typeface="Trebuchet MS" pitchFamily="34" charset="-120"/>
               </a:rPr>
-              <a:t>up</a:t>
+              <a:t>with</a:t>
             </a:r>
             <a:endParaRPr lang="en-US" sz="1400" dirty="0"/>
           </a:p>
@@ -14518,7 +15064,7 @@
                 <a:ea typeface="Trebuchet MS" pitchFamily="34" charset="-122"/>
                 <a:cs typeface="Trebuchet MS" pitchFamily="34" charset="-120"/>
               </a:rPr>
-              <a:t>uphold</a:t>
+              <a:t>withhold</a:t>
             </a:r>
             <a:endParaRPr lang="en-US" sz="2800" dirty="0"/>
           </a:p>
@@ -14657,7 +15203,7 @@
                 <a:ea typeface="Trebuchet MS" pitchFamily="34" charset="-122"/>
                 <a:cs typeface="Trebuchet MS" pitchFamily="34" charset="-120"/>
               </a:rPr>
-              <a:t>up</a:t>
+              <a:t>with</a:t>
             </a:r>
             <a:endParaRPr lang="en-US" sz="1300" dirty="0"/>
           </a:p>
@@ -14696,7 +15242,7 @@
                 <a:ea typeface="Calibri" pitchFamily="34" charset="-122"/>
                 <a:cs typeface="Calibri" pitchFamily="34" charset="-120"/>
               </a:rPr>
-              <a:t>higher, above</a:t>
+              <a:t>against or away from</a:t>
             </a:r>
             <a:endParaRPr lang="en-US" sz="850" dirty="0"/>
           </a:p>
@@ -14967,7 +15513,7 @@
                 <a:ea typeface="Trebuchet MS" pitchFamily="34" charset="-122"/>
                 <a:cs typeface="Trebuchet MS" pitchFamily="34" charset="-120"/>
               </a:rPr>
-              <a:t>up</a:t>
+              <a:t>with</a:t>
             </a:r>
             <a:endParaRPr lang="en-US" sz="1400" dirty="0"/>
           </a:p>
@@ -15179,7 +15725,7 @@
         </p:nvSpPr>
         <p:spPr>
           <a:xfrm>
-            <a:off x="2254649" y="4169664"/>
+            <a:off x="2124837" y="4169664"/>
             <a:ext cx="685800" cy="475488"/>
           </a:xfrm>
           <a:prstGeom prst="rect">
@@ -15206,7 +15752,7 @@
         </p:nvSpPr>
         <p:spPr>
           <a:xfrm>
-            <a:off x="2254649" y="4169664"/>
+            <a:off x="2124837" y="4169664"/>
             <a:ext cx="685800" cy="475488"/>
           </a:xfrm>
           <a:prstGeom prst="rect">
@@ -15231,7 +15777,7 @@
                 <a:ea typeface="Trebuchet MS" pitchFamily="34" charset="-122"/>
                 <a:cs typeface="Trebuchet MS" pitchFamily="34" charset="-120"/>
               </a:rPr>
-              <a:t>u</a:t>
+              <a:t>w</a:t>
             </a:r>
             <a:endParaRPr lang="en-US" sz="900" dirty="0"/>
           </a:p>
@@ -15245,7 +15791,7 @@
         </p:nvSpPr>
         <p:spPr>
           <a:xfrm>
-            <a:off x="3293146" y="4169664"/>
+            <a:off x="3033522" y="4169664"/>
             <a:ext cx="685800" cy="475488"/>
           </a:xfrm>
           <a:prstGeom prst="rect">
@@ -15272,7 +15818,7 @@
         </p:nvSpPr>
         <p:spPr>
           <a:xfrm>
-            <a:off x="3293146" y="4169664"/>
+            <a:off x="3033522" y="4169664"/>
             <a:ext cx="685800" cy="475488"/>
           </a:xfrm>
           <a:prstGeom prst="rect">
@@ -15297,7 +15843,7 @@
                 <a:ea typeface="Trebuchet MS" pitchFamily="34" charset="-122"/>
                 <a:cs typeface="Trebuchet MS" pitchFamily="34" charset="-120"/>
               </a:rPr>
-              <a:t>p</a:t>
+              <a:t>i</a:t>
             </a:r>
             <a:endParaRPr lang="en-US" sz="900" dirty="0"/>
           </a:p>
@@ -15311,7 +15857,7 @@
         </p:nvSpPr>
         <p:spPr>
           <a:xfrm>
-            <a:off x="4331643" y="4169664"/>
+            <a:off x="3942207" y="4169664"/>
             <a:ext cx="685800" cy="475488"/>
           </a:xfrm>
           <a:prstGeom prst="rect">
@@ -15338,7 +15884,7 @@
         </p:nvSpPr>
         <p:spPr>
           <a:xfrm>
-            <a:off x="4331643" y="4169664"/>
+            <a:off x="3942207" y="4169664"/>
             <a:ext cx="685800" cy="475488"/>
           </a:xfrm>
           <a:prstGeom prst="rect">
@@ -15363,7 +15909,7 @@
                 <a:ea typeface="Trebuchet MS" pitchFamily="34" charset="-122"/>
                 <a:cs typeface="Trebuchet MS" pitchFamily="34" charset="-120"/>
               </a:rPr>
-              <a:t>h</a:t>
+              <a:t>th</a:t>
             </a:r>
             <a:endParaRPr lang="en-US" sz="900" dirty="0"/>
           </a:p>
@@ -15377,7 +15923,7 @@
         </p:nvSpPr>
         <p:spPr>
           <a:xfrm>
-            <a:off x="5370141" y="4169664"/>
+            <a:off x="4850892" y="4169664"/>
             <a:ext cx="685800" cy="475488"/>
           </a:xfrm>
           <a:prstGeom prst="rect">
@@ -15404,7 +15950,7 @@
         </p:nvSpPr>
         <p:spPr>
           <a:xfrm>
-            <a:off x="5370141" y="4169664"/>
+            <a:off x="4850892" y="4169664"/>
             <a:ext cx="685800" cy="475488"/>
           </a:xfrm>
           <a:prstGeom prst="rect">
@@ -15429,7 +15975,7 @@
                 <a:ea typeface="Trebuchet MS" pitchFamily="34" charset="-122"/>
                 <a:cs typeface="Trebuchet MS" pitchFamily="34" charset="-120"/>
               </a:rPr>
-              <a:t>o</a:t>
+              <a:t>h</a:t>
             </a:r>
             <a:endParaRPr lang="en-US" sz="900" dirty="0"/>
           </a:p>
@@ -15443,7 +15989,7 @@
         </p:nvSpPr>
         <p:spPr>
           <a:xfrm>
-            <a:off x="6408638" y="4169664"/>
+            <a:off x="5759577" y="4169664"/>
             <a:ext cx="685800" cy="475488"/>
           </a:xfrm>
           <a:prstGeom prst="rect">
@@ -15470,7 +16016,7 @@
         </p:nvSpPr>
         <p:spPr>
           <a:xfrm>
-            <a:off x="6408638" y="4169664"/>
+            <a:off x="5759577" y="4169664"/>
             <a:ext cx="685800" cy="475488"/>
           </a:xfrm>
           <a:prstGeom prst="rect">
@@ -15495,7 +16041,7 @@
                 <a:ea typeface="Trebuchet MS" pitchFamily="34" charset="-122"/>
                 <a:cs typeface="Trebuchet MS" pitchFamily="34" charset="-120"/>
               </a:rPr>
-              <a:t>l</a:t>
+              <a:t>o</a:t>
             </a:r>
             <a:endParaRPr lang="en-US" sz="900" dirty="0"/>
           </a:p>
@@ -15509,7 +16055,7 @@
         </p:nvSpPr>
         <p:spPr>
           <a:xfrm>
-            <a:off x="7447135" y="4169664"/>
+            <a:off x="6668262" y="4169664"/>
             <a:ext cx="685800" cy="475488"/>
           </a:xfrm>
           <a:prstGeom prst="rect">
@@ -15536,7 +16082,73 @@
         </p:nvSpPr>
         <p:spPr>
           <a:xfrm>
-            <a:off x="7447135" y="4169664"/>
+            <a:off x="6668262" y="4169664"/>
+            <a:ext cx="685800" cy="475488"/>
+          </a:xfrm>
+          <a:prstGeom prst="rect">
+            <a:avLst/>
+          </a:prstGeom>
+          <a:noFill/>
+          <a:ln/>
+        </p:spPr>
+        <p:txBody>
+          <a:bodyPr wrap="square" lIns="0" tIns="0" rIns="0" bIns="0" rtlCol="0" anchor="ctr"/>
+          <a:lstStyle/>
+          <a:p>
+            <a:pPr algn="ctr" indent="0" marL="0">
+              <a:buNone/>
+            </a:pPr>
+            <a:r>
+              <a:rPr lang="en-US" sz="900" b="1" dirty="0">
+                <a:solidFill>
+                  <a:srgbClr val="9D174D"/>
+                </a:solidFill>
+                <a:latin typeface="Trebuchet MS" pitchFamily="34" charset="0"/>
+                <a:ea typeface="Trebuchet MS" pitchFamily="34" charset="-122"/>
+                <a:cs typeface="Trebuchet MS" pitchFamily="34" charset="-120"/>
+              </a:rPr>
+              <a:t>l</a:t>
+            </a:r>
+            <a:endParaRPr lang="en-US" sz="900" dirty="0"/>
+          </a:p>
+        </p:txBody>
+      </p:sp>
+      <p:sp>
+        <p:nvSpPr>
+          <p:cNvPr id="45" name="Shape 43"/>
+          <p:cNvSpPr/>
+          <p:nvPr/>
+        </p:nvSpPr>
+        <p:spPr>
+          <a:xfrm>
+            <a:off x="7576947" y="4169664"/>
+            <a:ext cx="685800" cy="475488"/>
+          </a:xfrm>
+          <a:prstGeom prst="rect">
+            <a:avLst>
+              <a:gd name="adj" fmla="val 7692"/>
+            </a:avLst>
+          </a:prstGeom>
+          <a:solidFill>
+            <a:srgbClr val="FFFFFF"/>
+          </a:solidFill>
+          <a:ln w="12700">
+            <a:solidFill>
+              <a:srgbClr val="DB2777"/>
+            </a:solidFill>
+            <a:prstDash val="solid"/>
+          </a:ln>
+        </p:spPr>
+      </p:sp>
+      <p:sp>
+        <p:nvSpPr>
+          <p:cNvPr id="46" name="Text 44"/>
+          <p:cNvSpPr/>
+          <p:nvPr/>
+        </p:nvSpPr>
+        <p:spPr>
+          <a:xfrm>
+            <a:off x="7576947" y="4169664"/>
             <a:ext cx="685800" cy="475488"/>
           </a:xfrm>
           <a:prstGeom prst="rect">
@@ -16887,7 +17499,7 @@
                 <a:ea typeface="Calibri" pitchFamily="34" charset="-122"/>
                 <a:cs typeface="Calibri" pitchFamily="34" charset="-120"/>
               </a:rPr>
-              <a:t>The explorer tried to </a:t>
+              <a:t>From the </a:t>
             </a:r>
             <a:pPr algn="l" indent="0" marL="0">
               <a:buNone/>
@@ -16904,7 +17516,7 @@
                 <a:ea typeface="Calibri" pitchFamily="34" charset="-122"/>
                 <a:cs typeface="Calibri" pitchFamily="34" charset="-120"/>
               </a:rPr>
-              <a:t>behold</a:t>
+              <a:t>stronghold</a:t>
             </a:r>
             <a:pPr algn="l" indent="0" marL="0">
               <a:buNone/>
@@ -16918,7 +17530,7 @@
                 <a:ea typeface="Calibri" pitchFamily="34" charset="-122"/>
                 <a:cs typeface="Calibri" pitchFamily="34" charset="-120"/>
               </a:rPr>
-              <a:t> the </a:t>
+              <a:t>, the soldiers watched the </a:t>
             </a:r>
             <a:pPr algn="l" indent="0" marL="0">
               <a:buNone/>
@@ -16935,7 +17547,7 @@
                 <a:ea typeface="Calibri" pitchFamily="34" charset="-122"/>
                 <a:cs typeface="Calibri" pitchFamily="34" charset="-120"/>
               </a:rPr>
-              <a:t>stronghold</a:t>
+              <a:t>household</a:t>
             </a:r>
             <a:pPr algn="l" indent="0" marL="0">
               <a:buNone/>
@@ -16949,7 +17561,7 @@
                 <a:ea typeface="Calibri" pitchFamily="34" charset="-122"/>
                 <a:cs typeface="Calibri" pitchFamily="34" charset="-120"/>
               </a:rPr>
-              <a:t> from the ridge, but the </a:t>
+              <a:t> below, </a:t>
             </a:r>
             <a:pPr algn="l" indent="0" marL="0">
               <a:buNone/>
@@ -16966,7 +17578,7 @@
                 <a:ea typeface="Calibri" pitchFamily="34" charset="-122"/>
                 <a:cs typeface="Calibri" pitchFamily="34" charset="-120"/>
               </a:rPr>
-              <a:t>household</a:t>
+              <a:t>beholding</a:t>
             </a:r>
             <a:pPr algn="l" indent="0" marL="0">
               <a:buNone/>
@@ -16980,7 +17592,7 @@
                 <a:ea typeface="Calibri" pitchFamily="34" charset="-122"/>
                 <a:cs typeface="Calibri" pitchFamily="34" charset="-120"/>
               </a:rPr>
-              <a:t> below was blocking the view.</a:t>
+              <a:t> the peaceful valley at sunrise.</a:t>
             </a:r>
             <a:endParaRPr lang="en-US" sz="1800" dirty="0"/>
           </a:p>
@@ -17135,7 +17747,7 @@
                 <a:ea typeface="Trebuchet MS" pitchFamily="34" charset="-122"/>
                 <a:cs typeface="Trebuchet MS" pitchFamily="34" charset="-120"/>
               </a:rPr>
-              <a:t>behold</a:t>
+              <a:t>stronghold</a:t>
             </a:r>
             <a:endParaRPr lang="en-US" sz="1400" dirty="0"/>
           </a:p>
@@ -17263,7 +17875,7 @@
                 <a:ea typeface="Trebuchet MS" pitchFamily="34" charset="-122"/>
                 <a:cs typeface="Trebuchet MS" pitchFamily="34" charset="-120"/>
               </a:rPr>
-              <a:t>stronghold</a:t>
+              <a:t>household</a:t>
             </a:r>
             <a:endParaRPr lang="en-US" sz="1400" dirty="0"/>
           </a:p>
@@ -17391,7 +18003,7 @@
                 <a:ea typeface="Trebuchet MS" pitchFamily="34" charset="-122"/>
                 <a:cs typeface="Trebuchet MS" pitchFamily="34" charset="-120"/>
               </a:rPr>
-              <a:t>household</a:t>
+              <a:t>beholding</a:t>
             </a:r>
             <a:endParaRPr lang="en-US" sz="1400" dirty="0"/>
           </a:p>
@@ -17861,7 +18473,7 @@
                 <a:ea typeface="Trebuchet MS" pitchFamily="34" charset="-122"/>
                 <a:cs typeface="Trebuchet MS" pitchFamily="34" charset="-120"/>
               </a:rPr>
-              <a:t>behold</a:t>
+              <a:t>stronghold</a:t>
             </a:r>
             <a:endParaRPr lang="en-US" sz="2800" dirty="0"/>
           </a:p>
@@ -18688,7 +19300,7 @@
                 <a:ea typeface="Trebuchet MS" pitchFamily="34" charset="-122"/>
                 <a:cs typeface="Trebuchet MS" pitchFamily="34" charset="-120"/>
               </a:rPr>
-              <a:t>behold</a:t>
+              <a:t>stronghold</a:t>
             </a:r>
             <a:endParaRPr lang="en-US" sz="2800" dirty="0"/>
           </a:p>
@@ -18827,7 +19439,7 @@
                 <a:ea typeface="Trebuchet MS" pitchFamily="34" charset="-122"/>
                 <a:cs typeface="Trebuchet MS" pitchFamily="34" charset="-120"/>
               </a:rPr>
-              <a:t>be</a:t>
+              <a:t>strong</a:t>
             </a:r>
             <a:endParaRPr lang="en-US" sz="1300" dirty="0"/>
           </a:p>
@@ -18866,7 +19478,7 @@
                 <a:ea typeface="Calibri" pitchFamily="34" charset="-122"/>
                 <a:cs typeface="Calibri" pitchFamily="34" charset="-120"/>
               </a:rPr>
-              <a:t>completely, make</a:t>
+              <a:t>powerful and hard to break</a:t>
             </a:r>
             <a:endParaRPr lang="en-US" sz="850" dirty="0"/>
           </a:p>
@@ -19673,7 +20285,7 @@
                 <a:ea typeface="Trebuchet MS" pitchFamily="34" charset="-122"/>
                 <a:cs typeface="Trebuchet MS" pitchFamily="34" charset="-120"/>
               </a:rPr>
-              <a:t>behold</a:t>
+              <a:t>stronghold</a:t>
             </a:r>
             <a:endParaRPr lang="en-US" sz="2800" dirty="0"/>
           </a:p>
@@ -19812,7 +20424,7 @@
                 <a:ea typeface="Trebuchet MS" pitchFamily="34" charset="-122"/>
                 <a:cs typeface="Trebuchet MS" pitchFamily="34" charset="-120"/>
               </a:rPr>
-              <a:t>be</a:t>
+              <a:t>strong</a:t>
             </a:r>
             <a:endParaRPr lang="en-US" sz="1300" dirty="0"/>
           </a:p>
@@ -19851,7 +20463,7 @@
                 <a:ea typeface="Calibri" pitchFamily="34" charset="-122"/>
                 <a:cs typeface="Calibri" pitchFamily="34" charset="-120"/>
               </a:rPr>
-              <a:t>completely, make</a:t>
+              <a:t>powerful and hard to break</a:t>
             </a:r>
             <a:endParaRPr lang="en-US" sz="850" dirty="0"/>
           </a:p>
@@ -20122,7 +20734,7 @@
                 <a:ea typeface="Trebuchet MS" pitchFamily="34" charset="-122"/>
                 <a:cs typeface="Trebuchet MS" pitchFamily="34" charset="-120"/>
               </a:rPr>
-              <a:t>be</a:t>
+              <a:t>strong</a:t>
             </a:r>
             <a:endParaRPr lang="en-US" sz="1400" dirty="0"/>
           </a:p>
@@ -20790,7 +21402,7 @@
                 <a:ea typeface="Trebuchet MS" pitchFamily="34" charset="-122"/>
                 <a:cs typeface="Trebuchet MS" pitchFamily="34" charset="-120"/>
               </a:rPr>
-              <a:t>behold</a:t>
+              <a:t>stronghold</a:t>
             </a:r>
             <a:endParaRPr lang="en-US" sz="2800" dirty="0"/>
           </a:p>
@@ -20929,7 +21541,7 @@
                 <a:ea typeface="Trebuchet MS" pitchFamily="34" charset="-122"/>
                 <a:cs typeface="Trebuchet MS" pitchFamily="34" charset="-120"/>
               </a:rPr>
-              <a:t>be</a:t>
+              <a:t>strong</a:t>
             </a:r>
             <a:endParaRPr lang="en-US" sz="1300" dirty="0"/>
           </a:p>
@@ -20968,7 +21580,7 @@
                 <a:ea typeface="Calibri" pitchFamily="34" charset="-122"/>
                 <a:cs typeface="Calibri" pitchFamily="34" charset="-120"/>
               </a:rPr>
-              <a:t>completely, make</a:t>
+              <a:t>powerful and hard to break</a:t>
             </a:r>
             <a:endParaRPr lang="en-US" sz="850" dirty="0"/>
           </a:p>
@@ -21239,7 +21851,7 @@
                 <a:ea typeface="Trebuchet MS" pitchFamily="34" charset="-122"/>
                 <a:cs typeface="Trebuchet MS" pitchFamily="34" charset="-120"/>
               </a:rPr>
-              <a:t>be</a:t>
+              <a:t>strong</a:t>
             </a:r>
             <a:endParaRPr lang="en-US" sz="1400" dirty="0"/>
           </a:p>
@@ -21451,8 +22063,8 @@
         </p:nvSpPr>
         <p:spPr>
           <a:xfrm>
-            <a:off x="2254649" y="4169664"/>
-            <a:ext cx="685800" cy="475488"/>
+            <a:off x="1951330" y="4169664"/>
+            <a:ext cx="676656" cy="475488"/>
           </a:xfrm>
           <a:prstGeom prst="rect">
             <a:avLst>
@@ -21478,8 +22090,8 @@
         </p:nvSpPr>
         <p:spPr>
           <a:xfrm>
-            <a:off x="2254649" y="4169664"/>
-            <a:ext cx="685800" cy="475488"/>
+            <a:off x="1951330" y="4169664"/>
+            <a:ext cx="676656" cy="475488"/>
           </a:xfrm>
           <a:prstGeom prst="rect">
             <a:avLst/>
@@ -21503,7 +22115,7 @@
                 <a:ea typeface="Trebuchet MS" pitchFamily="34" charset="-122"/>
                 <a:cs typeface="Trebuchet MS" pitchFamily="34" charset="-120"/>
               </a:rPr>
-              <a:t>b</a:t>
+              <a:t>s</a:t>
             </a:r>
             <a:endParaRPr lang="en-US" sz="900" dirty="0"/>
           </a:p>
@@ -21517,8 +22129,8 @@
         </p:nvSpPr>
         <p:spPr>
           <a:xfrm>
-            <a:off x="3293146" y="4169664"/>
-            <a:ext cx="685800" cy="475488"/>
+            <a:off x="2677363" y="4169664"/>
+            <a:ext cx="676656" cy="475488"/>
           </a:xfrm>
           <a:prstGeom prst="rect">
             <a:avLst>
@@ -21544,8 +22156,8 @@
         </p:nvSpPr>
         <p:spPr>
           <a:xfrm>
-            <a:off x="3293146" y="4169664"/>
-            <a:ext cx="685800" cy="475488"/>
+            <a:off x="2677363" y="4169664"/>
+            <a:ext cx="676656" cy="475488"/>
           </a:xfrm>
           <a:prstGeom prst="rect">
             <a:avLst/>
@@ -21569,7 +22181,7 @@
                 <a:ea typeface="Trebuchet MS" pitchFamily="34" charset="-122"/>
                 <a:cs typeface="Trebuchet MS" pitchFamily="34" charset="-120"/>
               </a:rPr>
-              <a:t>e</a:t>
+              <a:t>t</a:t>
             </a:r>
             <a:endParaRPr lang="en-US" sz="900" dirty="0"/>
           </a:p>
@@ -21583,8 +22195,8 @@
         </p:nvSpPr>
         <p:spPr>
           <a:xfrm>
-            <a:off x="4331643" y="4169664"/>
-            <a:ext cx="685800" cy="475488"/>
+            <a:off x="3403397" y="4169664"/>
+            <a:ext cx="676656" cy="475488"/>
           </a:xfrm>
           <a:prstGeom prst="rect">
             <a:avLst>
@@ -21610,8 +22222,8 @@
         </p:nvSpPr>
         <p:spPr>
           <a:xfrm>
-            <a:off x="4331643" y="4169664"/>
-            <a:ext cx="685800" cy="475488"/>
+            <a:off x="3403397" y="4169664"/>
+            <a:ext cx="676656" cy="475488"/>
           </a:xfrm>
           <a:prstGeom prst="rect">
             <a:avLst/>
@@ -21635,7 +22247,7 @@
                 <a:ea typeface="Trebuchet MS" pitchFamily="34" charset="-122"/>
                 <a:cs typeface="Trebuchet MS" pitchFamily="34" charset="-120"/>
               </a:rPr>
-              <a:t>h</a:t>
+              <a:t>r</a:t>
             </a:r>
             <a:endParaRPr lang="en-US" sz="900" dirty="0"/>
           </a:p>
@@ -21649,8 +22261,8 @@
         </p:nvSpPr>
         <p:spPr>
           <a:xfrm>
-            <a:off x="5370141" y="4169664"/>
-            <a:ext cx="685800" cy="475488"/>
+            <a:off x="4129430" y="4169664"/>
+            <a:ext cx="676656" cy="475488"/>
           </a:xfrm>
           <a:prstGeom prst="rect">
             <a:avLst>
@@ -21676,8 +22288,8 @@
         </p:nvSpPr>
         <p:spPr>
           <a:xfrm>
-            <a:off x="5370141" y="4169664"/>
-            <a:ext cx="685800" cy="475488"/>
+            <a:off x="4129430" y="4169664"/>
+            <a:ext cx="676656" cy="475488"/>
           </a:xfrm>
           <a:prstGeom prst="rect">
             <a:avLst/>
@@ -21715,8 +22327,8 @@
         </p:nvSpPr>
         <p:spPr>
           <a:xfrm>
-            <a:off x="6408638" y="4169664"/>
-            <a:ext cx="685800" cy="475488"/>
+            <a:off x="4855464" y="4169664"/>
+            <a:ext cx="676656" cy="475488"/>
           </a:xfrm>
           <a:prstGeom prst="rect">
             <a:avLst>
@@ -21742,8 +22354,8 @@
         </p:nvSpPr>
         <p:spPr>
           <a:xfrm>
-            <a:off x="6408638" y="4169664"/>
-            <a:ext cx="685800" cy="475488"/>
+            <a:off x="4855464" y="4169664"/>
+            <a:ext cx="676656" cy="475488"/>
           </a:xfrm>
           <a:prstGeom prst="rect">
             <a:avLst/>
@@ -21767,7 +22379,7 @@
                 <a:ea typeface="Trebuchet MS" pitchFamily="34" charset="-122"/>
                 <a:cs typeface="Trebuchet MS" pitchFamily="34" charset="-120"/>
               </a:rPr>
-              <a:t>l</a:t>
+              <a:t>ng</a:t>
             </a:r>
             <a:endParaRPr lang="en-US" sz="900" dirty="0"/>
           </a:p>
@@ -21781,8 +22393,8 @@
         </p:nvSpPr>
         <p:spPr>
           <a:xfrm>
-            <a:off x="7447135" y="4169664"/>
-            <a:ext cx="685800" cy="475488"/>
+            <a:off x="5581498" y="4169664"/>
+            <a:ext cx="676656" cy="475488"/>
           </a:xfrm>
           <a:prstGeom prst="rect">
             <a:avLst>
@@ -21808,8 +22420,206 @@
         </p:nvSpPr>
         <p:spPr>
           <a:xfrm>
-            <a:off x="7447135" y="4169664"/>
-            <a:ext cx="685800" cy="475488"/>
+            <a:off x="5581498" y="4169664"/>
+            <a:ext cx="676656" cy="475488"/>
+          </a:xfrm>
+          <a:prstGeom prst="rect">
+            <a:avLst/>
+          </a:prstGeom>
+          <a:noFill/>
+          <a:ln/>
+        </p:spPr>
+        <p:txBody>
+          <a:bodyPr wrap="square" lIns="0" tIns="0" rIns="0" bIns="0" rtlCol="0" anchor="ctr"/>
+          <a:lstStyle/>
+          <a:p>
+            <a:pPr algn="ctr" indent="0" marL="0">
+              <a:buNone/>
+            </a:pPr>
+            <a:r>
+              <a:rPr lang="en-US" sz="900" b="1" dirty="0">
+                <a:solidFill>
+                  <a:srgbClr val="9D174D"/>
+                </a:solidFill>
+                <a:latin typeface="Trebuchet MS" pitchFamily="34" charset="0"/>
+                <a:ea typeface="Trebuchet MS" pitchFamily="34" charset="-122"/>
+                <a:cs typeface="Trebuchet MS" pitchFamily="34" charset="-120"/>
+              </a:rPr>
+              <a:t>h</a:t>
+            </a:r>
+            <a:endParaRPr lang="en-US" sz="900" dirty="0"/>
+          </a:p>
+        </p:txBody>
+      </p:sp>
+      <p:sp>
+        <p:nvSpPr>
+          <p:cNvPr id="45" name="Shape 43"/>
+          <p:cNvSpPr/>
+          <p:nvPr/>
+        </p:nvSpPr>
+        <p:spPr>
+          <a:xfrm>
+            <a:off x="6307531" y="4169664"/>
+            <a:ext cx="676656" cy="475488"/>
+          </a:xfrm>
+          <a:prstGeom prst="rect">
+            <a:avLst>
+              <a:gd name="adj" fmla="val 7692"/>
+            </a:avLst>
+          </a:prstGeom>
+          <a:solidFill>
+            <a:srgbClr val="FFFFFF"/>
+          </a:solidFill>
+          <a:ln w="12700">
+            <a:solidFill>
+              <a:srgbClr val="DB2777"/>
+            </a:solidFill>
+            <a:prstDash val="solid"/>
+          </a:ln>
+        </p:spPr>
+      </p:sp>
+      <p:sp>
+        <p:nvSpPr>
+          <p:cNvPr id="46" name="Text 44"/>
+          <p:cNvSpPr/>
+          <p:nvPr/>
+        </p:nvSpPr>
+        <p:spPr>
+          <a:xfrm>
+            <a:off x="6307531" y="4169664"/>
+            <a:ext cx="676656" cy="475488"/>
+          </a:xfrm>
+          <a:prstGeom prst="rect">
+            <a:avLst/>
+          </a:prstGeom>
+          <a:noFill/>
+          <a:ln/>
+        </p:spPr>
+        <p:txBody>
+          <a:bodyPr wrap="square" lIns="0" tIns="0" rIns="0" bIns="0" rtlCol="0" anchor="ctr"/>
+          <a:lstStyle/>
+          <a:p>
+            <a:pPr algn="ctr" indent="0" marL="0">
+              <a:buNone/>
+            </a:pPr>
+            <a:r>
+              <a:rPr lang="en-US" sz="900" b="1" dirty="0">
+                <a:solidFill>
+                  <a:srgbClr val="9D174D"/>
+                </a:solidFill>
+                <a:latin typeface="Trebuchet MS" pitchFamily="34" charset="0"/>
+                <a:ea typeface="Trebuchet MS" pitchFamily="34" charset="-122"/>
+                <a:cs typeface="Trebuchet MS" pitchFamily="34" charset="-120"/>
+              </a:rPr>
+              <a:t>o</a:t>
+            </a:r>
+            <a:endParaRPr lang="en-US" sz="900" dirty="0"/>
+          </a:p>
+        </p:txBody>
+      </p:sp>
+      <p:sp>
+        <p:nvSpPr>
+          <p:cNvPr id="47" name="Shape 45"/>
+          <p:cNvSpPr/>
+          <p:nvPr/>
+        </p:nvSpPr>
+        <p:spPr>
+          <a:xfrm>
+            <a:off x="7033565" y="4169664"/>
+            <a:ext cx="676656" cy="475488"/>
+          </a:xfrm>
+          <a:prstGeom prst="rect">
+            <a:avLst>
+              <a:gd name="adj" fmla="val 7692"/>
+            </a:avLst>
+          </a:prstGeom>
+          <a:solidFill>
+            <a:srgbClr val="FFFFFF"/>
+          </a:solidFill>
+          <a:ln w="12700">
+            <a:solidFill>
+              <a:srgbClr val="DB2777"/>
+            </a:solidFill>
+            <a:prstDash val="solid"/>
+          </a:ln>
+        </p:spPr>
+      </p:sp>
+      <p:sp>
+        <p:nvSpPr>
+          <p:cNvPr id="48" name="Text 46"/>
+          <p:cNvSpPr/>
+          <p:nvPr/>
+        </p:nvSpPr>
+        <p:spPr>
+          <a:xfrm>
+            <a:off x="7033565" y="4169664"/>
+            <a:ext cx="676656" cy="475488"/>
+          </a:xfrm>
+          <a:prstGeom prst="rect">
+            <a:avLst/>
+          </a:prstGeom>
+          <a:noFill/>
+          <a:ln/>
+        </p:spPr>
+        <p:txBody>
+          <a:bodyPr wrap="square" lIns="0" tIns="0" rIns="0" bIns="0" rtlCol="0" anchor="ctr"/>
+          <a:lstStyle/>
+          <a:p>
+            <a:pPr algn="ctr" indent="0" marL="0">
+              <a:buNone/>
+            </a:pPr>
+            <a:r>
+              <a:rPr lang="en-US" sz="900" b="1" dirty="0">
+                <a:solidFill>
+                  <a:srgbClr val="9D174D"/>
+                </a:solidFill>
+                <a:latin typeface="Trebuchet MS" pitchFamily="34" charset="0"/>
+                <a:ea typeface="Trebuchet MS" pitchFamily="34" charset="-122"/>
+                <a:cs typeface="Trebuchet MS" pitchFamily="34" charset="-120"/>
+              </a:rPr>
+              <a:t>l</a:t>
+            </a:r>
+            <a:endParaRPr lang="en-US" sz="900" dirty="0"/>
+          </a:p>
+        </p:txBody>
+      </p:sp>
+      <p:sp>
+        <p:nvSpPr>
+          <p:cNvPr id="49" name="Shape 47"/>
+          <p:cNvSpPr/>
+          <p:nvPr/>
+        </p:nvSpPr>
+        <p:spPr>
+          <a:xfrm>
+            <a:off x="7759598" y="4169664"/>
+            <a:ext cx="676656" cy="475488"/>
+          </a:xfrm>
+          <a:prstGeom prst="rect">
+            <a:avLst>
+              <a:gd name="adj" fmla="val 7692"/>
+            </a:avLst>
+          </a:prstGeom>
+          <a:solidFill>
+            <a:srgbClr val="FFFFFF"/>
+          </a:solidFill>
+          <a:ln w="12700">
+            <a:solidFill>
+              <a:srgbClr val="DB2777"/>
+            </a:solidFill>
+            <a:prstDash val="solid"/>
+          </a:ln>
+        </p:spPr>
+      </p:sp>
+      <p:sp>
+        <p:nvSpPr>
+          <p:cNvPr id="50" name="Text 48"/>
+          <p:cNvSpPr/>
+          <p:nvPr/>
+        </p:nvSpPr>
+        <p:spPr>
+          <a:xfrm>
+            <a:off x="7759598" y="4169664"/>
+            <a:ext cx="676656" cy="475488"/>
           </a:xfrm>
           <a:prstGeom prst="rect">
             <a:avLst/>
@@ -22264,7 +23074,7 @@
                 <a:ea typeface="Trebuchet MS" pitchFamily="34" charset="-122"/>
                 <a:cs typeface="Trebuchet MS" pitchFamily="34" charset="-120"/>
               </a:rPr>
-              <a:t>stronghold</a:t>
+              <a:t>household</a:t>
             </a:r>
             <a:endParaRPr lang="en-US" sz="2800" dirty="0"/>
           </a:p>
@@ -23091,7 +23901,7 @@
                 <a:ea typeface="Trebuchet MS" pitchFamily="34" charset="-122"/>
                 <a:cs typeface="Trebuchet MS" pitchFamily="34" charset="-120"/>
               </a:rPr>
-              <a:t>stronghold</a:t>
+              <a:t>household</a:t>
             </a:r>
             <a:endParaRPr lang="en-US" sz="2800" dirty="0"/>
           </a:p>
@@ -23230,7 +24040,7 @@
                 <a:ea typeface="Trebuchet MS" pitchFamily="34" charset="-122"/>
                 <a:cs typeface="Trebuchet MS" pitchFamily="34" charset="-120"/>
               </a:rPr>
-              <a:t>strong</a:t>
+              <a:t>house</a:t>
             </a:r>
             <a:endParaRPr lang="en-US" sz="1300" dirty="0"/>
           </a:p>
@@ -23269,7 +24079,7 @@
                 <a:ea typeface="Calibri" pitchFamily="34" charset="-122"/>
                 <a:cs typeface="Calibri" pitchFamily="34" charset="-120"/>
               </a:rPr>
-              <a:t>powerful, firm</a:t>
+              <a:t>a building where people live</a:t>
             </a:r>
             <a:endParaRPr lang="en-US" sz="850" dirty="0"/>
           </a:p>
@@ -24795,7 +25605,7 @@
                 <a:ea typeface="Trebuchet MS" pitchFamily="34" charset="-122"/>
                 <a:cs typeface="Trebuchet MS" pitchFamily="34" charset="-120"/>
               </a:rPr>
-              <a:t>stronghold</a:t>
+              <a:t>household</a:t>
             </a:r>
             <a:endParaRPr lang="en-US" sz="2800" dirty="0"/>
           </a:p>
@@ -24934,7 +25744,7 @@
                 <a:ea typeface="Trebuchet MS" pitchFamily="34" charset="-122"/>
                 <a:cs typeface="Trebuchet MS" pitchFamily="34" charset="-120"/>
               </a:rPr>
-              <a:t>strong</a:t>
+              <a:t>house</a:t>
             </a:r>
             <a:endParaRPr lang="en-US" sz="1300" dirty="0"/>
           </a:p>
@@ -24973,7 +25783,7 @@
                 <a:ea typeface="Calibri" pitchFamily="34" charset="-122"/>
                 <a:cs typeface="Calibri" pitchFamily="34" charset="-120"/>
               </a:rPr>
-              <a:t>powerful, firm</a:t>
+              <a:t>a building where people live</a:t>
             </a:r>
             <a:endParaRPr lang="en-US" sz="850" dirty="0"/>
           </a:p>
@@ -25244,7 +26054,7 @@
                 <a:ea typeface="Trebuchet MS" pitchFamily="34" charset="-122"/>
                 <a:cs typeface="Trebuchet MS" pitchFamily="34" charset="-120"/>
               </a:rPr>
-              <a:t>strong</a:t>
+              <a:t>house</a:t>
             </a:r>
             <a:endParaRPr lang="en-US" sz="1400" dirty="0"/>
           </a:p>
@@ -25912,7 +26722,7 @@
                 <a:ea typeface="Trebuchet MS" pitchFamily="34" charset="-122"/>
                 <a:cs typeface="Trebuchet MS" pitchFamily="34" charset="-120"/>
               </a:rPr>
-              <a:t>stronghold</a:t>
+              <a:t>household</a:t>
             </a:r>
             <a:endParaRPr lang="en-US" sz="2800" dirty="0"/>
           </a:p>
@@ -26051,7 +26861,7 @@
                 <a:ea typeface="Trebuchet MS" pitchFamily="34" charset="-122"/>
                 <a:cs typeface="Trebuchet MS" pitchFamily="34" charset="-120"/>
               </a:rPr>
-              <a:t>strong</a:t>
+              <a:t>house</a:t>
             </a:r>
             <a:endParaRPr lang="en-US" sz="1300" dirty="0"/>
           </a:p>
@@ -26090,7 +26900,7 @@
                 <a:ea typeface="Calibri" pitchFamily="34" charset="-122"/>
                 <a:cs typeface="Calibri" pitchFamily="34" charset="-120"/>
               </a:rPr>
-              <a:t>powerful, firm</a:t>
+              <a:t>a building where people live</a:t>
             </a:r>
             <a:endParaRPr lang="en-US" sz="850" dirty="0"/>
           </a:p>
@@ -26361,7 +27171,7 @@
                 <a:ea typeface="Trebuchet MS" pitchFamily="34" charset="-122"/>
                 <a:cs typeface="Trebuchet MS" pitchFamily="34" charset="-120"/>
               </a:rPr>
-              <a:t>strong</a:t>
+              <a:t>house</a:t>
             </a:r>
             <a:endParaRPr lang="en-US" sz="1400" dirty="0"/>
           </a:p>
@@ -26547,11 +27357,11 @@
         <p:spPr>
           <a:xfrm>
             <a:off x="1874520" y="4096512"/>
-            <a:ext cx="6903720" cy="658368"/>
+            <a:ext cx="6903720" cy="804672"/>
           </a:xfrm>
           <a:prstGeom prst="rect">
             <a:avLst>
-              <a:gd name="adj" fmla="val 8333"/>
+              <a:gd name="adj" fmla="val 6818"/>
             </a:avLst>
           </a:prstGeom>
           <a:solidFill>
@@ -26573,12 +27383,12 @@
         </p:nvSpPr>
         <p:spPr>
           <a:xfrm>
-            <a:off x="1951330" y="4169664"/>
-            <a:ext cx="676656" cy="475488"/>
+            <a:off x="2124837" y="4169664"/>
+            <a:ext cx="685800" cy="384048"/>
           </a:xfrm>
           <a:prstGeom prst="rect">
             <a:avLst>
-              <a:gd name="adj" fmla="val 7692"/>
+              <a:gd name="adj" fmla="val 9524"/>
             </a:avLst>
           </a:prstGeom>
           <a:solidFill>
@@ -26600,8 +27410,8 @@
         </p:nvSpPr>
         <p:spPr>
           <a:xfrm>
-            <a:off x="1951330" y="4169664"/>
-            <a:ext cx="676656" cy="475488"/>
+            <a:off x="2124837" y="4169664"/>
+            <a:ext cx="685800" cy="384048"/>
           </a:xfrm>
           <a:prstGeom prst="rect">
             <a:avLst/>
@@ -26625,7 +27435,7 @@
                 <a:ea typeface="Trebuchet MS" pitchFamily="34" charset="-122"/>
                 <a:cs typeface="Trebuchet MS" pitchFamily="34" charset="-120"/>
               </a:rPr>
-              <a:t>s</a:t>
+              <a:t>h</a:t>
             </a:r>
             <a:endParaRPr lang="en-US" sz="900" dirty="0"/>
           </a:p>
@@ -26639,12 +27449,12 @@
         </p:nvSpPr>
         <p:spPr>
           <a:xfrm>
-            <a:off x="2677363" y="4169664"/>
-            <a:ext cx="676656" cy="475488"/>
+            <a:off x="3033522" y="4169664"/>
+            <a:ext cx="685800" cy="384048"/>
           </a:xfrm>
           <a:prstGeom prst="rect">
             <a:avLst>
-              <a:gd name="adj" fmla="val 7692"/>
+              <a:gd name="adj" fmla="val 9524"/>
             </a:avLst>
           </a:prstGeom>
           <a:solidFill>
@@ -26666,8 +27476,8 @@
         </p:nvSpPr>
         <p:spPr>
           <a:xfrm>
-            <a:off x="2677363" y="4169664"/>
-            <a:ext cx="676656" cy="475488"/>
+            <a:off x="3033522" y="4169664"/>
+            <a:ext cx="685800" cy="384048"/>
           </a:xfrm>
           <a:prstGeom prst="rect">
             <a:avLst/>
@@ -26691,7 +27501,7 @@
                 <a:ea typeface="Trebuchet MS" pitchFamily="34" charset="-122"/>
                 <a:cs typeface="Trebuchet MS" pitchFamily="34" charset="-120"/>
               </a:rPr>
-              <a:t>t</a:t>
+              <a:t>ou</a:t>
             </a:r>
             <a:endParaRPr lang="en-US" sz="900" dirty="0"/>
           </a:p>
@@ -26699,18 +27509,57 @@
       </p:sp>
       <p:sp>
         <p:nvSpPr>
-          <p:cNvPr id="37" name="Shape 35"/>
-          <p:cNvSpPr/>
-          <p:nvPr/>
-        </p:nvSpPr>
-        <p:spPr>
-          <a:xfrm>
-            <a:off x="3403397" y="4169664"/>
-            <a:ext cx="676656" cy="475488"/>
+          <p:cNvPr id="37" name="Text 35"/>
+          <p:cNvSpPr/>
+          <p:nvPr/>
+        </p:nvSpPr>
+        <p:spPr>
+          <a:xfrm>
+            <a:off x="3033522" y="4572000"/>
+            <a:ext cx="685800" cy="219456"/>
+          </a:xfrm>
+          <a:prstGeom prst="rect">
+            <a:avLst/>
+          </a:prstGeom>
+          <a:noFill/>
+          <a:ln/>
+        </p:spPr>
+        <p:txBody>
+          <a:bodyPr wrap="square" lIns="0" tIns="0" rIns="0" bIns="0" rtlCol="0" anchor="t"/>
+          <a:lstStyle/>
+          <a:p>
+            <a:pPr algn="ctr" indent="0" marL="0">
+              <a:buNone/>
+            </a:pPr>
+            <a:r>
+              <a:rPr lang="en-US" sz="750" i="1" dirty="0">
+                <a:solidFill>
+                  <a:srgbClr val="94A3B8"/>
+                </a:solidFill>
+                <a:latin typeface="Calibri" pitchFamily="34" charset="0"/>
+                <a:ea typeface="Calibri" pitchFamily="34" charset="-122"/>
+                <a:cs typeface="Calibri" pitchFamily="34" charset="-120"/>
+              </a:rPr>
+              <a:t>/ow/</a:t>
+            </a:r>
+            <a:endParaRPr lang="en-US" sz="750" dirty="0"/>
+          </a:p>
+        </p:txBody>
+      </p:sp>
+      <p:sp>
+        <p:nvSpPr>
+          <p:cNvPr id="38" name="Shape 36"/>
+          <p:cNvSpPr/>
+          <p:nvPr/>
+        </p:nvSpPr>
+        <p:spPr>
+          <a:xfrm>
+            <a:off x="3942207" y="4169664"/>
+            <a:ext cx="685800" cy="384048"/>
           </a:xfrm>
           <a:prstGeom prst="rect">
             <a:avLst>
-              <a:gd name="adj" fmla="val 7692"/>
+              <a:gd name="adj" fmla="val 9524"/>
             </a:avLst>
           </a:prstGeom>
           <a:solidFill>
@@ -26726,14 +27575,14 @@
       </p:sp>
       <p:sp>
         <p:nvSpPr>
-          <p:cNvPr id="38" name="Text 36"/>
-          <p:cNvSpPr/>
-          <p:nvPr/>
-        </p:nvSpPr>
-        <p:spPr>
-          <a:xfrm>
-            <a:off x="3403397" y="4169664"/>
-            <a:ext cx="676656" cy="475488"/>
+          <p:cNvPr id="39" name="Text 37"/>
+          <p:cNvSpPr/>
+          <p:nvPr/>
+        </p:nvSpPr>
+        <p:spPr>
+          <a:xfrm>
+            <a:off x="3942207" y="4169664"/>
+            <a:ext cx="685800" cy="384048"/>
           </a:xfrm>
           <a:prstGeom prst="rect">
             <a:avLst/>
@@ -26757,7 +27606,7 @@
                 <a:ea typeface="Trebuchet MS" pitchFamily="34" charset="-122"/>
                 <a:cs typeface="Trebuchet MS" pitchFamily="34" charset="-120"/>
               </a:rPr>
-              <a:t>r</a:t>
+              <a:t>s</a:t>
             </a:r>
             <a:endParaRPr lang="en-US" sz="900" dirty="0"/>
           </a:p>
@@ -26765,18 +27614,57 @@
       </p:sp>
       <p:sp>
         <p:nvSpPr>
-          <p:cNvPr id="39" name="Shape 37"/>
-          <p:cNvSpPr/>
-          <p:nvPr/>
-        </p:nvSpPr>
-        <p:spPr>
-          <a:xfrm>
-            <a:off x="4129430" y="4169664"/>
-            <a:ext cx="676656" cy="475488"/>
+          <p:cNvPr id="40" name="Text 38"/>
+          <p:cNvSpPr/>
+          <p:nvPr/>
+        </p:nvSpPr>
+        <p:spPr>
+          <a:xfrm>
+            <a:off x="3942207" y="4572000"/>
+            <a:ext cx="685800" cy="219456"/>
+          </a:xfrm>
+          <a:prstGeom prst="rect">
+            <a:avLst/>
+          </a:prstGeom>
+          <a:noFill/>
+          <a:ln/>
+        </p:spPr>
+        <p:txBody>
+          <a:bodyPr wrap="square" lIns="0" tIns="0" rIns="0" bIns="0" rtlCol="0" anchor="t"/>
+          <a:lstStyle/>
+          <a:p>
+            <a:pPr algn="ctr" indent="0" marL="0">
+              <a:buNone/>
+            </a:pPr>
+            <a:r>
+              <a:rPr lang="en-US" sz="750" i="1" dirty="0">
+                <a:solidFill>
+                  <a:srgbClr val="94A3B8"/>
+                </a:solidFill>
+                <a:latin typeface="Calibri" pitchFamily="34" charset="0"/>
+                <a:ea typeface="Calibri" pitchFamily="34" charset="-122"/>
+                <a:cs typeface="Calibri" pitchFamily="34" charset="-120"/>
+              </a:rPr>
+              <a:t>/s/</a:t>
+            </a:r>
+            <a:endParaRPr lang="en-US" sz="750" dirty="0"/>
+          </a:p>
+        </p:txBody>
+      </p:sp>
+      <p:sp>
+        <p:nvSpPr>
+          <p:cNvPr id="41" name="Shape 39"/>
+          <p:cNvSpPr/>
+          <p:nvPr/>
+        </p:nvSpPr>
+        <p:spPr>
+          <a:xfrm>
+            <a:off x="4850892" y="4169664"/>
+            <a:ext cx="685800" cy="384048"/>
           </a:xfrm>
           <a:prstGeom prst="rect">
             <a:avLst>
-              <a:gd name="adj" fmla="val 7692"/>
+              <a:gd name="adj" fmla="val 9524"/>
             </a:avLst>
           </a:prstGeom>
           <a:solidFill>
@@ -26792,14 +27680,14 @@
       </p:sp>
       <p:sp>
         <p:nvSpPr>
-          <p:cNvPr id="40" name="Text 38"/>
-          <p:cNvSpPr/>
-          <p:nvPr/>
-        </p:nvSpPr>
-        <p:spPr>
-          <a:xfrm>
-            <a:off x="4129430" y="4169664"/>
-            <a:ext cx="676656" cy="475488"/>
+          <p:cNvPr id="42" name="Text 40"/>
+          <p:cNvSpPr/>
+          <p:nvPr/>
+        </p:nvSpPr>
+        <p:spPr>
+          <a:xfrm>
+            <a:off x="4850892" y="4169664"/>
+            <a:ext cx="685800" cy="384048"/>
           </a:xfrm>
           <a:prstGeom prst="rect">
             <a:avLst/>
@@ -26823,7 +27711,7 @@
                 <a:ea typeface="Trebuchet MS" pitchFamily="34" charset="-122"/>
                 <a:cs typeface="Trebuchet MS" pitchFamily="34" charset="-120"/>
               </a:rPr>
-              <a:t>o</a:t>
+              <a:t>h</a:t>
             </a:r>
             <a:endParaRPr lang="en-US" sz="900" dirty="0"/>
           </a:p>
@@ -26831,18 +27719,18 @@
       </p:sp>
       <p:sp>
         <p:nvSpPr>
-          <p:cNvPr id="41" name="Shape 39"/>
-          <p:cNvSpPr/>
-          <p:nvPr/>
-        </p:nvSpPr>
-        <p:spPr>
-          <a:xfrm>
-            <a:off x="4855464" y="4169664"/>
-            <a:ext cx="676656" cy="475488"/>
+          <p:cNvPr id="43" name="Shape 41"/>
+          <p:cNvSpPr/>
+          <p:nvPr/>
+        </p:nvSpPr>
+        <p:spPr>
+          <a:xfrm>
+            <a:off x="5759577" y="4169664"/>
+            <a:ext cx="685800" cy="384048"/>
           </a:xfrm>
           <a:prstGeom prst="rect">
             <a:avLst>
-              <a:gd name="adj" fmla="val 7692"/>
+              <a:gd name="adj" fmla="val 9524"/>
             </a:avLst>
           </a:prstGeom>
           <a:solidFill>
@@ -26858,14 +27746,14 @@
       </p:sp>
       <p:sp>
         <p:nvSpPr>
-          <p:cNvPr id="42" name="Text 40"/>
-          <p:cNvSpPr/>
-          <p:nvPr/>
-        </p:nvSpPr>
-        <p:spPr>
-          <a:xfrm>
-            <a:off x="4855464" y="4169664"/>
-            <a:ext cx="676656" cy="475488"/>
+          <p:cNvPr id="44" name="Text 42"/>
+          <p:cNvSpPr/>
+          <p:nvPr/>
+        </p:nvSpPr>
+        <p:spPr>
+          <a:xfrm>
+            <a:off x="5759577" y="4169664"/>
+            <a:ext cx="685800" cy="384048"/>
           </a:xfrm>
           <a:prstGeom prst="rect">
             <a:avLst/>
@@ -26889,7 +27777,7 @@
                 <a:ea typeface="Trebuchet MS" pitchFamily="34" charset="-122"/>
                 <a:cs typeface="Trebuchet MS" pitchFamily="34" charset="-120"/>
               </a:rPr>
-              <a:t>ng</a:t>
+              <a:t>o</a:t>
             </a:r>
             <a:endParaRPr lang="en-US" sz="900" dirty="0"/>
           </a:p>
@@ -26897,18 +27785,18 @@
       </p:sp>
       <p:sp>
         <p:nvSpPr>
-          <p:cNvPr id="43" name="Shape 41"/>
-          <p:cNvSpPr/>
-          <p:nvPr/>
-        </p:nvSpPr>
-        <p:spPr>
-          <a:xfrm>
-            <a:off x="5581498" y="4169664"/>
-            <a:ext cx="676656" cy="475488"/>
+          <p:cNvPr id="45" name="Shape 43"/>
+          <p:cNvSpPr/>
+          <p:nvPr/>
+        </p:nvSpPr>
+        <p:spPr>
+          <a:xfrm>
+            <a:off x="6668262" y="4169664"/>
+            <a:ext cx="685800" cy="384048"/>
           </a:xfrm>
           <a:prstGeom prst="rect">
             <a:avLst>
-              <a:gd name="adj" fmla="val 7692"/>
+              <a:gd name="adj" fmla="val 9524"/>
             </a:avLst>
           </a:prstGeom>
           <a:solidFill>
@@ -26924,14 +27812,14 @@
       </p:sp>
       <p:sp>
         <p:nvSpPr>
-          <p:cNvPr id="44" name="Text 42"/>
-          <p:cNvSpPr/>
-          <p:nvPr/>
-        </p:nvSpPr>
-        <p:spPr>
-          <a:xfrm>
-            <a:off x="5581498" y="4169664"/>
-            <a:ext cx="676656" cy="475488"/>
+          <p:cNvPr id="46" name="Text 44"/>
+          <p:cNvSpPr/>
+          <p:nvPr/>
+        </p:nvSpPr>
+        <p:spPr>
+          <a:xfrm>
+            <a:off x="6668262" y="4169664"/>
+            <a:ext cx="685800" cy="384048"/>
           </a:xfrm>
           <a:prstGeom prst="rect">
             <a:avLst/>
@@ -26955,7 +27843,7 @@
                 <a:ea typeface="Trebuchet MS" pitchFamily="34" charset="-122"/>
                 <a:cs typeface="Trebuchet MS" pitchFamily="34" charset="-120"/>
               </a:rPr>
-              <a:t>h</a:t>
+              <a:t>l</a:t>
             </a:r>
             <a:endParaRPr lang="en-US" sz="900" dirty="0"/>
           </a:p>
@@ -26963,18 +27851,18 @@
       </p:sp>
       <p:sp>
         <p:nvSpPr>
-          <p:cNvPr id="45" name="Shape 43"/>
-          <p:cNvSpPr/>
-          <p:nvPr/>
-        </p:nvSpPr>
-        <p:spPr>
-          <a:xfrm>
-            <a:off x="6307531" y="4169664"/>
-            <a:ext cx="676656" cy="475488"/>
+          <p:cNvPr id="47" name="Shape 45"/>
+          <p:cNvSpPr/>
+          <p:nvPr/>
+        </p:nvSpPr>
+        <p:spPr>
+          <a:xfrm>
+            <a:off x="7576947" y="4169664"/>
+            <a:ext cx="685800" cy="384048"/>
           </a:xfrm>
           <a:prstGeom prst="rect">
             <a:avLst>
-              <a:gd name="adj" fmla="val 7692"/>
+              <a:gd name="adj" fmla="val 9524"/>
             </a:avLst>
           </a:prstGeom>
           <a:solidFill>
@@ -26990,146 +27878,14 @@
       </p:sp>
       <p:sp>
         <p:nvSpPr>
-          <p:cNvPr id="46" name="Text 44"/>
-          <p:cNvSpPr/>
-          <p:nvPr/>
-        </p:nvSpPr>
-        <p:spPr>
-          <a:xfrm>
-            <a:off x="6307531" y="4169664"/>
-            <a:ext cx="676656" cy="475488"/>
-          </a:xfrm>
-          <a:prstGeom prst="rect">
-            <a:avLst/>
-          </a:prstGeom>
-          <a:noFill/>
-          <a:ln/>
-        </p:spPr>
-        <p:txBody>
-          <a:bodyPr wrap="square" lIns="0" tIns="0" rIns="0" bIns="0" rtlCol="0" anchor="ctr"/>
-          <a:lstStyle/>
-          <a:p>
-            <a:pPr algn="ctr" indent="0" marL="0">
-              <a:buNone/>
-            </a:pPr>
-            <a:r>
-              <a:rPr lang="en-US" sz="900" b="1" dirty="0">
-                <a:solidFill>
-                  <a:srgbClr val="9D174D"/>
-                </a:solidFill>
-                <a:latin typeface="Trebuchet MS" pitchFamily="34" charset="0"/>
-                <a:ea typeface="Trebuchet MS" pitchFamily="34" charset="-122"/>
-                <a:cs typeface="Trebuchet MS" pitchFamily="34" charset="-120"/>
-              </a:rPr>
-              <a:t>o</a:t>
-            </a:r>
-            <a:endParaRPr lang="en-US" sz="900" dirty="0"/>
-          </a:p>
-        </p:txBody>
-      </p:sp>
-      <p:sp>
-        <p:nvSpPr>
-          <p:cNvPr id="47" name="Shape 45"/>
-          <p:cNvSpPr/>
-          <p:nvPr/>
-        </p:nvSpPr>
-        <p:spPr>
-          <a:xfrm>
-            <a:off x="7033565" y="4169664"/>
-            <a:ext cx="676656" cy="475488"/>
-          </a:xfrm>
-          <a:prstGeom prst="rect">
-            <a:avLst>
-              <a:gd name="adj" fmla="val 7692"/>
-            </a:avLst>
-          </a:prstGeom>
-          <a:solidFill>
-            <a:srgbClr val="FFFFFF"/>
-          </a:solidFill>
-          <a:ln w="12700">
-            <a:solidFill>
-              <a:srgbClr val="DB2777"/>
-            </a:solidFill>
-            <a:prstDash val="solid"/>
-          </a:ln>
-        </p:spPr>
-      </p:sp>
-      <p:sp>
-        <p:nvSpPr>
           <p:cNvPr id="48" name="Text 46"/>
           <p:cNvSpPr/>
           <p:nvPr/>
         </p:nvSpPr>
         <p:spPr>
           <a:xfrm>
-            <a:off x="7033565" y="4169664"/>
-            <a:ext cx="676656" cy="475488"/>
-          </a:xfrm>
-          <a:prstGeom prst="rect">
-            <a:avLst/>
-          </a:prstGeom>
-          <a:noFill/>
-          <a:ln/>
-        </p:spPr>
-        <p:txBody>
-          <a:bodyPr wrap="square" lIns="0" tIns="0" rIns="0" bIns="0" rtlCol="0" anchor="ctr"/>
-          <a:lstStyle/>
-          <a:p>
-            <a:pPr algn="ctr" indent="0" marL="0">
-              <a:buNone/>
-            </a:pPr>
-            <a:r>
-              <a:rPr lang="en-US" sz="900" b="1" dirty="0">
-                <a:solidFill>
-                  <a:srgbClr val="9D174D"/>
-                </a:solidFill>
-                <a:latin typeface="Trebuchet MS" pitchFamily="34" charset="0"/>
-                <a:ea typeface="Trebuchet MS" pitchFamily="34" charset="-122"/>
-                <a:cs typeface="Trebuchet MS" pitchFamily="34" charset="-120"/>
-              </a:rPr>
-              <a:t>l</a:t>
-            </a:r>
-            <a:endParaRPr lang="en-US" sz="900" dirty="0"/>
-          </a:p>
-        </p:txBody>
-      </p:sp>
-      <p:sp>
-        <p:nvSpPr>
-          <p:cNvPr id="49" name="Shape 47"/>
-          <p:cNvSpPr/>
-          <p:nvPr/>
-        </p:nvSpPr>
-        <p:spPr>
-          <a:xfrm>
-            <a:off x="7759598" y="4169664"/>
-            <a:ext cx="676656" cy="475488"/>
-          </a:xfrm>
-          <a:prstGeom prst="rect">
-            <a:avLst>
-              <a:gd name="adj" fmla="val 7692"/>
-            </a:avLst>
-          </a:prstGeom>
-          <a:solidFill>
-            <a:srgbClr val="FFFFFF"/>
-          </a:solidFill>
-          <a:ln w="12700">
-            <a:solidFill>
-              <a:srgbClr val="DB2777"/>
-            </a:solidFill>
-            <a:prstDash val="solid"/>
-          </a:ln>
-        </p:spPr>
-      </p:sp>
-      <p:sp>
-        <p:nvSpPr>
-          <p:cNvPr id="50" name="Text 48"/>
-          <p:cNvSpPr/>
-          <p:nvPr/>
-        </p:nvSpPr>
-        <p:spPr>
-          <a:xfrm>
-            <a:off x="7759598" y="4169664"/>
-            <a:ext cx="676656" cy="475488"/>
+            <a:off x="7576947" y="4169664"/>
+            <a:ext cx="685800" cy="384048"/>
           </a:xfrm>
           <a:prstGeom prst="rect">
             <a:avLst/>
@@ -27584,7 +28340,7 @@
                 <a:ea typeface="Trebuchet MS" pitchFamily="34" charset="-122"/>
                 <a:cs typeface="Trebuchet MS" pitchFamily="34" charset="-120"/>
               </a:rPr>
-              <a:t>household</a:t>
+              <a:t>beholding</a:t>
             </a:r>
             <a:endParaRPr lang="en-US" sz="2800" dirty="0"/>
           </a:p>
@@ -28411,7 +29167,7 @@
                 <a:ea typeface="Trebuchet MS" pitchFamily="34" charset="-122"/>
                 <a:cs typeface="Trebuchet MS" pitchFamily="34" charset="-120"/>
               </a:rPr>
-              <a:t>household</a:t>
+              <a:t>beholding</a:t>
             </a:r>
             <a:endParaRPr lang="en-US" sz="2800" dirty="0"/>
           </a:p>
@@ -28491,7 +29247,7 @@
         </p:nvSpPr>
         <p:spPr>
           <a:xfrm>
-            <a:off x="2938272" y="2258568"/>
+            <a:off x="2221992" y="2258568"/>
             <a:ext cx="1828800" cy="292608"/>
           </a:xfrm>
           <a:prstGeom prst="rect">
@@ -28525,7 +29281,7 @@
         </p:nvSpPr>
         <p:spPr>
           <a:xfrm>
-            <a:off x="2938272" y="2258568"/>
+            <a:off x="2221992" y="2258568"/>
             <a:ext cx="1828800" cy="292608"/>
           </a:xfrm>
           <a:prstGeom prst="rect">
@@ -28550,7 +29306,7 @@
                 <a:ea typeface="Trebuchet MS" pitchFamily="34" charset="-122"/>
                 <a:cs typeface="Trebuchet MS" pitchFamily="34" charset="-120"/>
               </a:rPr>
-              <a:t>house</a:t>
+              <a:t>be</a:t>
             </a:r>
             <a:endParaRPr lang="en-US" sz="1300" dirty="0"/>
           </a:p>
@@ -28564,7 +29320,7 @@
         </p:nvSpPr>
         <p:spPr>
           <a:xfrm>
-            <a:off x="2938272" y="2569464"/>
+            <a:off x="2221992" y="2569464"/>
             <a:ext cx="1828800" cy="201168"/>
           </a:xfrm>
           <a:prstGeom prst="rect">
@@ -28589,7 +29345,7 @@
                 <a:ea typeface="Calibri" pitchFamily="34" charset="-122"/>
                 <a:cs typeface="Calibri" pitchFamily="34" charset="-120"/>
               </a:rPr>
-              <a:t>a home or dwelling</a:t>
+              <a:t>to make or cause</a:t>
             </a:r>
             <a:endParaRPr lang="en-US" sz="850" dirty="0"/>
           </a:p>
@@ -28603,7 +29359,7 @@
         </p:nvSpPr>
         <p:spPr>
           <a:xfrm>
-            <a:off x="5803392" y="2258568"/>
+            <a:off x="4370832" y="2258568"/>
             <a:ext cx="1828800" cy="292608"/>
           </a:xfrm>
           <a:prstGeom prst="rect">
@@ -28637,7 +29393,7 @@
         </p:nvSpPr>
         <p:spPr>
           <a:xfrm>
-            <a:off x="5803392" y="2258568"/>
+            <a:off x="4370832" y="2258568"/>
             <a:ext cx="1828800" cy="292608"/>
           </a:xfrm>
           <a:prstGeom prst="rect">
@@ -28676,7 +29432,7 @@
         </p:nvSpPr>
         <p:spPr>
           <a:xfrm>
-            <a:off x="5803392" y="2569464"/>
+            <a:off x="4370832" y="2569464"/>
             <a:ext cx="1828800" cy="201168"/>
           </a:xfrm>
           <a:prstGeom prst="rect">
@@ -28715,6 +29471,118 @@
         </p:nvSpPr>
         <p:spPr>
           <a:xfrm>
+            <a:off x="6519672" y="2258568"/>
+            <a:ext cx="1828800" cy="292608"/>
+          </a:xfrm>
+          <a:prstGeom prst="rect">
+            <a:avLst>
+              <a:gd name="adj" fmla="val 25000"/>
+            </a:avLst>
+          </a:prstGeom>
+          <a:solidFill>
+            <a:srgbClr val="FCE7F3"/>
+          </a:solidFill>
+          <a:ln w="19050">
+            <a:solidFill>
+              <a:srgbClr val="DB2777"/>
+            </a:solidFill>
+            <a:prstDash val="solid"/>
+          </a:ln>
+          <a:effectLst>
+            <a:outerShdw sx="100000" sy="100000" kx="0" ky="0" algn="bl" rotWithShape="0" blurRad="101600" dist="38100" dir="8100000">
+              <a:srgbClr val="000000">
+                <a:alpha val="12000"/>
+              </a:srgbClr>
+            </a:outerShdw>
+          </a:effectLst>
+        </p:spPr>
+      </p:sp>
+      <p:sp>
+        <p:nvSpPr>
+          <p:cNvPr id="23" name="Text 21"/>
+          <p:cNvSpPr/>
+          <p:nvPr/>
+        </p:nvSpPr>
+        <p:spPr>
+          <a:xfrm>
+            <a:off x="6519672" y="2258568"/>
+            <a:ext cx="1828800" cy="292608"/>
+          </a:xfrm>
+          <a:prstGeom prst="rect">
+            <a:avLst/>
+          </a:prstGeom>
+          <a:noFill/>
+          <a:ln/>
+        </p:spPr>
+        <p:txBody>
+          <a:bodyPr wrap="square" lIns="0" tIns="0" rIns="0" bIns="0" rtlCol="0" anchor="ctr"/>
+          <a:lstStyle/>
+          <a:p>
+            <a:pPr algn="ctr" indent="0" marL="0">
+              <a:buNone/>
+            </a:pPr>
+            <a:r>
+              <a:rPr lang="en-US" sz="1300" b="1" dirty="0">
+                <a:solidFill>
+                  <a:srgbClr val="9D174D"/>
+                </a:solidFill>
+                <a:latin typeface="Trebuchet MS" pitchFamily="34" charset="0"/>
+                <a:ea typeface="Trebuchet MS" pitchFamily="34" charset="-122"/>
+                <a:cs typeface="Trebuchet MS" pitchFamily="34" charset="-120"/>
+              </a:rPr>
+              <a:t>ing</a:t>
+            </a:r>
+            <a:endParaRPr lang="en-US" sz="1300" dirty="0"/>
+          </a:p>
+        </p:txBody>
+      </p:sp>
+      <p:sp>
+        <p:nvSpPr>
+          <p:cNvPr id="24" name="Text 22"/>
+          <p:cNvSpPr/>
+          <p:nvPr/>
+        </p:nvSpPr>
+        <p:spPr>
+          <a:xfrm>
+            <a:off x="6519672" y="2569464"/>
+            <a:ext cx="1828800" cy="201168"/>
+          </a:xfrm>
+          <a:prstGeom prst="rect">
+            <a:avLst/>
+          </a:prstGeom>
+          <a:noFill/>
+          <a:ln/>
+        </p:spPr>
+        <p:txBody>
+          <a:bodyPr wrap="square" lIns="0" tIns="0" rIns="0" bIns="0" rtlCol="0" anchor="t"/>
+          <a:lstStyle/>
+          <a:p>
+            <a:pPr algn="ctr" indent="0" marL="0">
+              <a:buNone/>
+            </a:pPr>
+            <a:r>
+              <a:rPr lang="en-US" sz="850" dirty="0">
+                <a:solidFill>
+                  <a:srgbClr val="475569"/>
+                </a:solidFill>
+                <a:latin typeface="Calibri" pitchFamily="34" charset="0"/>
+                <a:ea typeface="Calibri" pitchFamily="34" charset="-122"/>
+                <a:cs typeface="Calibri" pitchFamily="34" charset="-120"/>
+              </a:rPr>
+              <a:t>ongoing action</a:t>
+            </a:r>
+            <a:endParaRPr lang="en-US" sz="850" dirty="0"/>
+          </a:p>
+        </p:txBody>
+      </p:sp>
+      <p:sp>
+        <p:nvSpPr>
+          <p:cNvPr id="25" name="Shape 23"/>
+          <p:cNvSpPr/>
+          <p:nvPr/>
+        </p:nvSpPr>
+        <p:spPr>
+          <a:xfrm>
             <a:off x="365760" y="3273552"/>
             <a:ext cx="1371600" cy="658368"/>
           </a:xfrm>
@@ -28736,7 +29604,7 @@
       </p:sp>
       <p:sp>
         <p:nvSpPr>
-          <p:cNvPr id="23" name="Text 21"/>
+          <p:cNvPr id="26" name="Text 24"/>
           <p:cNvSpPr/>
           <p:nvPr/>
         </p:nvSpPr>
@@ -28775,7 +29643,7 @@
       </p:sp>
       <p:sp>
         <p:nvSpPr>
-          <p:cNvPr id="24" name="Shape 22"/>
+          <p:cNvPr id="27" name="Shape 25"/>
           <p:cNvSpPr/>
           <p:nvPr/>
         </p:nvSpPr>
@@ -28802,7 +29670,7 @@
       </p:sp>
       <p:sp>
         <p:nvSpPr>
-          <p:cNvPr id="25" name="Text 23"/>
+          <p:cNvPr id="28" name="Text 26"/>
           <p:cNvSpPr/>
           <p:nvPr/>
         </p:nvSpPr>
@@ -28841,7 +29709,7 @@
       </p:sp>
       <p:sp>
         <p:nvSpPr>
-          <p:cNvPr id="26" name="Shape 24"/>
+          <p:cNvPr id="29" name="Shape 27"/>
           <p:cNvSpPr/>
           <p:nvPr/>
         </p:nvSpPr>
@@ -28868,7 +29736,7 @@
       </p:sp>
       <p:sp>
         <p:nvSpPr>
-          <p:cNvPr id="27" name="Text 25"/>
+          <p:cNvPr id="30" name="Text 28"/>
           <p:cNvSpPr/>
           <p:nvPr/>
         </p:nvSpPr>
@@ -28907,7 +29775,7 @@
       </p:sp>
       <p:sp>
         <p:nvSpPr>
-          <p:cNvPr id="28" name="Shape 26"/>
+          <p:cNvPr id="31" name="Shape 29"/>
           <p:cNvSpPr/>
           <p:nvPr/>
         </p:nvSpPr>
@@ -28934,7 +29802,7 @@
       </p:sp>
       <p:sp>
         <p:nvSpPr>
-          <p:cNvPr id="29" name="Text 27"/>
+          <p:cNvPr id="32" name="Text 30"/>
           <p:cNvSpPr/>
           <p:nvPr/>
         </p:nvSpPr>
@@ -29396,7 +30264,7 @@
                 <a:ea typeface="Trebuchet MS" pitchFamily="34" charset="-122"/>
                 <a:cs typeface="Trebuchet MS" pitchFamily="34" charset="-120"/>
               </a:rPr>
-              <a:t>household</a:t>
+              <a:t>beholding</a:t>
             </a:r>
             <a:endParaRPr lang="en-US" sz="2800" dirty="0"/>
           </a:p>
@@ -29476,7 +30344,7 @@
         </p:nvSpPr>
         <p:spPr>
           <a:xfrm>
-            <a:off x="2938272" y="2258568"/>
+            <a:off x="2221992" y="2258568"/>
             <a:ext cx="1828800" cy="292608"/>
           </a:xfrm>
           <a:prstGeom prst="rect">
@@ -29510,7 +30378,7 @@
         </p:nvSpPr>
         <p:spPr>
           <a:xfrm>
-            <a:off x="2938272" y="2258568"/>
+            <a:off x="2221992" y="2258568"/>
             <a:ext cx="1828800" cy="292608"/>
           </a:xfrm>
           <a:prstGeom prst="rect">
@@ -29535,7 +30403,7 @@
                 <a:ea typeface="Trebuchet MS" pitchFamily="34" charset="-122"/>
                 <a:cs typeface="Trebuchet MS" pitchFamily="34" charset="-120"/>
               </a:rPr>
-              <a:t>house</a:t>
+              <a:t>be</a:t>
             </a:r>
             <a:endParaRPr lang="en-US" sz="1300" dirty="0"/>
           </a:p>
@@ -29549,7 +30417,7 @@
         </p:nvSpPr>
         <p:spPr>
           <a:xfrm>
-            <a:off x="2938272" y="2569464"/>
+            <a:off x="2221992" y="2569464"/>
             <a:ext cx="1828800" cy="201168"/>
           </a:xfrm>
           <a:prstGeom prst="rect">
@@ -29574,7 +30442,7 @@
                 <a:ea typeface="Calibri" pitchFamily="34" charset="-122"/>
                 <a:cs typeface="Calibri" pitchFamily="34" charset="-120"/>
               </a:rPr>
-              <a:t>a home or dwelling</a:t>
+              <a:t>to make or cause</a:t>
             </a:r>
             <a:endParaRPr lang="en-US" sz="850" dirty="0"/>
           </a:p>
@@ -29588,7 +30456,7 @@
         </p:nvSpPr>
         <p:spPr>
           <a:xfrm>
-            <a:off x="5803392" y="2258568"/>
+            <a:off x="4370832" y="2258568"/>
             <a:ext cx="1828800" cy="292608"/>
           </a:xfrm>
           <a:prstGeom prst="rect">
@@ -29622,7 +30490,7 @@
         </p:nvSpPr>
         <p:spPr>
           <a:xfrm>
-            <a:off x="5803392" y="2258568"/>
+            <a:off x="4370832" y="2258568"/>
             <a:ext cx="1828800" cy="292608"/>
           </a:xfrm>
           <a:prstGeom prst="rect">
@@ -29661,7 +30529,7 @@
         </p:nvSpPr>
         <p:spPr>
           <a:xfrm>
-            <a:off x="5803392" y="2569464"/>
+            <a:off x="4370832" y="2569464"/>
             <a:ext cx="1828800" cy="201168"/>
           </a:xfrm>
           <a:prstGeom prst="rect">
@@ -29700,6 +30568,118 @@
         </p:nvSpPr>
         <p:spPr>
           <a:xfrm>
+            <a:off x="6519672" y="2258568"/>
+            <a:ext cx="1828800" cy="292608"/>
+          </a:xfrm>
+          <a:prstGeom prst="rect">
+            <a:avLst>
+              <a:gd name="adj" fmla="val 25000"/>
+            </a:avLst>
+          </a:prstGeom>
+          <a:solidFill>
+            <a:srgbClr val="FCE7F3"/>
+          </a:solidFill>
+          <a:ln w="19050">
+            <a:solidFill>
+              <a:srgbClr val="DB2777"/>
+            </a:solidFill>
+            <a:prstDash val="solid"/>
+          </a:ln>
+          <a:effectLst>
+            <a:outerShdw sx="100000" sy="100000" kx="0" ky="0" algn="bl" rotWithShape="0" blurRad="101600" dist="38100" dir="8100000">
+              <a:srgbClr val="000000">
+                <a:alpha val="12000"/>
+              </a:srgbClr>
+            </a:outerShdw>
+          </a:effectLst>
+        </p:spPr>
+      </p:sp>
+      <p:sp>
+        <p:nvSpPr>
+          <p:cNvPr id="23" name="Text 21"/>
+          <p:cNvSpPr/>
+          <p:nvPr/>
+        </p:nvSpPr>
+        <p:spPr>
+          <a:xfrm>
+            <a:off x="6519672" y="2258568"/>
+            <a:ext cx="1828800" cy="292608"/>
+          </a:xfrm>
+          <a:prstGeom prst="rect">
+            <a:avLst/>
+          </a:prstGeom>
+          <a:noFill/>
+          <a:ln/>
+        </p:spPr>
+        <p:txBody>
+          <a:bodyPr wrap="square" lIns="0" tIns="0" rIns="0" bIns="0" rtlCol="0" anchor="ctr"/>
+          <a:lstStyle/>
+          <a:p>
+            <a:pPr algn="ctr" indent="0" marL="0">
+              <a:buNone/>
+            </a:pPr>
+            <a:r>
+              <a:rPr lang="en-US" sz="1300" b="1" dirty="0">
+                <a:solidFill>
+                  <a:srgbClr val="9D174D"/>
+                </a:solidFill>
+                <a:latin typeface="Trebuchet MS" pitchFamily="34" charset="0"/>
+                <a:ea typeface="Trebuchet MS" pitchFamily="34" charset="-122"/>
+                <a:cs typeface="Trebuchet MS" pitchFamily="34" charset="-120"/>
+              </a:rPr>
+              <a:t>ing</a:t>
+            </a:r>
+            <a:endParaRPr lang="en-US" sz="1300" dirty="0"/>
+          </a:p>
+        </p:txBody>
+      </p:sp>
+      <p:sp>
+        <p:nvSpPr>
+          <p:cNvPr id="24" name="Text 22"/>
+          <p:cNvSpPr/>
+          <p:nvPr/>
+        </p:nvSpPr>
+        <p:spPr>
+          <a:xfrm>
+            <a:off x="6519672" y="2569464"/>
+            <a:ext cx="1828800" cy="201168"/>
+          </a:xfrm>
+          <a:prstGeom prst="rect">
+            <a:avLst/>
+          </a:prstGeom>
+          <a:noFill/>
+          <a:ln/>
+        </p:spPr>
+        <p:txBody>
+          <a:bodyPr wrap="square" lIns="0" tIns="0" rIns="0" bIns="0" rtlCol="0" anchor="t"/>
+          <a:lstStyle/>
+          <a:p>
+            <a:pPr algn="ctr" indent="0" marL="0">
+              <a:buNone/>
+            </a:pPr>
+            <a:r>
+              <a:rPr lang="en-US" sz="850" dirty="0">
+                <a:solidFill>
+                  <a:srgbClr val="475569"/>
+                </a:solidFill>
+                <a:latin typeface="Calibri" pitchFamily="34" charset="0"/>
+                <a:ea typeface="Calibri" pitchFamily="34" charset="-122"/>
+                <a:cs typeface="Calibri" pitchFamily="34" charset="-120"/>
+              </a:rPr>
+              <a:t>ongoing action</a:t>
+            </a:r>
+            <a:endParaRPr lang="en-US" sz="850" dirty="0"/>
+          </a:p>
+        </p:txBody>
+      </p:sp>
+      <p:sp>
+        <p:nvSpPr>
+          <p:cNvPr id="25" name="Shape 23"/>
+          <p:cNvSpPr/>
+          <p:nvPr/>
+        </p:nvSpPr>
+        <p:spPr>
+          <a:xfrm>
             <a:off x="365760" y="3273552"/>
             <a:ext cx="1371600" cy="658368"/>
           </a:xfrm>
@@ -29721,7 +30701,7 @@
       </p:sp>
       <p:sp>
         <p:nvSpPr>
-          <p:cNvPr id="23" name="Text 21"/>
+          <p:cNvPr id="26" name="Text 24"/>
           <p:cNvSpPr/>
           <p:nvPr/>
         </p:nvSpPr>
@@ -29760,7 +30740,7 @@
       </p:sp>
       <p:sp>
         <p:nvSpPr>
-          <p:cNvPr id="24" name="Shape 22"/>
+          <p:cNvPr id="27" name="Shape 25"/>
           <p:cNvSpPr/>
           <p:nvPr/>
         </p:nvSpPr>
@@ -29787,13 +30767,13 @@
       </p:sp>
       <p:sp>
         <p:nvSpPr>
-          <p:cNvPr id="25" name="Shape 23"/>
-          <p:cNvSpPr/>
-          <p:nvPr/>
-        </p:nvSpPr>
-        <p:spPr>
-          <a:xfrm>
-            <a:off x="2999232" y="3364992"/>
+          <p:cNvPr id="28" name="Shape 26"/>
+          <p:cNvSpPr/>
+          <p:nvPr/>
+        </p:nvSpPr>
+        <p:spPr>
+          <a:xfrm>
+            <a:off x="2313432" y="3364992"/>
             <a:ext cx="1645920" cy="475488"/>
           </a:xfrm>
           <a:prstGeom prst="rect">
@@ -29814,13 +30794,13 @@
       </p:sp>
       <p:sp>
         <p:nvSpPr>
-          <p:cNvPr id="26" name="Text 24"/>
-          <p:cNvSpPr/>
-          <p:nvPr/>
-        </p:nvSpPr>
-        <p:spPr>
-          <a:xfrm>
-            <a:off x="2999232" y="3364992"/>
+          <p:cNvPr id="29" name="Text 27"/>
+          <p:cNvSpPr/>
+          <p:nvPr/>
+        </p:nvSpPr>
+        <p:spPr>
+          <a:xfrm>
+            <a:off x="2313432" y="3364992"/>
             <a:ext cx="1645920" cy="475488"/>
           </a:xfrm>
           <a:prstGeom prst="rect">
@@ -29845,7 +30825,7 @@
                 <a:ea typeface="Trebuchet MS" pitchFamily="34" charset="-122"/>
                 <a:cs typeface="Trebuchet MS" pitchFamily="34" charset="-120"/>
               </a:rPr>
-              <a:t>house</a:t>
+              <a:t>be</a:t>
             </a:r>
             <a:endParaRPr lang="en-US" sz="1400" dirty="0"/>
           </a:p>
@@ -29853,14 +30833,14 @@
       </p:sp>
       <p:sp>
         <p:nvSpPr>
-          <p:cNvPr id="27" name="Text 25"/>
-          <p:cNvSpPr/>
-          <p:nvPr/>
-        </p:nvSpPr>
-        <p:spPr>
-          <a:xfrm>
-            <a:off x="4645152" y="3364992"/>
-            <a:ext cx="1097280" cy="475488"/>
+          <p:cNvPr id="30" name="Text 28"/>
+          <p:cNvSpPr/>
+          <p:nvPr/>
+        </p:nvSpPr>
+        <p:spPr>
+          <a:xfrm>
+            <a:off x="3959352" y="3364992"/>
+            <a:ext cx="411480" cy="475488"/>
           </a:xfrm>
           <a:prstGeom prst="rect">
             <a:avLst/>
@@ -29892,13 +30872,13 @@
       </p:sp>
       <p:sp>
         <p:nvSpPr>
-          <p:cNvPr id="28" name="Shape 26"/>
-          <p:cNvSpPr/>
-          <p:nvPr/>
-        </p:nvSpPr>
-        <p:spPr>
-          <a:xfrm>
-            <a:off x="5742432" y="3364992"/>
+          <p:cNvPr id="31" name="Shape 29"/>
+          <p:cNvSpPr/>
+          <p:nvPr/>
+        </p:nvSpPr>
+        <p:spPr>
+          <a:xfrm>
+            <a:off x="4370832" y="3364992"/>
             <a:ext cx="1645920" cy="475488"/>
           </a:xfrm>
           <a:prstGeom prst="rect">
@@ -29919,13 +30899,13 @@
       </p:sp>
       <p:sp>
         <p:nvSpPr>
-          <p:cNvPr id="29" name="Text 27"/>
-          <p:cNvSpPr/>
-          <p:nvPr/>
-        </p:nvSpPr>
-        <p:spPr>
-          <a:xfrm>
-            <a:off x="5742432" y="3364992"/>
+          <p:cNvPr id="32" name="Text 30"/>
+          <p:cNvSpPr/>
+          <p:nvPr/>
+        </p:nvSpPr>
+        <p:spPr>
+          <a:xfrm>
+            <a:off x="4370832" y="3364992"/>
             <a:ext cx="1645920" cy="475488"/>
           </a:xfrm>
           <a:prstGeom prst="rect">
@@ -29950,7 +30930,7 @@
                 <a:ea typeface="Trebuchet MS" pitchFamily="34" charset="-122"/>
                 <a:cs typeface="Trebuchet MS" pitchFamily="34" charset="-120"/>
               </a:rPr>
-              <a:t>hold</a:t>
+              <a:t>hol</a:t>
             </a:r>
             <a:endParaRPr lang="en-US" sz="1400" dirty="0"/>
           </a:p>
@@ -29958,7 +30938,112 @@
       </p:sp>
       <p:sp>
         <p:nvSpPr>
-          <p:cNvPr id="30" name="Shape 28"/>
+          <p:cNvPr id="33" name="Text 31"/>
+          <p:cNvSpPr/>
+          <p:nvPr/>
+        </p:nvSpPr>
+        <p:spPr>
+          <a:xfrm>
+            <a:off x="6016752" y="3364992"/>
+            <a:ext cx="411480" cy="475488"/>
+          </a:xfrm>
+          <a:prstGeom prst="rect">
+            <a:avLst/>
+          </a:prstGeom>
+          <a:noFill/>
+          <a:ln/>
+        </p:spPr>
+        <p:txBody>
+          <a:bodyPr wrap="square" lIns="0" tIns="0" rIns="0" bIns="0" rtlCol="0" anchor="ctr"/>
+          <a:lstStyle/>
+          <a:p>
+            <a:pPr algn="ctr" indent="0" marL="0">
+              <a:buNone/>
+            </a:pPr>
+            <a:r>
+              <a:rPr lang="en-US" sz="1600" b="1" dirty="0">
+                <a:solidFill>
+                  <a:srgbClr val="0D9488"/>
+                </a:solidFill>
+                <a:latin typeface="Trebuchet MS" pitchFamily="34" charset="0"/>
+                <a:ea typeface="Trebuchet MS" pitchFamily="34" charset="-122"/>
+                <a:cs typeface="Trebuchet MS" pitchFamily="34" charset="-120"/>
+              </a:rPr>
+              <a:t>·</a:t>
+            </a:r>
+            <a:endParaRPr lang="en-US" sz="1600" dirty="0"/>
+          </a:p>
+        </p:txBody>
+      </p:sp>
+      <p:sp>
+        <p:nvSpPr>
+          <p:cNvPr id="34" name="Shape 32"/>
+          <p:cNvSpPr/>
+          <p:nvPr/>
+        </p:nvSpPr>
+        <p:spPr>
+          <a:xfrm>
+            <a:off x="6428232" y="3364992"/>
+            <a:ext cx="1645920" cy="475488"/>
+          </a:xfrm>
+          <a:prstGeom prst="rect">
+            <a:avLst>
+              <a:gd name="adj" fmla="val 9615"/>
+            </a:avLst>
+          </a:prstGeom>
+          <a:solidFill>
+            <a:srgbClr val="FFFFFF"/>
+          </a:solidFill>
+          <a:ln w="12700">
+            <a:solidFill>
+              <a:srgbClr val="0D9488"/>
+            </a:solidFill>
+            <a:prstDash val="solid"/>
+          </a:ln>
+        </p:spPr>
+      </p:sp>
+      <p:sp>
+        <p:nvSpPr>
+          <p:cNvPr id="35" name="Text 33"/>
+          <p:cNvSpPr/>
+          <p:nvPr/>
+        </p:nvSpPr>
+        <p:spPr>
+          <a:xfrm>
+            <a:off x="6428232" y="3364992"/>
+            <a:ext cx="1645920" cy="475488"/>
+          </a:xfrm>
+          <a:prstGeom prst="rect">
+            <a:avLst/>
+          </a:prstGeom>
+          <a:noFill/>
+          <a:ln/>
+        </p:spPr>
+        <p:txBody>
+          <a:bodyPr wrap="square" lIns="0" tIns="0" rIns="0" bIns="0" rtlCol="0" anchor="ctr"/>
+          <a:lstStyle/>
+          <a:p>
+            <a:pPr algn="ctr" indent="0" marL="0">
+              <a:buNone/>
+            </a:pPr>
+            <a:r>
+              <a:rPr lang="en-US" sz="1400" b="1" dirty="0">
+                <a:solidFill>
+                  <a:srgbClr val="0D9488"/>
+                </a:solidFill>
+                <a:latin typeface="Trebuchet MS" pitchFamily="34" charset="0"/>
+                <a:ea typeface="Trebuchet MS" pitchFamily="34" charset="-122"/>
+                <a:cs typeface="Trebuchet MS" pitchFamily="34" charset="-120"/>
+              </a:rPr>
+              <a:t>ding</a:t>
+            </a:r>
+            <a:endParaRPr lang="en-US" sz="1400" dirty="0"/>
+          </a:p>
+        </p:txBody>
+      </p:sp>
+      <p:sp>
+        <p:nvSpPr>
+          <p:cNvPr id="36" name="Shape 34"/>
           <p:cNvSpPr/>
           <p:nvPr/>
         </p:nvSpPr>
@@ -29985,7 +31070,7 @@
       </p:sp>
       <p:sp>
         <p:nvSpPr>
-          <p:cNvPr id="31" name="Text 29"/>
+          <p:cNvPr id="37" name="Text 35"/>
           <p:cNvSpPr/>
           <p:nvPr/>
         </p:nvSpPr>
@@ -30024,7 +31109,7 @@
       </p:sp>
       <p:sp>
         <p:nvSpPr>
-          <p:cNvPr id="32" name="Shape 30"/>
+          <p:cNvPr id="38" name="Shape 36"/>
           <p:cNvSpPr/>
           <p:nvPr/>
         </p:nvSpPr>
@@ -30051,7 +31136,7 @@
       </p:sp>
       <p:sp>
         <p:nvSpPr>
-          <p:cNvPr id="33" name="Text 31"/>
+          <p:cNvPr id="39" name="Text 37"/>
           <p:cNvSpPr/>
           <p:nvPr/>
         </p:nvSpPr>
@@ -30513,7 +31598,7 @@
                 <a:ea typeface="Trebuchet MS" pitchFamily="34" charset="-122"/>
                 <a:cs typeface="Trebuchet MS" pitchFamily="34" charset="-120"/>
               </a:rPr>
-              <a:t>household</a:t>
+              <a:t>beholding</a:t>
             </a:r>
             <a:endParaRPr lang="en-US" sz="2800" dirty="0"/>
           </a:p>
@@ -30593,7 +31678,7 @@
         </p:nvSpPr>
         <p:spPr>
           <a:xfrm>
-            <a:off x="2938272" y="2258568"/>
+            <a:off x="2221992" y="2258568"/>
             <a:ext cx="1828800" cy="292608"/>
           </a:xfrm>
           <a:prstGeom prst="rect">
@@ -30627,7 +31712,7 @@
         </p:nvSpPr>
         <p:spPr>
           <a:xfrm>
-            <a:off x="2938272" y="2258568"/>
+            <a:off x="2221992" y="2258568"/>
             <a:ext cx="1828800" cy="292608"/>
           </a:xfrm>
           <a:prstGeom prst="rect">
@@ -30652,7 +31737,7 @@
                 <a:ea typeface="Trebuchet MS" pitchFamily="34" charset="-122"/>
                 <a:cs typeface="Trebuchet MS" pitchFamily="34" charset="-120"/>
               </a:rPr>
-              <a:t>house</a:t>
+              <a:t>be</a:t>
             </a:r>
             <a:endParaRPr lang="en-US" sz="1300" dirty="0"/>
           </a:p>
@@ -30666,7 +31751,7 @@
         </p:nvSpPr>
         <p:spPr>
           <a:xfrm>
-            <a:off x="2938272" y="2569464"/>
+            <a:off x="2221992" y="2569464"/>
             <a:ext cx="1828800" cy="201168"/>
           </a:xfrm>
           <a:prstGeom prst="rect">
@@ -30691,7 +31776,7 @@
                 <a:ea typeface="Calibri" pitchFamily="34" charset="-122"/>
                 <a:cs typeface="Calibri" pitchFamily="34" charset="-120"/>
               </a:rPr>
-              <a:t>a home or dwelling</a:t>
+              <a:t>to make or cause</a:t>
             </a:r>
             <a:endParaRPr lang="en-US" sz="850" dirty="0"/>
           </a:p>
@@ -30705,7 +31790,7 @@
         </p:nvSpPr>
         <p:spPr>
           <a:xfrm>
-            <a:off x="5803392" y="2258568"/>
+            <a:off x="4370832" y="2258568"/>
             <a:ext cx="1828800" cy="292608"/>
           </a:xfrm>
           <a:prstGeom prst="rect">
@@ -30739,7 +31824,7 @@
         </p:nvSpPr>
         <p:spPr>
           <a:xfrm>
-            <a:off x="5803392" y="2258568"/>
+            <a:off x="4370832" y="2258568"/>
             <a:ext cx="1828800" cy="292608"/>
           </a:xfrm>
           <a:prstGeom prst="rect">
@@ -30778,7 +31863,7 @@
         </p:nvSpPr>
         <p:spPr>
           <a:xfrm>
-            <a:off x="5803392" y="2569464"/>
+            <a:off x="4370832" y="2569464"/>
             <a:ext cx="1828800" cy="201168"/>
           </a:xfrm>
           <a:prstGeom prst="rect">
@@ -30817,6 +31902,118 @@
         </p:nvSpPr>
         <p:spPr>
           <a:xfrm>
+            <a:off x="6519672" y="2258568"/>
+            <a:ext cx="1828800" cy="292608"/>
+          </a:xfrm>
+          <a:prstGeom prst="rect">
+            <a:avLst>
+              <a:gd name="adj" fmla="val 25000"/>
+            </a:avLst>
+          </a:prstGeom>
+          <a:solidFill>
+            <a:srgbClr val="FCE7F3"/>
+          </a:solidFill>
+          <a:ln w="19050">
+            <a:solidFill>
+              <a:srgbClr val="DB2777"/>
+            </a:solidFill>
+            <a:prstDash val="solid"/>
+          </a:ln>
+          <a:effectLst>
+            <a:outerShdw sx="100000" sy="100000" kx="0" ky="0" algn="bl" rotWithShape="0" blurRad="101600" dist="38100" dir="8100000">
+              <a:srgbClr val="000000">
+                <a:alpha val="12000"/>
+              </a:srgbClr>
+            </a:outerShdw>
+          </a:effectLst>
+        </p:spPr>
+      </p:sp>
+      <p:sp>
+        <p:nvSpPr>
+          <p:cNvPr id="23" name="Text 21"/>
+          <p:cNvSpPr/>
+          <p:nvPr/>
+        </p:nvSpPr>
+        <p:spPr>
+          <a:xfrm>
+            <a:off x="6519672" y="2258568"/>
+            <a:ext cx="1828800" cy="292608"/>
+          </a:xfrm>
+          <a:prstGeom prst="rect">
+            <a:avLst/>
+          </a:prstGeom>
+          <a:noFill/>
+          <a:ln/>
+        </p:spPr>
+        <p:txBody>
+          <a:bodyPr wrap="square" lIns="0" tIns="0" rIns="0" bIns="0" rtlCol="0" anchor="ctr"/>
+          <a:lstStyle/>
+          <a:p>
+            <a:pPr algn="ctr" indent="0" marL="0">
+              <a:buNone/>
+            </a:pPr>
+            <a:r>
+              <a:rPr lang="en-US" sz="1300" b="1" dirty="0">
+                <a:solidFill>
+                  <a:srgbClr val="9D174D"/>
+                </a:solidFill>
+                <a:latin typeface="Trebuchet MS" pitchFamily="34" charset="0"/>
+                <a:ea typeface="Trebuchet MS" pitchFamily="34" charset="-122"/>
+                <a:cs typeface="Trebuchet MS" pitchFamily="34" charset="-120"/>
+              </a:rPr>
+              <a:t>ing</a:t>
+            </a:r>
+            <a:endParaRPr lang="en-US" sz="1300" dirty="0"/>
+          </a:p>
+        </p:txBody>
+      </p:sp>
+      <p:sp>
+        <p:nvSpPr>
+          <p:cNvPr id="24" name="Text 22"/>
+          <p:cNvSpPr/>
+          <p:nvPr/>
+        </p:nvSpPr>
+        <p:spPr>
+          <a:xfrm>
+            <a:off x="6519672" y="2569464"/>
+            <a:ext cx="1828800" cy="201168"/>
+          </a:xfrm>
+          <a:prstGeom prst="rect">
+            <a:avLst/>
+          </a:prstGeom>
+          <a:noFill/>
+          <a:ln/>
+        </p:spPr>
+        <p:txBody>
+          <a:bodyPr wrap="square" lIns="0" tIns="0" rIns="0" bIns="0" rtlCol="0" anchor="t"/>
+          <a:lstStyle/>
+          <a:p>
+            <a:pPr algn="ctr" indent="0" marL="0">
+              <a:buNone/>
+            </a:pPr>
+            <a:r>
+              <a:rPr lang="en-US" sz="850" dirty="0">
+                <a:solidFill>
+                  <a:srgbClr val="475569"/>
+                </a:solidFill>
+                <a:latin typeface="Calibri" pitchFamily="34" charset="0"/>
+                <a:ea typeface="Calibri" pitchFamily="34" charset="-122"/>
+                <a:cs typeface="Calibri" pitchFamily="34" charset="-120"/>
+              </a:rPr>
+              <a:t>ongoing action</a:t>
+            </a:r>
+            <a:endParaRPr lang="en-US" sz="850" dirty="0"/>
+          </a:p>
+        </p:txBody>
+      </p:sp>
+      <p:sp>
+        <p:nvSpPr>
+          <p:cNvPr id="25" name="Shape 23"/>
+          <p:cNvSpPr/>
+          <p:nvPr/>
+        </p:nvSpPr>
+        <p:spPr>
+          <a:xfrm>
             <a:off x="365760" y="3273552"/>
             <a:ext cx="1371600" cy="658368"/>
           </a:xfrm>
@@ -30838,7 +32035,7 @@
       </p:sp>
       <p:sp>
         <p:nvSpPr>
-          <p:cNvPr id="23" name="Text 21"/>
+          <p:cNvPr id="26" name="Text 24"/>
           <p:cNvSpPr/>
           <p:nvPr/>
         </p:nvSpPr>
@@ -30877,7 +32074,7 @@
       </p:sp>
       <p:sp>
         <p:nvSpPr>
-          <p:cNvPr id="24" name="Shape 22"/>
+          <p:cNvPr id="27" name="Shape 25"/>
           <p:cNvSpPr/>
           <p:nvPr/>
         </p:nvSpPr>
@@ -30904,13 +32101,13 @@
       </p:sp>
       <p:sp>
         <p:nvSpPr>
-          <p:cNvPr id="25" name="Shape 23"/>
-          <p:cNvSpPr/>
-          <p:nvPr/>
-        </p:nvSpPr>
-        <p:spPr>
-          <a:xfrm>
-            <a:off x="2999232" y="3364992"/>
+          <p:cNvPr id="28" name="Shape 26"/>
+          <p:cNvSpPr/>
+          <p:nvPr/>
+        </p:nvSpPr>
+        <p:spPr>
+          <a:xfrm>
+            <a:off x="2313432" y="3364992"/>
             <a:ext cx="1645920" cy="475488"/>
           </a:xfrm>
           <a:prstGeom prst="rect">
@@ -30931,13 +32128,13 @@
       </p:sp>
       <p:sp>
         <p:nvSpPr>
-          <p:cNvPr id="26" name="Text 24"/>
-          <p:cNvSpPr/>
-          <p:nvPr/>
-        </p:nvSpPr>
-        <p:spPr>
-          <a:xfrm>
-            <a:off x="2999232" y="3364992"/>
+          <p:cNvPr id="29" name="Text 27"/>
+          <p:cNvSpPr/>
+          <p:nvPr/>
+        </p:nvSpPr>
+        <p:spPr>
+          <a:xfrm>
+            <a:off x="2313432" y="3364992"/>
             <a:ext cx="1645920" cy="475488"/>
           </a:xfrm>
           <a:prstGeom prst="rect">
@@ -30962,7 +32159,7 @@
                 <a:ea typeface="Trebuchet MS" pitchFamily="34" charset="-122"/>
                 <a:cs typeface="Trebuchet MS" pitchFamily="34" charset="-120"/>
               </a:rPr>
-              <a:t>house</a:t>
+              <a:t>be</a:t>
             </a:r>
             <a:endParaRPr lang="en-US" sz="1400" dirty="0"/>
           </a:p>
@@ -30970,14 +32167,14 @@
       </p:sp>
       <p:sp>
         <p:nvSpPr>
-          <p:cNvPr id="27" name="Text 25"/>
-          <p:cNvSpPr/>
-          <p:nvPr/>
-        </p:nvSpPr>
-        <p:spPr>
-          <a:xfrm>
-            <a:off x="4645152" y="3364992"/>
-            <a:ext cx="1097280" cy="475488"/>
+          <p:cNvPr id="30" name="Text 28"/>
+          <p:cNvSpPr/>
+          <p:nvPr/>
+        </p:nvSpPr>
+        <p:spPr>
+          <a:xfrm>
+            <a:off x="3959352" y="3364992"/>
+            <a:ext cx="411480" cy="475488"/>
           </a:xfrm>
           <a:prstGeom prst="rect">
             <a:avLst/>
@@ -31009,13 +32206,13 @@
       </p:sp>
       <p:sp>
         <p:nvSpPr>
-          <p:cNvPr id="28" name="Shape 26"/>
-          <p:cNvSpPr/>
-          <p:nvPr/>
-        </p:nvSpPr>
-        <p:spPr>
-          <a:xfrm>
-            <a:off x="5742432" y="3364992"/>
+          <p:cNvPr id="31" name="Shape 29"/>
+          <p:cNvSpPr/>
+          <p:nvPr/>
+        </p:nvSpPr>
+        <p:spPr>
+          <a:xfrm>
+            <a:off x="4370832" y="3364992"/>
             <a:ext cx="1645920" cy="475488"/>
           </a:xfrm>
           <a:prstGeom prst="rect">
@@ -31036,13 +32233,13 @@
       </p:sp>
       <p:sp>
         <p:nvSpPr>
-          <p:cNvPr id="29" name="Text 27"/>
-          <p:cNvSpPr/>
-          <p:nvPr/>
-        </p:nvSpPr>
-        <p:spPr>
-          <a:xfrm>
-            <a:off x="5742432" y="3364992"/>
+          <p:cNvPr id="32" name="Text 30"/>
+          <p:cNvSpPr/>
+          <p:nvPr/>
+        </p:nvSpPr>
+        <p:spPr>
+          <a:xfrm>
+            <a:off x="4370832" y="3364992"/>
             <a:ext cx="1645920" cy="475488"/>
           </a:xfrm>
           <a:prstGeom prst="rect">
@@ -31067,7 +32264,7 @@
                 <a:ea typeface="Trebuchet MS" pitchFamily="34" charset="-122"/>
                 <a:cs typeface="Trebuchet MS" pitchFamily="34" charset="-120"/>
               </a:rPr>
-              <a:t>hold</a:t>
+              <a:t>hol</a:t>
             </a:r>
             <a:endParaRPr lang="en-US" sz="1400" dirty="0"/>
           </a:p>
@@ -31075,7 +32272,112 @@
       </p:sp>
       <p:sp>
         <p:nvSpPr>
-          <p:cNvPr id="30" name="Shape 28"/>
+          <p:cNvPr id="33" name="Text 31"/>
+          <p:cNvSpPr/>
+          <p:nvPr/>
+        </p:nvSpPr>
+        <p:spPr>
+          <a:xfrm>
+            <a:off x="6016752" y="3364992"/>
+            <a:ext cx="411480" cy="475488"/>
+          </a:xfrm>
+          <a:prstGeom prst="rect">
+            <a:avLst/>
+          </a:prstGeom>
+          <a:noFill/>
+          <a:ln/>
+        </p:spPr>
+        <p:txBody>
+          <a:bodyPr wrap="square" lIns="0" tIns="0" rIns="0" bIns="0" rtlCol="0" anchor="ctr"/>
+          <a:lstStyle/>
+          <a:p>
+            <a:pPr algn="ctr" indent="0" marL="0">
+              <a:buNone/>
+            </a:pPr>
+            <a:r>
+              <a:rPr lang="en-US" sz="1600" b="1" dirty="0">
+                <a:solidFill>
+                  <a:srgbClr val="0D9488"/>
+                </a:solidFill>
+                <a:latin typeface="Trebuchet MS" pitchFamily="34" charset="0"/>
+                <a:ea typeface="Trebuchet MS" pitchFamily="34" charset="-122"/>
+                <a:cs typeface="Trebuchet MS" pitchFamily="34" charset="-120"/>
+              </a:rPr>
+              <a:t>·</a:t>
+            </a:r>
+            <a:endParaRPr lang="en-US" sz="1600" dirty="0"/>
+          </a:p>
+        </p:txBody>
+      </p:sp>
+      <p:sp>
+        <p:nvSpPr>
+          <p:cNvPr id="34" name="Shape 32"/>
+          <p:cNvSpPr/>
+          <p:nvPr/>
+        </p:nvSpPr>
+        <p:spPr>
+          <a:xfrm>
+            <a:off x="6428232" y="3364992"/>
+            <a:ext cx="1645920" cy="475488"/>
+          </a:xfrm>
+          <a:prstGeom prst="rect">
+            <a:avLst>
+              <a:gd name="adj" fmla="val 9615"/>
+            </a:avLst>
+          </a:prstGeom>
+          <a:solidFill>
+            <a:srgbClr val="FFFFFF"/>
+          </a:solidFill>
+          <a:ln w="12700">
+            <a:solidFill>
+              <a:srgbClr val="0D9488"/>
+            </a:solidFill>
+            <a:prstDash val="solid"/>
+          </a:ln>
+        </p:spPr>
+      </p:sp>
+      <p:sp>
+        <p:nvSpPr>
+          <p:cNvPr id="35" name="Text 33"/>
+          <p:cNvSpPr/>
+          <p:nvPr/>
+        </p:nvSpPr>
+        <p:spPr>
+          <a:xfrm>
+            <a:off x="6428232" y="3364992"/>
+            <a:ext cx="1645920" cy="475488"/>
+          </a:xfrm>
+          <a:prstGeom prst="rect">
+            <a:avLst/>
+          </a:prstGeom>
+          <a:noFill/>
+          <a:ln/>
+        </p:spPr>
+        <p:txBody>
+          <a:bodyPr wrap="square" lIns="0" tIns="0" rIns="0" bIns="0" rtlCol="0" anchor="ctr"/>
+          <a:lstStyle/>
+          <a:p>
+            <a:pPr algn="ctr" indent="0" marL="0">
+              <a:buNone/>
+            </a:pPr>
+            <a:r>
+              <a:rPr lang="en-US" sz="1400" b="1" dirty="0">
+                <a:solidFill>
+                  <a:srgbClr val="0D9488"/>
+                </a:solidFill>
+                <a:latin typeface="Trebuchet MS" pitchFamily="34" charset="0"/>
+                <a:ea typeface="Trebuchet MS" pitchFamily="34" charset="-122"/>
+                <a:cs typeface="Trebuchet MS" pitchFamily="34" charset="-120"/>
+              </a:rPr>
+              <a:t>ding</a:t>
+            </a:r>
+            <a:endParaRPr lang="en-US" sz="1400" dirty="0"/>
+          </a:p>
+        </p:txBody>
+      </p:sp>
+      <p:sp>
+        <p:nvSpPr>
+          <p:cNvPr id="36" name="Shape 34"/>
           <p:cNvSpPr/>
           <p:nvPr/>
         </p:nvSpPr>
@@ -31102,7 +32404,7 @@
       </p:sp>
       <p:sp>
         <p:nvSpPr>
-          <p:cNvPr id="31" name="Text 29"/>
+          <p:cNvPr id="37" name="Text 35"/>
           <p:cNvSpPr/>
           <p:nvPr/>
         </p:nvSpPr>
@@ -31141,18 +32443,18 @@
       </p:sp>
       <p:sp>
         <p:nvSpPr>
-          <p:cNvPr id="32" name="Shape 30"/>
+          <p:cNvPr id="38" name="Shape 36"/>
           <p:cNvSpPr/>
           <p:nvPr/>
         </p:nvSpPr>
         <p:spPr>
           <a:xfrm>
             <a:off x="1874520" y="4096512"/>
-            <a:ext cx="6903720" cy="804672"/>
+            <a:ext cx="6903720" cy="658368"/>
           </a:xfrm>
           <a:prstGeom prst="rect">
             <a:avLst>
-              <a:gd name="adj" fmla="val 6818"/>
+              <a:gd name="adj" fmla="val 8333"/>
             </a:avLst>
           </a:prstGeom>
           <a:solidFill>
@@ -31168,18 +32470,18 @@
       </p:sp>
       <p:sp>
         <p:nvSpPr>
-          <p:cNvPr id="33" name="Shape 31"/>
-          <p:cNvSpPr/>
-          <p:nvPr/>
-        </p:nvSpPr>
-        <p:spPr>
-          <a:xfrm>
-            <a:off x="2124837" y="4169664"/>
-            <a:ext cx="685800" cy="384048"/>
+          <p:cNvPr id="39" name="Shape 37"/>
+          <p:cNvSpPr/>
+          <p:nvPr/>
+        </p:nvSpPr>
+        <p:spPr>
+          <a:xfrm>
+            <a:off x="2023872" y="4169664"/>
+            <a:ext cx="685800" cy="475488"/>
           </a:xfrm>
           <a:prstGeom prst="rect">
             <a:avLst>
-              <a:gd name="adj" fmla="val 9524"/>
+              <a:gd name="adj" fmla="val 7692"/>
             </a:avLst>
           </a:prstGeom>
           <a:solidFill>
@@ -31195,14 +32497,14 @@
       </p:sp>
       <p:sp>
         <p:nvSpPr>
-          <p:cNvPr id="34" name="Text 32"/>
-          <p:cNvSpPr/>
-          <p:nvPr/>
-        </p:nvSpPr>
-        <p:spPr>
-          <a:xfrm>
-            <a:off x="2124837" y="4169664"/>
-            <a:ext cx="685800" cy="384048"/>
+          <p:cNvPr id="40" name="Text 38"/>
+          <p:cNvSpPr/>
+          <p:nvPr/>
+        </p:nvSpPr>
+        <p:spPr>
+          <a:xfrm>
+            <a:off x="2023872" y="4169664"/>
+            <a:ext cx="685800" cy="475488"/>
           </a:xfrm>
           <a:prstGeom prst="rect">
             <a:avLst/>
@@ -31226,7 +32528,7 @@
                 <a:ea typeface="Trebuchet MS" pitchFamily="34" charset="-122"/>
                 <a:cs typeface="Trebuchet MS" pitchFamily="34" charset="-120"/>
               </a:rPr>
-              <a:t>h</a:t>
+              <a:t>b</a:t>
             </a:r>
             <a:endParaRPr lang="en-US" sz="900" dirty="0"/>
           </a:p>
@@ -31234,18 +32536,18 @@
       </p:sp>
       <p:sp>
         <p:nvSpPr>
-          <p:cNvPr id="35" name="Shape 33"/>
-          <p:cNvSpPr/>
-          <p:nvPr/>
-        </p:nvSpPr>
-        <p:spPr>
-          <a:xfrm>
-            <a:off x="3033522" y="4169664"/>
-            <a:ext cx="685800" cy="384048"/>
+          <p:cNvPr id="41" name="Shape 39"/>
+          <p:cNvSpPr/>
+          <p:nvPr/>
+        </p:nvSpPr>
+        <p:spPr>
+          <a:xfrm>
+            <a:off x="2831592" y="4169664"/>
+            <a:ext cx="685800" cy="475488"/>
           </a:xfrm>
           <a:prstGeom prst="rect">
             <a:avLst>
-              <a:gd name="adj" fmla="val 9524"/>
+              <a:gd name="adj" fmla="val 7692"/>
             </a:avLst>
           </a:prstGeom>
           <a:solidFill>
@@ -31261,14 +32563,14 @@
       </p:sp>
       <p:sp>
         <p:nvSpPr>
-          <p:cNvPr id="36" name="Text 34"/>
-          <p:cNvSpPr/>
-          <p:nvPr/>
-        </p:nvSpPr>
-        <p:spPr>
-          <a:xfrm>
-            <a:off x="3033522" y="4169664"/>
-            <a:ext cx="685800" cy="384048"/>
+          <p:cNvPr id="42" name="Text 40"/>
+          <p:cNvSpPr/>
+          <p:nvPr/>
+        </p:nvSpPr>
+        <p:spPr>
+          <a:xfrm>
+            <a:off x="2831592" y="4169664"/>
+            <a:ext cx="685800" cy="475488"/>
           </a:xfrm>
           <a:prstGeom prst="rect">
             <a:avLst/>
@@ -31292,7 +32594,7 @@
                 <a:ea typeface="Trebuchet MS" pitchFamily="34" charset="-122"/>
                 <a:cs typeface="Trebuchet MS" pitchFamily="34" charset="-120"/>
               </a:rPr>
-              <a:t>ou</a:t>
+              <a:t>e</a:t>
             </a:r>
             <a:endParaRPr lang="en-US" sz="900" dirty="0"/>
           </a:p>
@@ -31300,18 +32602,18 @@
       </p:sp>
       <p:sp>
         <p:nvSpPr>
-          <p:cNvPr id="37" name="Shape 35"/>
-          <p:cNvSpPr/>
-          <p:nvPr/>
-        </p:nvSpPr>
-        <p:spPr>
-          <a:xfrm>
-            <a:off x="3942207" y="4169664"/>
-            <a:ext cx="685800" cy="384048"/>
+          <p:cNvPr id="43" name="Shape 41"/>
+          <p:cNvSpPr/>
+          <p:nvPr/>
+        </p:nvSpPr>
+        <p:spPr>
+          <a:xfrm>
+            <a:off x="3639312" y="4169664"/>
+            <a:ext cx="685800" cy="475488"/>
           </a:xfrm>
           <a:prstGeom prst="rect">
             <a:avLst>
-              <a:gd name="adj" fmla="val 9524"/>
+              <a:gd name="adj" fmla="val 7692"/>
             </a:avLst>
           </a:prstGeom>
           <a:solidFill>
@@ -31327,14 +32629,14 @@
       </p:sp>
       <p:sp>
         <p:nvSpPr>
-          <p:cNvPr id="38" name="Text 36"/>
-          <p:cNvSpPr/>
-          <p:nvPr/>
-        </p:nvSpPr>
-        <p:spPr>
-          <a:xfrm>
-            <a:off x="3942207" y="4169664"/>
-            <a:ext cx="685800" cy="384048"/>
+          <p:cNvPr id="44" name="Text 42"/>
+          <p:cNvSpPr/>
+          <p:nvPr/>
+        </p:nvSpPr>
+        <p:spPr>
+          <a:xfrm>
+            <a:off x="3639312" y="4169664"/>
+            <a:ext cx="685800" cy="475488"/>
           </a:xfrm>
           <a:prstGeom prst="rect">
             <a:avLst/>
@@ -31358,7 +32660,7 @@
                 <a:ea typeface="Trebuchet MS" pitchFamily="34" charset="-122"/>
                 <a:cs typeface="Trebuchet MS" pitchFamily="34" charset="-120"/>
               </a:rPr>
-              <a:t>se</a:t>
+              <a:t>h</a:t>
             </a:r>
             <a:endParaRPr lang="en-US" sz="900" dirty="0"/>
           </a:p>
@@ -31366,57 +32668,18 @@
       </p:sp>
       <p:sp>
         <p:nvSpPr>
-          <p:cNvPr id="39" name="Text 37"/>
-          <p:cNvSpPr/>
-          <p:nvPr/>
-        </p:nvSpPr>
-        <p:spPr>
-          <a:xfrm>
-            <a:off x="3942207" y="4572000"/>
-            <a:ext cx="685800" cy="219456"/>
-          </a:xfrm>
-          <a:prstGeom prst="rect">
-            <a:avLst/>
-          </a:prstGeom>
-          <a:noFill/>
-          <a:ln/>
-        </p:spPr>
-        <p:txBody>
-          <a:bodyPr wrap="square" lIns="0" tIns="0" rIns="0" bIns="0" rtlCol="0" anchor="t"/>
-          <a:lstStyle/>
-          <a:p>
-            <a:pPr algn="ctr" indent="0" marL="0">
-              <a:buNone/>
-            </a:pPr>
-            <a:r>
-              <a:rPr lang="en-US" sz="750" i="1" dirty="0">
-                <a:solidFill>
-                  <a:srgbClr val="94A3B8"/>
-                </a:solidFill>
-                <a:latin typeface="Calibri" pitchFamily="34" charset="0"/>
-                <a:ea typeface="Calibri" pitchFamily="34" charset="-122"/>
-                <a:cs typeface="Calibri" pitchFamily="34" charset="-120"/>
-              </a:rPr>
-              <a:t>/s/</a:t>
-            </a:r>
-            <a:endParaRPr lang="en-US" sz="750" dirty="0"/>
-          </a:p>
-        </p:txBody>
-      </p:sp>
-      <p:sp>
-        <p:nvSpPr>
-          <p:cNvPr id="40" name="Shape 38"/>
-          <p:cNvSpPr/>
-          <p:nvPr/>
-        </p:nvSpPr>
-        <p:spPr>
-          <a:xfrm>
-            <a:off x="4850892" y="4169664"/>
-            <a:ext cx="685800" cy="384048"/>
+          <p:cNvPr id="45" name="Shape 43"/>
+          <p:cNvSpPr/>
+          <p:nvPr/>
+        </p:nvSpPr>
+        <p:spPr>
+          <a:xfrm>
+            <a:off x="4447032" y="4169664"/>
+            <a:ext cx="685800" cy="475488"/>
           </a:xfrm>
           <a:prstGeom prst="rect">
             <a:avLst>
-              <a:gd name="adj" fmla="val 9524"/>
+              <a:gd name="adj" fmla="val 7692"/>
             </a:avLst>
           </a:prstGeom>
           <a:solidFill>
@@ -31432,14 +32695,14 @@
       </p:sp>
       <p:sp>
         <p:nvSpPr>
-          <p:cNvPr id="41" name="Text 39"/>
-          <p:cNvSpPr/>
-          <p:nvPr/>
-        </p:nvSpPr>
-        <p:spPr>
-          <a:xfrm>
-            <a:off x="4850892" y="4169664"/>
-            <a:ext cx="685800" cy="384048"/>
+          <p:cNvPr id="46" name="Text 44"/>
+          <p:cNvSpPr/>
+          <p:nvPr/>
+        </p:nvSpPr>
+        <p:spPr>
+          <a:xfrm>
+            <a:off x="4447032" y="4169664"/>
+            <a:ext cx="685800" cy="475488"/>
           </a:xfrm>
           <a:prstGeom prst="rect">
             <a:avLst/>
@@ -31463,7 +32726,7 @@
                 <a:ea typeface="Trebuchet MS" pitchFamily="34" charset="-122"/>
                 <a:cs typeface="Trebuchet MS" pitchFamily="34" charset="-120"/>
               </a:rPr>
-              <a:t>h</a:t>
+              <a:t>o</a:t>
             </a:r>
             <a:endParaRPr lang="en-US" sz="900" dirty="0"/>
           </a:p>
@@ -31471,18 +32734,18 @@
       </p:sp>
       <p:sp>
         <p:nvSpPr>
-          <p:cNvPr id="42" name="Shape 40"/>
-          <p:cNvSpPr/>
-          <p:nvPr/>
-        </p:nvSpPr>
-        <p:spPr>
-          <a:xfrm>
-            <a:off x="5759577" y="4169664"/>
-            <a:ext cx="685800" cy="384048"/>
+          <p:cNvPr id="47" name="Shape 45"/>
+          <p:cNvSpPr/>
+          <p:nvPr/>
+        </p:nvSpPr>
+        <p:spPr>
+          <a:xfrm>
+            <a:off x="5254752" y="4169664"/>
+            <a:ext cx="685800" cy="475488"/>
           </a:xfrm>
           <a:prstGeom prst="rect">
             <a:avLst>
-              <a:gd name="adj" fmla="val 9524"/>
+              <a:gd name="adj" fmla="val 7692"/>
             </a:avLst>
           </a:prstGeom>
           <a:solidFill>
@@ -31498,14 +32761,14 @@
       </p:sp>
       <p:sp>
         <p:nvSpPr>
-          <p:cNvPr id="43" name="Text 41"/>
-          <p:cNvSpPr/>
-          <p:nvPr/>
-        </p:nvSpPr>
-        <p:spPr>
-          <a:xfrm>
-            <a:off x="5759577" y="4169664"/>
-            <a:ext cx="685800" cy="384048"/>
+          <p:cNvPr id="48" name="Text 46"/>
+          <p:cNvSpPr/>
+          <p:nvPr/>
+        </p:nvSpPr>
+        <p:spPr>
+          <a:xfrm>
+            <a:off x="5254752" y="4169664"/>
+            <a:ext cx="685800" cy="475488"/>
           </a:xfrm>
           <a:prstGeom prst="rect">
             <a:avLst/>
@@ -31529,7 +32792,7 @@
                 <a:ea typeface="Trebuchet MS" pitchFamily="34" charset="-122"/>
                 <a:cs typeface="Trebuchet MS" pitchFamily="34" charset="-120"/>
               </a:rPr>
-              <a:t>o</a:t>
+              <a:t>l</a:t>
             </a:r>
             <a:endParaRPr lang="en-US" sz="900" dirty="0"/>
           </a:p>
@@ -31537,18 +32800,18 @@
       </p:sp>
       <p:sp>
         <p:nvSpPr>
-          <p:cNvPr id="44" name="Shape 42"/>
-          <p:cNvSpPr/>
-          <p:nvPr/>
-        </p:nvSpPr>
-        <p:spPr>
-          <a:xfrm>
-            <a:off x="6668262" y="4169664"/>
-            <a:ext cx="685800" cy="384048"/>
+          <p:cNvPr id="49" name="Shape 47"/>
+          <p:cNvSpPr/>
+          <p:nvPr/>
+        </p:nvSpPr>
+        <p:spPr>
+          <a:xfrm>
+            <a:off x="6062472" y="4169664"/>
+            <a:ext cx="685800" cy="475488"/>
           </a:xfrm>
           <a:prstGeom prst="rect">
             <a:avLst>
-              <a:gd name="adj" fmla="val 9524"/>
+              <a:gd name="adj" fmla="val 7692"/>
             </a:avLst>
           </a:prstGeom>
           <a:solidFill>
@@ -31564,14 +32827,14 @@
       </p:sp>
       <p:sp>
         <p:nvSpPr>
-          <p:cNvPr id="45" name="Text 43"/>
-          <p:cNvSpPr/>
-          <p:nvPr/>
-        </p:nvSpPr>
-        <p:spPr>
-          <a:xfrm>
-            <a:off x="6668262" y="4169664"/>
-            <a:ext cx="685800" cy="384048"/>
+          <p:cNvPr id="50" name="Text 48"/>
+          <p:cNvSpPr/>
+          <p:nvPr/>
+        </p:nvSpPr>
+        <p:spPr>
+          <a:xfrm>
+            <a:off x="6062472" y="4169664"/>
+            <a:ext cx="685800" cy="475488"/>
           </a:xfrm>
           <a:prstGeom prst="rect">
             <a:avLst/>
@@ -31595,7 +32858,7 @@
                 <a:ea typeface="Trebuchet MS" pitchFamily="34" charset="-122"/>
                 <a:cs typeface="Trebuchet MS" pitchFamily="34" charset="-120"/>
               </a:rPr>
-              <a:t>l</a:t>
+              <a:t>d</a:t>
             </a:r>
             <a:endParaRPr lang="en-US" sz="900" dirty="0"/>
           </a:p>
@@ -31603,18 +32866,18 @@
       </p:sp>
       <p:sp>
         <p:nvSpPr>
-          <p:cNvPr id="46" name="Shape 44"/>
-          <p:cNvSpPr/>
-          <p:nvPr/>
-        </p:nvSpPr>
-        <p:spPr>
-          <a:xfrm>
-            <a:off x="7576947" y="4169664"/>
-            <a:ext cx="685800" cy="384048"/>
+          <p:cNvPr id="51" name="Shape 49"/>
+          <p:cNvSpPr/>
+          <p:nvPr/>
+        </p:nvSpPr>
+        <p:spPr>
+          <a:xfrm>
+            <a:off x="6870192" y="4169664"/>
+            <a:ext cx="685800" cy="475488"/>
           </a:xfrm>
           <a:prstGeom prst="rect">
             <a:avLst>
-              <a:gd name="adj" fmla="val 9524"/>
+              <a:gd name="adj" fmla="val 7692"/>
             </a:avLst>
           </a:prstGeom>
           <a:solidFill>
@@ -31630,14 +32893,14 @@
       </p:sp>
       <p:sp>
         <p:nvSpPr>
-          <p:cNvPr id="47" name="Text 45"/>
-          <p:cNvSpPr/>
-          <p:nvPr/>
-        </p:nvSpPr>
-        <p:spPr>
-          <a:xfrm>
-            <a:off x="7576947" y="4169664"/>
-            <a:ext cx="685800" cy="384048"/>
+          <p:cNvPr id="52" name="Text 50"/>
+          <p:cNvSpPr/>
+          <p:nvPr/>
+        </p:nvSpPr>
+        <p:spPr>
+          <a:xfrm>
+            <a:off x="6870192" y="4169664"/>
+            <a:ext cx="685800" cy="475488"/>
           </a:xfrm>
           <a:prstGeom prst="rect">
             <a:avLst/>
@@ -31661,7 +32924,73 @@
                 <a:ea typeface="Trebuchet MS" pitchFamily="34" charset="-122"/>
                 <a:cs typeface="Trebuchet MS" pitchFamily="34" charset="-120"/>
               </a:rPr>
-              <a:t>d</a:t>
+              <a:t>i</a:t>
+            </a:r>
+            <a:endParaRPr lang="en-US" sz="900" dirty="0"/>
+          </a:p>
+        </p:txBody>
+      </p:sp>
+      <p:sp>
+        <p:nvSpPr>
+          <p:cNvPr id="53" name="Shape 51"/>
+          <p:cNvSpPr/>
+          <p:nvPr/>
+        </p:nvSpPr>
+        <p:spPr>
+          <a:xfrm>
+            <a:off x="7677912" y="4169664"/>
+            <a:ext cx="685800" cy="475488"/>
+          </a:xfrm>
+          <a:prstGeom prst="rect">
+            <a:avLst>
+              <a:gd name="adj" fmla="val 7692"/>
+            </a:avLst>
+          </a:prstGeom>
+          <a:solidFill>
+            <a:srgbClr val="FFFFFF"/>
+          </a:solidFill>
+          <a:ln w="12700">
+            <a:solidFill>
+              <a:srgbClr val="DB2777"/>
+            </a:solidFill>
+            <a:prstDash val="solid"/>
+          </a:ln>
+        </p:spPr>
+      </p:sp>
+      <p:sp>
+        <p:nvSpPr>
+          <p:cNvPr id="54" name="Text 52"/>
+          <p:cNvSpPr/>
+          <p:nvPr/>
+        </p:nvSpPr>
+        <p:spPr>
+          <a:xfrm>
+            <a:off x="7677912" y="4169664"/>
+            <a:ext cx="685800" cy="475488"/>
+          </a:xfrm>
+          <a:prstGeom prst="rect">
+            <a:avLst/>
+          </a:prstGeom>
+          <a:noFill/>
+          <a:ln/>
+        </p:spPr>
+        <p:txBody>
+          <a:bodyPr wrap="square" lIns="0" tIns="0" rIns="0" bIns="0" rtlCol="0" anchor="ctr"/>
+          <a:lstStyle/>
+          <a:p>
+            <a:pPr algn="ctr" indent="0" marL="0">
+              <a:buNone/>
+            </a:pPr>
+            <a:r>
+              <a:rPr lang="en-US" sz="900" b="1" dirty="0">
+                <a:solidFill>
+                  <a:srgbClr val="9D174D"/>
+                </a:solidFill>
+                <a:latin typeface="Trebuchet MS" pitchFamily="34" charset="0"/>
+                <a:ea typeface="Trebuchet MS" pitchFamily="34" charset="-122"/>
+                <a:cs typeface="Trebuchet MS" pitchFamily="34" charset="-120"/>
+              </a:rPr>
+              <a:t>ng</a:t>
             </a:r>
             <a:endParaRPr lang="en-US" sz="900" dirty="0"/>
           </a:p>
@@ -33768,7 +35097,7 @@
                 <a:ea typeface="Trebuchet MS" pitchFamily="34" charset="-122"/>
                 <a:cs typeface="Trebuchet MS" pitchFamily="34" charset="-120"/>
               </a:rPr>
-              <a:t>strong-</a:t>
+              <a:t>house-</a:t>
             </a:r>
             <a:endParaRPr lang="en-US" sz="1300" dirty="0"/>
           </a:p>
@@ -33921,7 +35250,7 @@
                 <a:ea typeface="Trebuchet MS" pitchFamily="34" charset="-122"/>
                 <a:cs typeface="Trebuchet MS" pitchFamily="34" charset="-120"/>
               </a:rPr>
-              <a:t>with-</a:t>
+              <a:t>strong-</a:t>
             </a:r>
             <a:endParaRPr lang="en-US" sz="1300" dirty="0"/>
           </a:p>
@@ -34010,7 +35339,7 @@
                 <a:ea typeface="Trebuchet MS" pitchFamily="34" charset="-122"/>
                 <a:cs typeface="Trebuchet MS" pitchFamily="34" charset="-120"/>
               </a:rPr>
-              <a:t>-en</a:t>
+              <a:t>-out</a:t>
             </a:r>
             <a:endParaRPr lang="en-US" sz="1300" dirty="0"/>
           </a:p>
@@ -34074,7 +35403,7 @@
                 <a:ea typeface="Trebuchet MS" pitchFamily="34" charset="-122"/>
                 <a:cs typeface="Trebuchet MS" pitchFamily="34" charset="-120"/>
               </a:rPr>
-              <a:t>up-</a:t>
+              <a:t>with-</a:t>
             </a:r>
             <a:endParaRPr lang="en-US" sz="1300" dirty="0"/>
           </a:p>
@@ -34163,7 +35492,7 @@
                 <a:ea typeface="Trebuchet MS" pitchFamily="34" charset="-122"/>
                 <a:cs typeface="Trebuchet MS" pitchFamily="34" charset="-120"/>
               </a:rPr>
-              <a:t>-out</a:t>
+              <a:t>-up</a:t>
             </a:r>
             <a:endParaRPr lang="en-US" sz="1300" dirty="0"/>
           </a:p>
@@ -34268,7 +35597,7 @@
                 <a:ea typeface="Trebuchet MS" pitchFamily="34" charset="-122"/>
                 <a:cs typeface="Trebuchet MS" pitchFamily="34" charset="-120"/>
               </a:rPr>
-              <a:t>behold</a:t>
+              <a:t>holder</a:t>
             </a:r>
             <a:endParaRPr lang="en-US" sz="1200" dirty="0"/>
           </a:p>
@@ -34334,7 +35663,7 @@
                 <a:ea typeface="Trebuchet MS" pitchFamily="34" charset="-122"/>
                 <a:cs typeface="Trebuchet MS" pitchFamily="34" charset="-120"/>
               </a:rPr>
-              <a:t>withhold</a:t>
+              <a:t>holding</a:t>
             </a:r>
             <a:endParaRPr lang="en-US" sz="1200" dirty="0"/>
           </a:p>
@@ -34400,7 +35729,7 @@
                 <a:ea typeface="Trebuchet MS" pitchFamily="34" charset="-122"/>
                 <a:cs typeface="Trebuchet MS" pitchFamily="34" charset="-120"/>
               </a:rPr>
-              <a:t>uphold</a:t>
+              <a:t>behold</a:t>
             </a:r>
             <a:endParaRPr lang="en-US" sz="1200" dirty="0"/>
           </a:p>
@@ -34466,7 +35795,7 @@
                 <a:ea typeface="Trebuchet MS" pitchFamily="34" charset="-122"/>
                 <a:cs typeface="Trebuchet MS" pitchFamily="34" charset="-120"/>
               </a:rPr>
-              <a:t>holder</a:t>
+              <a:t>withhold</a:t>
             </a:r>
             <a:endParaRPr lang="en-US" sz="1200" dirty="0"/>
           </a:p>
@@ -34532,7 +35861,7 @@
                 <a:ea typeface="Trebuchet MS" pitchFamily="34" charset="-122"/>
                 <a:cs typeface="Trebuchet MS" pitchFamily="34" charset="-120"/>
               </a:rPr>
-              <a:t>holding</a:t>
+              <a:t>household</a:t>
             </a:r>
             <a:endParaRPr lang="en-US" sz="1200" dirty="0"/>
           </a:p>
@@ -34598,7 +35927,7 @@
                 <a:ea typeface="Trebuchet MS" pitchFamily="34" charset="-122"/>
                 <a:cs typeface="Trebuchet MS" pitchFamily="34" charset="-120"/>
               </a:rPr>
-              <a:t>household</a:t>
+              <a:t>stronghold</a:t>
             </a:r>
             <a:endParaRPr lang="en-US" sz="1200" dirty="0"/>
           </a:p>
@@ -34664,7 +35993,7 @@
                 <a:ea typeface="Trebuchet MS" pitchFamily="34" charset="-122"/>
                 <a:cs typeface="Trebuchet MS" pitchFamily="34" charset="-120"/>
               </a:rPr>
-              <a:t>stronghold</a:t>
+              <a:t>freeholder</a:t>
             </a:r>
             <a:endParaRPr lang="en-US" sz="1200" dirty="0"/>
           </a:p>
@@ -34730,7 +36059,7 @@
                 <a:ea typeface="Trebuchet MS" pitchFamily="34" charset="-122"/>
                 <a:cs typeface="Trebuchet MS" pitchFamily="34" charset="-120"/>
               </a:rPr>
-              <a:t>freehold</a:t>
+              <a:t>beholding</a:t>
             </a:r>
             <a:endParaRPr lang="en-US" sz="1200" dirty="0"/>
           </a:p>
@@ -35918,7 +37247,7 @@
                 <a:ea typeface="Calibri" pitchFamily="34" charset="-122"/>
                 <a:cs typeface="Calibri" pitchFamily="34" charset="-120"/>
               </a:rPr>
-              <a:t>1.  The word 'uphold' contains the root 'hold' meaning to grip or keep.</a:t>
+              <a:t>1.  The word 'withhold' contains the root 'hold'.</a:t>
             </a:r>
             <a:endParaRPr lang="en-US" sz="1300" dirty="0"/>
           </a:p>
@@ -36057,7 +37386,7 @@
                 <a:ea typeface="Calibri" pitchFamily="34" charset="-122"/>
                 <a:cs typeface="Calibri" pitchFamily="34" charset="-120"/>
               </a:rPr>
-              <a:t>2.  The prefix 'with' in 'withhold' means to add or give more.</a:t>
+              <a:t>2.  Adding '-er' to 'hold' makes the word 'holder', meaning a person who holds.</a:t>
             </a:r>
             <a:endParaRPr lang="en-US" sz="1300" dirty="0"/>
           </a:p>
@@ -36080,11 +37409,11 @@
             </a:avLst>
           </a:prstGeom>
           <a:solidFill>
-            <a:srgbClr val="FEE2E2"/>
-          </a:solidFill>
-          <a:ln w="12700">
-            <a:solidFill>
-              <a:srgbClr val="DC2626"/>
+            <a:srgbClr val="DCFCE7"/>
+          </a:solidFill>
+          <a:ln w="12700">
+            <a:solidFill>
+              <a:srgbClr val="16A34A"/>
             </a:solidFill>
             <a:prstDash val="solid"/>
           </a:ln>
@@ -36117,13 +37446,13 @@
             <a:r>
               <a:rPr lang="en-US" sz="1100" b="1" dirty="0">
                 <a:solidFill>
-                  <a:srgbClr val="DC2626"/>
+                  <a:srgbClr val="16A34A"/>
                 </a:solidFill>
                 <a:latin typeface="Trebuchet MS" pitchFamily="34" charset="0"/>
                 <a:ea typeface="Trebuchet MS" pitchFamily="34" charset="-122"/>
                 <a:cs typeface="Trebuchet MS" pitchFamily="34" charset="-120"/>
               </a:rPr>
-              <a:t>FALSE</a:t>
+              <a:t>TRUE</a:t>
             </a:r>
             <a:endParaRPr lang="en-US" sz="1100" dirty="0"/>
           </a:p>
@@ -36196,7 +37525,7 @@
                 <a:ea typeface="Calibri" pitchFamily="34" charset="-122"/>
                 <a:cs typeface="Calibri" pitchFamily="34" charset="-120"/>
               </a:rPr>
-              <a:t>3.  A 'stronghold' is a place that is heavily protected and hard to capture.</a:t>
+              <a:t>3.  A 'household' is a word that contains the root 'hold'.</a:t>
             </a:r>
             <a:endParaRPr lang="en-US" sz="1300" dirty="0"/>
           </a:p>
@@ -36335,7 +37664,7 @@
                 <a:ea typeface="Calibri" pitchFamily="34" charset="-122"/>
                 <a:cs typeface="Calibri" pitchFamily="34" charset="-120"/>
               </a:rPr>
-              <a:t>4.  'Household' refers to all the people living together in one home.</a:t>
+              <a:t>4.  The word 'behold' means to hide something from others.</a:t>
             </a:r>
             <a:endParaRPr lang="en-US" sz="1300" dirty="0"/>
           </a:p>
@@ -36358,11 +37687,11 @@
             </a:avLst>
           </a:prstGeom>
           <a:solidFill>
-            <a:srgbClr val="DCFCE7"/>
-          </a:solidFill>
-          <a:ln w="12700">
-            <a:solidFill>
-              <a:srgbClr val="16A34A"/>
+            <a:srgbClr val="FEE2E2"/>
+          </a:solidFill>
+          <a:ln w="12700">
+            <a:solidFill>
+              <a:srgbClr val="DC2626"/>
             </a:solidFill>
             <a:prstDash val="solid"/>
           </a:ln>
@@ -36395,13 +37724,13 @@
             <a:r>
               <a:rPr lang="en-US" sz="1100" b="1" dirty="0">
                 <a:solidFill>
-                  <a:srgbClr val="16A34A"/>
+                  <a:srgbClr val="DC2626"/>
                 </a:solidFill>
                 <a:latin typeface="Trebuchet MS" pitchFamily="34" charset="0"/>
                 <a:ea typeface="Trebuchet MS" pitchFamily="34" charset="-122"/>
                 <a:cs typeface="Trebuchet MS" pitchFamily="34" charset="-120"/>
               </a:rPr>
-              <a:t>TRUE</a:t>
+              <a:t>FALSE</a:t>
             </a:r>
             <a:endParaRPr lang="en-US" sz="1100" dirty="0"/>
           </a:p>
@@ -36474,7 +37803,7 @@
                 <a:ea typeface="Calibri" pitchFamily="34" charset="-122"/>
                 <a:cs typeface="Calibri" pitchFamily="34" charset="-120"/>
               </a:rPr>
-              <a:t>5.  The root 'hold' comes from the Latin language.</a:t>
+              <a:t>5.  The root 'hold' means to push away or throw.</a:t>
             </a:r>
             <a:endParaRPr lang="en-US" sz="1300" dirty="0"/>
           </a:p>
@@ -37008,7 +38337,7 @@
                 <a:ea typeface="Calibri" pitchFamily="34" charset="-122"/>
                 <a:cs typeface="Calibri" pitchFamily="34" charset="-120"/>
               </a:rPr>
-              <a:t>Origin: Old English: haldan</a:t>
+              <a:t>Origin: Latin: holdaz</a:t>
             </a:r>
             <a:endParaRPr lang="en-US" sz="1100" dirty="0"/>
           </a:p>
@@ -37113,7 +38442,7 @@
                 <a:ea typeface="Trebuchet MS" pitchFamily="34" charset="-122"/>
                 <a:cs typeface="Trebuchet MS" pitchFamily="34" charset="-120"/>
               </a:rPr>
-              <a:t>behold</a:t>
+              <a:t>holder</a:t>
             </a:r>
             <a:endParaRPr lang="en-US" sz="1300" dirty="0"/>
           </a:p>
@@ -37179,7 +38508,7 @@
                 <a:ea typeface="Trebuchet MS" pitchFamily="34" charset="-122"/>
                 <a:cs typeface="Trebuchet MS" pitchFamily="34" charset="-120"/>
               </a:rPr>
-              <a:t>withhold</a:t>
+              <a:t>holding</a:t>
             </a:r>
             <a:endParaRPr lang="en-US" sz="1300" dirty="0"/>
           </a:p>
@@ -37245,7 +38574,7 @@
                 <a:ea typeface="Trebuchet MS" pitchFamily="34" charset="-122"/>
                 <a:cs typeface="Trebuchet MS" pitchFamily="34" charset="-120"/>
               </a:rPr>
-              <a:t>uphold</a:t>
+              <a:t>behold</a:t>
             </a:r>
             <a:endParaRPr lang="en-US" sz="1300" dirty="0"/>
           </a:p>
@@ -37311,7 +38640,7 @@
                 <a:ea typeface="Trebuchet MS" pitchFamily="34" charset="-122"/>
                 <a:cs typeface="Trebuchet MS" pitchFamily="34" charset="-120"/>
               </a:rPr>
-              <a:t>holder</a:t>
+              <a:t>withhold</a:t>
             </a:r>
             <a:endParaRPr lang="en-US" sz="1300" dirty="0"/>
           </a:p>
@@ -37377,7 +38706,7 @@
                 <a:ea typeface="Trebuchet MS" pitchFamily="34" charset="-122"/>
                 <a:cs typeface="Trebuchet MS" pitchFamily="34" charset="-120"/>
               </a:rPr>
-              <a:t>holding</a:t>
+              <a:t>household</a:t>
             </a:r>
             <a:endParaRPr lang="en-US" sz="1300" dirty="0"/>
           </a:p>
@@ -37443,7 +38772,7 @@
                 <a:ea typeface="Trebuchet MS" pitchFamily="34" charset="-122"/>
                 <a:cs typeface="Trebuchet MS" pitchFamily="34" charset="-120"/>
               </a:rPr>
-              <a:t>household</a:t>
+              <a:t>stronghold</a:t>
             </a:r>
             <a:endParaRPr lang="en-US" sz="1300" dirty="0"/>
           </a:p>
@@ -37509,7 +38838,7 @@
                 <a:ea typeface="Trebuchet MS" pitchFamily="34" charset="-122"/>
                 <a:cs typeface="Trebuchet MS" pitchFamily="34" charset="-120"/>
               </a:rPr>
-              <a:t>stronghold</a:t>
+              <a:t>freeholder</a:t>
             </a:r>
             <a:endParaRPr lang="en-US" sz="1300" dirty="0"/>
           </a:p>
@@ -38447,7 +39776,7 @@
                 <a:ea typeface="Trebuchet MS" pitchFamily="34" charset="-122"/>
                 <a:cs typeface="Trebuchet MS" pitchFamily="34" charset="-120"/>
               </a:rPr>
-              <a:t>strong-</a:t>
+              <a:t>house-</a:t>
             </a:r>
             <a:endParaRPr lang="en-US" sz="1300" dirty="0"/>
           </a:p>
@@ -38600,7 +39929,7 @@
                 <a:ea typeface="Trebuchet MS" pitchFamily="34" charset="-122"/>
                 <a:cs typeface="Trebuchet MS" pitchFamily="34" charset="-120"/>
               </a:rPr>
-              <a:t>with-</a:t>
+              <a:t>strong-</a:t>
             </a:r>
             <a:endParaRPr lang="en-US" sz="1300" dirty="0"/>
           </a:p>
@@ -38689,7 +40018,7 @@
                 <a:ea typeface="Trebuchet MS" pitchFamily="34" charset="-122"/>
                 <a:cs typeface="Trebuchet MS" pitchFamily="34" charset="-120"/>
               </a:rPr>
-              <a:t>-en</a:t>
+              <a:t>-out</a:t>
             </a:r>
             <a:endParaRPr lang="en-US" sz="1300" dirty="0"/>
           </a:p>
@@ -38753,7 +40082,7 @@
                 <a:ea typeface="Trebuchet MS" pitchFamily="34" charset="-122"/>
                 <a:cs typeface="Trebuchet MS" pitchFamily="34" charset="-120"/>
               </a:rPr>
-              <a:t>up-</a:t>
+              <a:t>with-</a:t>
             </a:r>
             <a:endParaRPr lang="en-US" sz="1300" dirty="0"/>
           </a:p>
@@ -38842,7 +40171,7 @@
                 <a:ea typeface="Trebuchet MS" pitchFamily="34" charset="-122"/>
                 <a:cs typeface="Trebuchet MS" pitchFamily="34" charset="-120"/>
               </a:rPr>
-              <a:t>-out</a:t>
+              <a:t>-up</a:t>
             </a:r>
             <a:endParaRPr lang="en-US" sz="1300" dirty="0"/>
           </a:p>
@@ -39283,7 +40612,7 @@
                 <a:ea typeface="Trebuchet MS" pitchFamily="34" charset="-122"/>
                 <a:cs typeface="Trebuchet MS" pitchFamily="34" charset="-120"/>
               </a:rPr>
-              <a:t>behold</a:t>
+              <a:t>holder</a:t>
             </a:r>
             <a:endParaRPr lang="en-US" sz="1400" dirty="0"/>
           </a:p>
@@ -39687,7 +41016,7 @@
                 <a:ea typeface="Trebuchet MS" pitchFamily="34" charset="-122"/>
                 <a:cs typeface="Trebuchet MS" pitchFamily="34" charset="-120"/>
               </a:rPr>
-              <a:t>behold</a:t>
+              <a:t>holder</a:t>
             </a:r>
             <a:endParaRPr lang="en-US" sz="1200" dirty="0"/>
           </a:p>
@@ -39753,7 +41082,7 @@
                 <a:ea typeface="Calibri" pitchFamily="34" charset="-122"/>
                 <a:cs typeface="Calibri" pitchFamily="34" charset="-120"/>
               </a:rPr>
-              <a:t>Keeping something in your hands or in a particular place.</a:t>
+              <a:t>All the people who live together in one home.</a:t>
             </a:r>
             <a:endParaRPr lang="en-US" sz="1200" dirty="0"/>
           </a:p>
@@ -39826,7 +41155,7 @@
                 <a:ea typeface="Trebuchet MS" pitchFamily="34" charset="-122"/>
                 <a:cs typeface="Trebuchet MS" pitchFamily="34" charset="-120"/>
               </a:rPr>
-              <a:t>withhold</a:t>
+              <a:t>holding</a:t>
             </a:r>
             <a:endParaRPr lang="en-US" sz="1200" dirty="0"/>
           </a:p>
@@ -39892,7 +41221,7 @@
                 <a:ea typeface="Calibri" pitchFamily="34" charset="-122"/>
                 <a:cs typeface="Calibri" pitchFamily="34" charset="-120"/>
               </a:rPr>
-              <a:t>To support a rule, decision, or belief and keep it strong.</a:t>
+              <a:t>To look at or see something impressive or amazing.</a:t>
             </a:r>
             <a:endParaRPr lang="en-US" sz="1200" dirty="0"/>
           </a:p>
@@ -39965,7 +41294,7 @@
                 <a:ea typeface="Trebuchet MS" pitchFamily="34" charset="-122"/>
                 <a:cs typeface="Trebuchet MS" pitchFamily="34" charset="-120"/>
               </a:rPr>
-              <a:t>uphold</a:t>
+              <a:t>behold</a:t>
             </a:r>
             <a:endParaRPr lang="en-US" sz="1200" dirty="0"/>
           </a:p>
@@ -40031,7 +41360,7 @@
                 <a:ea typeface="Calibri" pitchFamily="34" charset="-122"/>
                 <a:cs typeface="Calibri" pitchFamily="34" charset="-120"/>
               </a:rPr>
-              <a:t>All the people who live together in one home.</a:t>
+              <a:t>A very safe and well-protected place that is hard to attack.</a:t>
             </a:r>
             <a:endParaRPr lang="en-US" sz="1200" dirty="0"/>
           </a:p>
@@ -40104,7 +41433,7 @@
                 <a:ea typeface="Trebuchet MS" pitchFamily="34" charset="-122"/>
                 <a:cs typeface="Trebuchet MS" pitchFamily="34" charset="-120"/>
               </a:rPr>
-              <a:t>holder</a:t>
+              <a:t>withhold</a:t>
             </a:r>
             <a:endParaRPr lang="en-US" sz="1200" dirty="0"/>
           </a:p>
@@ -40170,7 +41499,7 @@
                 <a:ea typeface="Calibri" pitchFamily="34" charset="-122"/>
                 <a:cs typeface="Calibri" pitchFamily="34" charset="-120"/>
               </a:rPr>
-              <a:t>A person or thing that holds or keeps something in place.</a:t>
+              <a:t>To keep something back and not give it to someone.</a:t>
             </a:r>
             <a:endParaRPr lang="en-US" sz="1200" dirty="0"/>
           </a:p>
@@ -40243,7 +41572,7 @@
                 <a:ea typeface="Trebuchet MS" pitchFamily="34" charset="-122"/>
                 <a:cs typeface="Trebuchet MS" pitchFamily="34" charset="-120"/>
               </a:rPr>
-              <a:t>holding</a:t>
+              <a:t>household</a:t>
             </a:r>
             <a:endParaRPr lang="en-US" sz="1200" dirty="0"/>
           </a:p>
@@ -40309,7 +41638,7 @@
                 <a:ea typeface="Calibri" pitchFamily="34" charset="-122"/>
                 <a:cs typeface="Calibri" pitchFamily="34" charset="-120"/>
               </a:rPr>
-              <a:t>To look at something and see it clearly, often something amazing.</a:t>
+              <a:t>A person or thing that holds or keeps something.</a:t>
             </a:r>
             <a:endParaRPr lang="en-US" sz="1200" dirty="0"/>
           </a:p>
@@ -40382,7 +41711,7 @@
                 <a:ea typeface="Trebuchet MS" pitchFamily="34" charset="-122"/>
                 <a:cs typeface="Trebuchet MS" pitchFamily="34" charset="-120"/>
               </a:rPr>
-              <a:t>household</a:t>
+              <a:t>stronghold</a:t>
             </a:r>
             <a:endParaRPr lang="en-US" sz="1200" dirty="0"/>
           </a:p>
@@ -40448,7 +41777,7 @@
                 <a:ea typeface="Calibri" pitchFamily="34" charset="-122"/>
                 <a:cs typeface="Calibri" pitchFamily="34" charset="-120"/>
               </a:rPr>
-              <a:t>A place that is very well protected and hard to attack.</a:t>
+              <a:t>A person who fully owns their land or property.</a:t>
             </a:r>
             <a:endParaRPr lang="en-US" sz="1200" dirty="0"/>
           </a:p>
@@ -40521,7 +41850,7 @@
                 <a:ea typeface="Trebuchet MS" pitchFamily="34" charset="-122"/>
                 <a:cs typeface="Trebuchet MS" pitchFamily="34" charset="-120"/>
               </a:rPr>
-              <a:t>stronghold</a:t>
+              <a:t>freeholder</a:t>
             </a:r>
             <a:endParaRPr lang="en-US" sz="1200" dirty="0"/>
           </a:p>
@@ -40587,7 +41916,7 @@
                 <a:ea typeface="Calibri" pitchFamily="34" charset="-122"/>
                 <a:cs typeface="Calibri" pitchFamily="34" charset="-120"/>
               </a:rPr>
-              <a:t>To keep something back and not give it to someone.</a:t>
+              <a:t>Keeping or gripping something in your hands or arms.</a:t>
             </a:r>
             <a:endParaRPr lang="en-US" sz="1200" dirty="0"/>
           </a:p>
@@ -41082,7 +42411,7 @@
                 <a:ea typeface="Calibri" pitchFamily="34" charset="-122"/>
                 <a:cs typeface="Calibri" pitchFamily="34" charset="-120"/>
               </a:rPr>
-              <a:t>The knight was asked to uphold the laws of the kingdom and treat everyone fairly.</a:t>
+              <a:t>The goalkeeper managed to keep a strong hold on the ball during the entire match.</a:t>
             </a:r>
             <a:endParaRPr lang="en-US" sz="1500" dirty="0"/>
           </a:p>
@@ -41246,7 +42575,7 @@
                 <a:ea typeface="Calibri" pitchFamily="34" charset="-122"/>
                 <a:cs typeface="Calibri" pitchFamily="34" charset="-120"/>
               </a:rPr>
-              <a:t>She used a colourful folder as a holder to keep all her important papers together.</a:t>
+              <a:t>She used a special holder to carry her water bottle on the long bushwalk.</a:t>
             </a:r>
             <a:endParaRPr lang="en-US" sz="1500" dirty="0"/>
           </a:p>
@@ -41410,7 +42739,7 @@
                 <a:ea typeface="Calibri" pitchFamily="34" charset="-122"/>
                 <a:cs typeface="Calibri" pitchFamily="34" charset="-120"/>
               </a:rPr>
-              <a:t>The ancient stronghold stood on top of the hill and had protected the village for hundreds of years.</a:t>
+              <a:t>The students were told to withhold their answers until everyone had finished thinking.</a:t>
             </a:r>
             <a:endParaRPr lang="en-US" sz="1500" dirty="0"/>
           </a:p>

--- a/output/wordlabs-hold-3day.pptx
+++ b/output/wordlabs-hold-3day.pptx
@@ -27357,11 +27357,11 @@
         <p:spPr>
           <a:xfrm>
             <a:off x="1874520" y="4096512"/>
-            <a:ext cx="6903720" cy="804672"/>
+            <a:ext cx="6903720" cy="658368"/>
           </a:xfrm>
           <a:prstGeom prst="rect">
             <a:avLst>
-              <a:gd name="adj" fmla="val 6818"/>
+              <a:gd name="adj" fmla="val 8333"/>
             </a:avLst>
           </a:prstGeom>
           <a:solidFill>
@@ -27383,12 +27383,12 @@
         </p:nvSpPr>
         <p:spPr>
           <a:xfrm>
-            <a:off x="2124837" y="4169664"/>
-            <a:ext cx="685800" cy="384048"/>
+            <a:off x="2023872" y="4169664"/>
+            <a:ext cx="685800" cy="475488"/>
           </a:xfrm>
           <a:prstGeom prst="rect">
             <a:avLst>
-              <a:gd name="adj" fmla="val 9524"/>
+              <a:gd name="adj" fmla="val 7692"/>
             </a:avLst>
           </a:prstGeom>
           <a:solidFill>
@@ -27410,8 +27410,8 @@
         </p:nvSpPr>
         <p:spPr>
           <a:xfrm>
-            <a:off x="2124837" y="4169664"/>
-            <a:ext cx="685800" cy="384048"/>
+            <a:off x="2023872" y="4169664"/>
+            <a:ext cx="685800" cy="475488"/>
           </a:xfrm>
           <a:prstGeom prst="rect">
             <a:avLst/>
@@ -27449,12 +27449,12 @@
         </p:nvSpPr>
         <p:spPr>
           <a:xfrm>
-            <a:off x="3033522" y="4169664"/>
-            <a:ext cx="685800" cy="384048"/>
+            <a:off x="2831592" y="4169664"/>
+            <a:ext cx="685800" cy="475488"/>
           </a:xfrm>
           <a:prstGeom prst="rect">
             <a:avLst>
-              <a:gd name="adj" fmla="val 9524"/>
+              <a:gd name="adj" fmla="val 7692"/>
             </a:avLst>
           </a:prstGeom>
           <a:solidFill>
@@ -27476,8 +27476,8 @@
         </p:nvSpPr>
         <p:spPr>
           <a:xfrm>
-            <a:off x="3033522" y="4169664"/>
-            <a:ext cx="685800" cy="384048"/>
+            <a:off x="2831592" y="4169664"/>
+            <a:ext cx="685800" cy="475488"/>
           </a:xfrm>
           <a:prstGeom prst="rect">
             <a:avLst/>
@@ -27509,57 +27509,18 @@
       </p:sp>
       <p:sp>
         <p:nvSpPr>
-          <p:cNvPr id="37" name="Text 35"/>
-          <p:cNvSpPr/>
-          <p:nvPr/>
-        </p:nvSpPr>
-        <p:spPr>
-          <a:xfrm>
-            <a:off x="3033522" y="4572000"/>
-            <a:ext cx="685800" cy="219456"/>
-          </a:xfrm>
-          <a:prstGeom prst="rect">
-            <a:avLst/>
-          </a:prstGeom>
-          <a:noFill/>
-          <a:ln/>
-        </p:spPr>
-        <p:txBody>
-          <a:bodyPr wrap="square" lIns="0" tIns="0" rIns="0" bIns="0" rtlCol="0" anchor="t"/>
-          <a:lstStyle/>
-          <a:p>
-            <a:pPr algn="ctr" indent="0" marL="0">
-              <a:buNone/>
-            </a:pPr>
-            <a:r>
-              <a:rPr lang="en-US" sz="750" i="1" dirty="0">
-                <a:solidFill>
-                  <a:srgbClr val="94A3B8"/>
-                </a:solidFill>
-                <a:latin typeface="Calibri" pitchFamily="34" charset="0"/>
-                <a:ea typeface="Calibri" pitchFamily="34" charset="-122"/>
-                <a:cs typeface="Calibri" pitchFamily="34" charset="-120"/>
-              </a:rPr>
-              <a:t>/ow/</a:t>
-            </a:r>
-            <a:endParaRPr lang="en-US" sz="750" dirty="0"/>
-          </a:p>
-        </p:txBody>
-      </p:sp>
-      <p:sp>
-        <p:nvSpPr>
-          <p:cNvPr id="38" name="Shape 36"/>
-          <p:cNvSpPr/>
-          <p:nvPr/>
-        </p:nvSpPr>
-        <p:spPr>
-          <a:xfrm>
-            <a:off x="3942207" y="4169664"/>
-            <a:ext cx="685800" cy="384048"/>
+          <p:cNvPr id="37" name="Shape 35"/>
+          <p:cNvSpPr/>
+          <p:nvPr/>
+        </p:nvSpPr>
+        <p:spPr>
+          <a:xfrm>
+            <a:off x="3639312" y="4169664"/>
+            <a:ext cx="685800" cy="475488"/>
           </a:xfrm>
           <a:prstGeom prst="rect">
             <a:avLst>
-              <a:gd name="adj" fmla="val 9524"/>
+              <a:gd name="adj" fmla="val 7692"/>
             </a:avLst>
           </a:prstGeom>
           <a:solidFill>
@@ -27575,14 +27536,14 @@
       </p:sp>
       <p:sp>
         <p:nvSpPr>
-          <p:cNvPr id="39" name="Text 37"/>
-          <p:cNvSpPr/>
-          <p:nvPr/>
-        </p:nvSpPr>
-        <p:spPr>
-          <a:xfrm>
-            <a:off x="3942207" y="4169664"/>
-            <a:ext cx="685800" cy="384048"/>
+          <p:cNvPr id="38" name="Text 36"/>
+          <p:cNvSpPr/>
+          <p:nvPr/>
+        </p:nvSpPr>
+        <p:spPr>
+          <a:xfrm>
+            <a:off x="3639312" y="4169664"/>
+            <a:ext cx="685800" cy="475488"/>
           </a:xfrm>
           <a:prstGeom prst="rect">
             <a:avLst/>
@@ -27614,80 +27575,41 @@
       </p:sp>
       <p:sp>
         <p:nvSpPr>
+          <p:cNvPr id="39" name="Shape 37"/>
+          <p:cNvSpPr/>
+          <p:nvPr/>
+        </p:nvSpPr>
+        <p:spPr>
+          <a:xfrm>
+            <a:off x="4447032" y="4169664"/>
+            <a:ext cx="685800" cy="475488"/>
+          </a:xfrm>
+          <a:prstGeom prst="rect">
+            <a:avLst>
+              <a:gd name="adj" fmla="val 7692"/>
+            </a:avLst>
+          </a:prstGeom>
+          <a:solidFill>
+            <a:srgbClr val="FFFFFF"/>
+          </a:solidFill>
+          <a:ln w="12700">
+            <a:solidFill>
+              <a:srgbClr val="DB2777"/>
+            </a:solidFill>
+            <a:prstDash val="solid"/>
+          </a:ln>
+        </p:spPr>
+      </p:sp>
+      <p:sp>
+        <p:nvSpPr>
           <p:cNvPr id="40" name="Text 38"/>
           <p:cNvSpPr/>
           <p:nvPr/>
         </p:nvSpPr>
         <p:spPr>
           <a:xfrm>
-            <a:off x="3942207" y="4572000"/>
-            <a:ext cx="685800" cy="219456"/>
-          </a:xfrm>
-          <a:prstGeom prst="rect">
-            <a:avLst/>
-          </a:prstGeom>
-          <a:noFill/>
-          <a:ln/>
-        </p:spPr>
-        <p:txBody>
-          <a:bodyPr wrap="square" lIns="0" tIns="0" rIns="0" bIns="0" rtlCol="0" anchor="t"/>
-          <a:lstStyle/>
-          <a:p>
-            <a:pPr algn="ctr" indent="0" marL="0">
-              <a:buNone/>
-            </a:pPr>
-            <a:r>
-              <a:rPr lang="en-US" sz="750" i="1" dirty="0">
-                <a:solidFill>
-                  <a:srgbClr val="94A3B8"/>
-                </a:solidFill>
-                <a:latin typeface="Calibri" pitchFamily="34" charset="0"/>
-                <a:ea typeface="Calibri" pitchFamily="34" charset="-122"/>
-                <a:cs typeface="Calibri" pitchFamily="34" charset="-120"/>
-              </a:rPr>
-              <a:t>/s/</a:t>
-            </a:r>
-            <a:endParaRPr lang="en-US" sz="750" dirty="0"/>
-          </a:p>
-        </p:txBody>
-      </p:sp>
-      <p:sp>
-        <p:nvSpPr>
-          <p:cNvPr id="41" name="Shape 39"/>
-          <p:cNvSpPr/>
-          <p:nvPr/>
-        </p:nvSpPr>
-        <p:spPr>
-          <a:xfrm>
-            <a:off x="4850892" y="4169664"/>
-            <a:ext cx="685800" cy="384048"/>
-          </a:xfrm>
-          <a:prstGeom prst="rect">
-            <a:avLst>
-              <a:gd name="adj" fmla="val 9524"/>
-            </a:avLst>
-          </a:prstGeom>
-          <a:solidFill>
-            <a:srgbClr val="FFFFFF"/>
-          </a:solidFill>
-          <a:ln w="12700">
-            <a:solidFill>
-              <a:srgbClr val="DB2777"/>
-            </a:solidFill>
-            <a:prstDash val="solid"/>
-          </a:ln>
-        </p:spPr>
-      </p:sp>
-      <p:sp>
-        <p:nvSpPr>
-          <p:cNvPr id="42" name="Text 40"/>
-          <p:cNvSpPr/>
-          <p:nvPr/>
-        </p:nvSpPr>
-        <p:spPr>
-          <a:xfrm>
-            <a:off x="4850892" y="4169664"/>
-            <a:ext cx="685800" cy="384048"/>
+            <a:off x="4447032" y="4169664"/>
+            <a:ext cx="685800" cy="475488"/>
           </a:xfrm>
           <a:prstGeom prst="rect">
             <a:avLst/>
@@ -27711,7 +27633,7 @@
                 <a:ea typeface="Trebuchet MS" pitchFamily="34" charset="-122"/>
                 <a:cs typeface="Trebuchet MS" pitchFamily="34" charset="-120"/>
               </a:rPr>
-              <a:t>h</a:t>
+              <a:t>e</a:t>
             </a:r>
             <a:endParaRPr lang="en-US" sz="900" dirty="0"/>
           </a:p>
@@ -27719,18 +27641,18 @@
       </p:sp>
       <p:sp>
         <p:nvSpPr>
-          <p:cNvPr id="43" name="Shape 41"/>
-          <p:cNvSpPr/>
-          <p:nvPr/>
-        </p:nvSpPr>
-        <p:spPr>
-          <a:xfrm>
-            <a:off x="5759577" y="4169664"/>
-            <a:ext cx="685800" cy="384048"/>
+          <p:cNvPr id="41" name="Shape 39"/>
+          <p:cNvSpPr/>
+          <p:nvPr/>
+        </p:nvSpPr>
+        <p:spPr>
+          <a:xfrm>
+            <a:off x="5254752" y="4169664"/>
+            <a:ext cx="685800" cy="475488"/>
           </a:xfrm>
           <a:prstGeom prst="rect">
             <a:avLst>
-              <a:gd name="adj" fmla="val 9524"/>
+              <a:gd name="adj" fmla="val 7692"/>
             </a:avLst>
           </a:prstGeom>
           <a:solidFill>
@@ -27746,14 +27668,14 @@
       </p:sp>
       <p:sp>
         <p:nvSpPr>
-          <p:cNvPr id="44" name="Text 42"/>
-          <p:cNvSpPr/>
-          <p:nvPr/>
-        </p:nvSpPr>
-        <p:spPr>
-          <a:xfrm>
-            <a:off x="5759577" y="4169664"/>
-            <a:ext cx="685800" cy="384048"/>
+          <p:cNvPr id="42" name="Text 40"/>
+          <p:cNvSpPr/>
+          <p:nvPr/>
+        </p:nvSpPr>
+        <p:spPr>
+          <a:xfrm>
+            <a:off x="5254752" y="4169664"/>
+            <a:ext cx="685800" cy="475488"/>
           </a:xfrm>
           <a:prstGeom prst="rect">
             <a:avLst/>
@@ -27777,7 +27699,7 @@
                 <a:ea typeface="Trebuchet MS" pitchFamily="34" charset="-122"/>
                 <a:cs typeface="Trebuchet MS" pitchFamily="34" charset="-120"/>
               </a:rPr>
-              <a:t>o</a:t>
+              <a:t>h</a:t>
             </a:r>
             <a:endParaRPr lang="en-US" sz="900" dirty="0"/>
           </a:p>
@@ -27785,18 +27707,18 @@
       </p:sp>
       <p:sp>
         <p:nvSpPr>
-          <p:cNvPr id="45" name="Shape 43"/>
-          <p:cNvSpPr/>
-          <p:nvPr/>
-        </p:nvSpPr>
-        <p:spPr>
-          <a:xfrm>
-            <a:off x="6668262" y="4169664"/>
-            <a:ext cx="685800" cy="384048"/>
+          <p:cNvPr id="43" name="Shape 41"/>
+          <p:cNvSpPr/>
+          <p:nvPr/>
+        </p:nvSpPr>
+        <p:spPr>
+          <a:xfrm>
+            <a:off x="6062472" y="4169664"/>
+            <a:ext cx="685800" cy="475488"/>
           </a:xfrm>
           <a:prstGeom prst="rect">
             <a:avLst>
-              <a:gd name="adj" fmla="val 9524"/>
+              <a:gd name="adj" fmla="val 7692"/>
             </a:avLst>
           </a:prstGeom>
           <a:solidFill>
@@ -27812,14 +27734,14 @@
       </p:sp>
       <p:sp>
         <p:nvSpPr>
-          <p:cNvPr id="46" name="Text 44"/>
-          <p:cNvSpPr/>
-          <p:nvPr/>
-        </p:nvSpPr>
-        <p:spPr>
-          <a:xfrm>
-            <a:off x="6668262" y="4169664"/>
-            <a:ext cx="685800" cy="384048"/>
+          <p:cNvPr id="44" name="Text 42"/>
+          <p:cNvSpPr/>
+          <p:nvPr/>
+        </p:nvSpPr>
+        <p:spPr>
+          <a:xfrm>
+            <a:off x="6062472" y="4169664"/>
+            <a:ext cx="685800" cy="475488"/>
           </a:xfrm>
           <a:prstGeom prst="rect">
             <a:avLst/>
@@ -27843,6 +27765,72 @@
                 <a:ea typeface="Trebuchet MS" pitchFamily="34" charset="-122"/>
                 <a:cs typeface="Trebuchet MS" pitchFamily="34" charset="-120"/>
               </a:rPr>
+              <a:t>o</a:t>
+            </a:r>
+            <a:endParaRPr lang="en-US" sz="900" dirty="0"/>
+          </a:p>
+        </p:txBody>
+      </p:sp>
+      <p:sp>
+        <p:nvSpPr>
+          <p:cNvPr id="45" name="Shape 43"/>
+          <p:cNvSpPr/>
+          <p:nvPr/>
+        </p:nvSpPr>
+        <p:spPr>
+          <a:xfrm>
+            <a:off x="6870192" y="4169664"/>
+            <a:ext cx="685800" cy="475488"/>
+          </a:xfrm>
+          <a:prstGeom prst="rect">
+            <a:avLst>
+              <a:gd name="adj" fmla="val 7692"/>
+            </a:avLst>
+          </a:prstGeom>
+          <a:solidFill>
+            <a:srgbClr val="FFFFFF"/>
+          </a:solidFill>
+          <a:ln w="12700">
+            <a:solidFill>
+              <a:srgbClr val="DB2777"/>
+            </a:solidFill>
+            <a:prstDash val="solid"/>
+          </a:ln>
+        </p:spPr>
+      </p:sp>
+      <p:sp>
+        <p:nvSpPr>
+          <p:cNvPr id="46" name="Text 44"/>
+          <p:cNvSpPr/>
+          <p:nvPr/>
+        </p:nvSpPr>
+        <p:spPr>
+          <a:xfrm>
+            <a:off x="6870192" y="4169664"/>
+            <a:ext cx="685800" cy="475488"/>
+          </a:xfrm>
+          <a:prstGeom prst="rect">
+            <a:avLst/>
+          </a:prstGeom>
+          <a:noFill/>
+          <a:ln/>
+        </p:spPr>
+        <p:txBody>
+          <a:bodyPr wrap="square" lIns="0" tIns="0" rIns="0" bIns="0" rtlCol="0" anchor="ctr"/>
+          <a:lstStyle/>
+          <a:p>
+            <a:pPr algn="ctr" indent="0" marL="0">
+              <a:buNone/>
+            </a:pPr>
+            <a:r>
+              <a:rPr lang="en-US" sz="900" b="1" dirty="0">
+                <a:solidFill>
+                  <a:srgbClr val="9D174D"/>
+                </a:solidFill>
+                <a:latin typeface="Trebuchet MS" pitchFamily="34" charset="0"/>
+                <a:ea typeface="Trebuchet MS" pitchFamily="34" charset="-122"/>
+                <a:cs typeface="Trebuchet MS" pitchFamily="34" charset="-120"/>
+              </a:rPr>
               <a:t>l</a:t>
             </a:r>
             <a:endParaRPr lang="en-US" sz="900" dirty="0"/>
@@ -27857,12 +27845,12 @@
         </p:nvSpPr>
         <p:spPr>
           <a:xfrm>
-            <a:off x="7576947" y="4169664"/>
-            <a:ext cx="685800" cy="384048"/>
+            <a:off x="7677912" y="4169664"/>
+            <a:ext cx="685800" cy="475488"/>
           </a:xfrm>
           <a:prstGeom prst="rect">
             <a:avLst>
-              <a:gd name="adj" fmla="val 9524"/>
+              <a:gd name="adj" fmla="val 7692"/>
             </a:avLst>
           </a:prstGeom>
           <a:solidFill>
@@ -27884,8 +27872,8 @@
         </p:nvSpPr>
         <p:spPr>
           <a:xfrm>
-            <a:off x="7576947" y="4169664"/>
-            <a:ext cx="685800" cy="384048"/>
+            <a:off x="7677912" y="4169664"/>
+            <a:ext cx="685800" cy="475488"/>
           </a:xfrm>
           <a:prstGeom prst="rect">
             <a:avLst/>
@@ -37386,7 +37374,7 @@
                 <a:ea typeface="Calibri" pitchFamily="34" charset="-122"/>
                 <a:cs typeface="Calibri" pitchFamily="34" charset="-120"/>
               </a:rPr>
-              <a:t>2.  Adding '-er' to 'hold' makes the word 'holder', meaning a person who holds.</a:t>
+              <a:t>2.  The root 'hold' means to push away or throw.</a:t>
             </a:r>
             <a:endParaRPr lang="en-US" sz="1300" dirty="0"/>
           </a:p>
@@ -37409,11 +37397,11 @@
             </a:avLst>
           </a:prstGeom>
           <a:solidFill>
-            <a:srgbClr val="DCFCE7"/>
-          </a:solidFill>
-          <a:ln w="12700">
-            <a:solidFill>
-              <a:srgbClr val="16A34A"/>
+            <a:srgbClr val="FEE2E2"/>
+          </a:solidFill>
+          <a:ln w="12700">
+            <a:solidFill>
+              <a:srgbClr val="DC2626"/>
             </a:solidFill>
             <a:prstDash val="solid"/>
           </a:ln>
@@ -37446,13 +37434,13 @@
             <a:r>
               <a:rPr lang="en-US" sz="1100" b="1" dirty="0">
                 <a:solidFill>
-                  <a:srgbClr val="16A34A"/>
+                  <a:srgbClr val="DC2626"/>
                 </a:solidFill>
                 <a:latin typeface="Trebuchet MS" pitchFamily="34" charset="0"/>
                 <a:ea typeface="Trebuchet MS" pitchFamily="34" charset="-122"/>
                 <a:cs typeface="Trebuchet MS" pitchFamily="34" charset="-120"/>
               </a:rPr>
-              <a:t>TRUE</a:t>
+              <a:t>FALSE</a:t>
             </a:r>
             <a:endParaRPr lang="en-US" sz="1100" dirty="0"/>
           </a:p>
@@ -37525,7 +37513,7 @@
                 <a:ea typeface="Calibri" pitchFamily="34" charset="-122"/>
                 <a:cs typeface="Calibri" pitchFamily="34" charset="-120"/>
               </a:rPr>
-              <a:t>3.  A 'household' is a word that contains the root 'hold'.</a:t>
+              <a:t>3.  The word 'behold' means to hide something from others.</a:t>
             </a:r>
             <a:endParaRPr lang="en-US" sz="1300" dirty="0"/>
           </a:p>
@@ -37548,11 +37536,11 @@
             </a:avLst>
           </a:prstGeom>
           <a:solidFill>
-            <a:srgbClr val="DCFCE7"/>
-          </a:solidFill>
-          <a:ln w="12700">
-            <a:solidFill>
-              <a:srgbClr val="16A34A"/>
+            <a:srgbClr val="FEE2E2"/>
+          </a:solidFill>
+          <a:ln w="12700">
+            <a:solidFill>
+              <a:srgbClr val="DC2626"/>
             </a:solidFill>
             <a:prstDash val="solid"/>
           </a:ln>
@@ -37585,13 +37573,13 @@
             <a:r>
               <a:rPr lang="en-US" sz="1100" b="1" dirty="0">
                 <a:solidFill>
-                  <a:srgbClr val="16A34A"/>
+                  <a:srgbClr val="DC2626"/>
                 </a:solidFill>
                 <a:latin typeface="Trebuchet MS" pitchFamily="34" charset="0"/>
                 <a:ea typeface="Trebuchet MS" pitchFamily="34" charset="-122"/>
                 <a:cs typeface="Trebuchet MS" pitchFamily="34" charset="-120"/>
               </a:rPr>
-              <a:t>TRUE</a:t>
+              <a:t>FALSE</a:t>
             </a:r>
             <a:endParaRPr lang="en-US" sz="1100" dirty="0"/>
           </a:p>
@@ -37664,7 +37652,7 @@
                 <a:ea typeface="Calibri" pitchFamily="34" charset="-122"/>
                 <a:cs typeface="Calibri" pitchFamily="34" charset="-120"/>
               </a:rPr>
-              <a:t>4.  The word 'behold' means to hide something from others.</a:t>
+              <a:t>4.  Adding '-er' to 'hold' makes the word 'holder', meaning a person who holds.</a:t>
             </a:r>
             <a:endParaRPr lang="en-US" sz="1300" dirty="0"/>
           </a:p>
@@ -37687,11 +37675,11 @@
             </a:avLst>
           </a:prstGeom>
           <a:solidFill>
-            <a:srgbClr val="FEE2E2"/>
-          </a:solidFill>
-          <a:ln w="12700">
-            <a:solidFill>
-              <a:srgbClr val="DC2626"/>
+            <a:srgbClr val="DCFCE7"/>
+          </a:solidFill>
+          <a:ln w="12700">
+            <a:solidFill>
+              <a:srgbClr val="16A34A"/>
             </a:solidFill>
             <a:prstDash val="solid"/>
           </a:ln>
@@ -37724,13 +37712,13 @@
             <a:r>
               <a:rPr lang="en-US" sz="1100" b="1" dirty="0">
                 <a:solidFill>
-                  <a:srgbClr val="DC2626"/>
+                  <a:srgbClr val="16A34A"/>
                 </a:solidFill>
                 <a:latin typeface="Trebuchet MS" pitchFamily="34" charset="0"/>
                 <a:ea typeface="Trebuchet MS" pitchFamily="34" charset="-122"/>
                 <a:cs typeface="Trebuchet MS" pitchFamily="34" charset="-120"/>
               </a:rPr>
-              <a:t>FALSE</a:t>
+              <a:t>TRUE</a:t>
             </a:r>
             <a:endParaRPr lang="en-US" sz="1100" dirty="0"/>
           </a:p>
@@ -37803,7 +37791,7 @@
                 <a:ea typeface="Calibri" pitchFamily="34" charset="-122"/>
                 <a:cs typeface="Calibri" pitchFamily="34" charset="-120"/>
               </a:rPr>
-              <a:t>5.  The root 'hold' means to push away or throw.</a:t>
+              <a:t>5.  A 'household' is a word that contains the root 'hold'.</a:t>
             </a:r>
             <a:endParaRPr lang="en-US" sz="1300" dirty="0"/>
           </a:p>
@@ -37826,11 +37814,11 @@
             </a:avLst>
           </a:prstGeom>
           <a:solidFill>
-            <a:srgbClr val="FEE2E2"/>
-          </a:solidFill>
-          <a:ln w="12700">
-            <a:solidFill>
-              <a:srgbClr val="DC2626"/>
+            <a:srgbClr val="DCFCE7"/>
+          </a:solidFill>
+          <a:ln w="12700">
+            <a:solidFill>
+              <a:srgbClr val="16A34A"/>
             </a:solidFill>
             <a:prstDash val="solid"/>
           </a:ln>
@@ -37863,13 +37851,13 @@
             <a:r>
               <a:rPr lang="en-US" sz="1100" b="1" dirty="0">
                 <a:solidFill>
-                  <a:srgbClr val="DC2626"/>
+                  <a:srgbClr val="16A34A"/>
                 </a:solidFill>
                 <a:latin typeface="Trebuchet MS" pitchFamily="34" charset="0"/>
                 <a:ea typeface="Trebuchet MS" pitchFamily="34" charset="-122"/>
                 <a:cs typeface="Trebuchet MS" pitchFamily="34" charset="-120"/>
               </a:rPr>
-              <a:t>FALSE</a:t>
+              <a:t>TRUE</a:t>
             </a:r>
             <a:endParaRPr lang="en-US" sz="1100" dirty="0"/>
           </a:p>
